--- a/Desenvolvimento Rapido de Aplicacoes em Python.pptx
+++ b/Desenvolvimento Rapido de Aplicacoes em Python.pptx
@@ -13,6 +13,7 @@
   <p:sldIdLst>
     <p:sldId id="834" r:id="rId5"/>
     <p:sldId id="835" r:id="rId6"/>
+    <p:sldId id="864" r:id="rId40"/>
     <p:sldId id="836" r:id="rId7"/>
     <p:sldId id="837" r:id="rId8"/>
     <p:sldId id="838" r:id="rId9"/>
@@ -37,6 +38,7 @@
     <p:sldId id="858" r:id="rId28"/>
     <p:sldId id="859" r:id="rId29"/>
     <p:sldId id="860" r:id="rId30"/>
+    <p:sldId id="865" r:id="rId41"/>
     <p:sldId id="861" r:id="rId31"/>
     <p:sldId id="862" r:id="rId32"/>
     <p:sldId id="863" r:id="rId33"/>
@@ -10288,7 +10290,7 @@
           <a:noFill/>
         </p:spPr>
         <p:txBody>
-          <a:bodyPr wrap="square" lIns="0" tIns="18288" rIns="0" bIns="18288" anchor="t">
+          <a:bodyPr wrap="none" lIns="0" tIns="18288" rIns="0" bIns="18288" anchor="t">
             <a:noAutofit/>
           </a:bodyPr>
           <a:lstStyle/>
@@ -10299,7 +10301,7 @@
                 <a:solidFill>
                   <a:srgbClr val="9AA5B1"/>
                 </a:solidFill>
-                <a:latin typeface="Consolas"/>
+                <a:latin typeface="Courier New" pitchFamily="49" charset="0"/>
               </a:rPr>
               <a:t>terminal</a:t>
             </a:r>
@@ -10323,7 +10325,7 @@
           <a:noFill/>
         </p:spPr>
         <p:txBody>
-          <a:bodyPr wrap="square" lIns="0" tIns="18288" rIns="0" bIns="18288" anchor="t">
+          <a:bodyPr wrap="none" lIns="0" tIns="18288" rIns="0" bIns="18288" anchor="t">
             <a:noAutofit/>
           </a:bodyPr>
           <a:lstStyle/>
@@ -10334,7 +10336,7 @@
                 <a:solidFill>
                   <a:srgbClr val="8B98A5"/>
                 </a:solidFill>
-                <a:latin typeface="Consolas"/>
+                <a:latin typeface="Courier New" pitchFamily="49" charset="0"/>
               </a:rPr>
               <a:t># sobe o servidor em http://127.0.0.1:8000</a:t>
             </a:r>
@@ -10346,7 +10348,7 @@
                 <a:solidFill>
                   <a:srgbClr val="7FD3F0"/>
                 </a:solidFill>
-                <a:latin typeface="Consolas"/>
+                <a:latin typeface="Courier New" pitchFamily="49" charset="0"/>
               </a:rPr>
               <a:t>python</a:t>
             </a:r>
@@ -10355,7 +10357,7 @@
                 <a:solidFill>
                   <a:srgbClr val="E6EDF3"/>
                 </a:solidFill>
-                <a:latin typeface="Consolas"/>
+                <a:latin typeface="Courier New" pitchFamily="49" charset="0"/>
               </a:rPr>
               <a:t> manage.py runserver</a:t>
             </a:r>
@@ -10367,7 +10369,7 @@
                 <a:solidFill>
                   <a:srgbClr val="E6EDF3"/>
                 </a:solidFill>
-                <a:latin typeface="Consolas"/>
+                <a:latin typeface="Courier New" pitchFamily="49" charset="0"/>
               </a:rPr>
               <a:t> </a:t>
             </a:r>
@@ -10379,7 +10381,7 @@
                 <a:solidFill>
                   <a:srgbClr val="8B98A5"/>
                 </a:solidFill>
-                <a:latin typeface="Consolas"/>
+                <a:latin typeface="Courier New" pitchFamily="49" charset="0"/>
               </a:rPr>
               <a:t># o models.py mudou? gere e aplique a migration</a:t>
             </a:r>
@@ -10391,7 +10393,7 @@
                 <a:solidFill>
                   <a:srgbClr val="7FD3F0"/>
                 </a:solidFill>
-                <a:latin typeface="Consolas"/>
+                <a:latin typeface="Courier New" pitchFamily="49" charset="0"/>
               </a:rPr>
               <a:t>python</a:t>
             </a:r>
@@ -10400,7 +10402,7 @@
                 <a:solidFill>
                   <a:srgbClr val="E6EDF3"/>
                 </a:solidFill>
-                <a:latin typeface="Consolas"/>
+                <a:latin typeface="Courier New" pitchFamily="49" charset="0"/>
               </a:rPr>
               <a:t> manage.py makemigrations academico</a:t>
             </a:r>
@@ -10412,7 +10414,7 @@
                 <a:solidFill>
                   <a:srgbClr val="7FD3F0"/>
                 </a:solidFill>
-                <a:latin typeface="Consolas"/>
+                <a:latin typeface="Courier New" pitchFamily="49" charset="0"/>
               </a:rPr>
               <a:t>python</a:t>
             </a:r>
@@ -10421,7 +10423,7 @@
                 <a:solidFill>
                   <a:srgbClr val="E6EDF3"/>
                 </a:solidFill>
-                <a:latin typeface="Consolas"/>
+                <a:latin typeface="Courier New" pitchFamily="49" charset="0"/>
               </a:rPr>
               <a:t> manage.py migrate</a:t>
             </a:r>
@@ -10433,7 +10435,7 @@
                 <a:solidFill>
                   <a:srgbClr val="E6EDF3"/>
                 </a:solidFill>
-                <a:latin typeface="Consolas"/>
+                <a:latin typeface="Courier New" pitchFamily="49" charset="0"/>
               </a:rPr>
               <a:t> </a:t>
             </a:r>
@@ -10445,7 +10447,7 @@
                 <a:solidFill>
                   <a:srgbClr val="8B98A5"/>
                 </a:solidFill>
-                <a:latin typeface="Consolas"/>
+                <a:latin typeface="Courier New" pitchFamily="49" charset="0"/>
               </a:rPr>
               <a:t># veja o SQL que o Django escreveu</a:t>
             </a:r>
@@ -10457,7 +10459,7 @@
                 <a:solidFill>
                   <a:srgbClr val="7FD3F0"/>
                 </a:solidFill>
-                <a:latin typeface="Consolas"/>
+                <a:latin typeface="Courier New" pitchFamily="49" charset="0"/>
               </a:rPr>
               <a:t>python</a:t>
             </a:r>
@@ -10466,7 +10468,7 @@
                 <a:solidFill>
                   <a:srgbClr val="E6EDF3"/>
                 </a:solidFill>
-                <a:latin typeface="Consolas"/>
+                <a:latin typeface="Courier New" pitchFamily="49" charset="0"/>
               </a:rPr>
               <a:t> manage.py sqlmigrate academico 0001</a:t>
             </a:r>
@@ -10478,7 +10480,7 @@
                 <a:solidFill>
                   <a:srgbClr val="E6EDF3"/>
                 </a:solidFill>
-                <a:latin typeface="Consolas"/>
+                <a:latin typeface="Courier New" pitchFamily="49" charset="0"/>
               </a:rPr>
               <a:t> </a:t>
             </a:r>
@@ -10490,7 +10492,7 @@
                 <a:solidFill>
                   <a:srgbClr val="8B98A5"/>
                 </a:solidFill>
-                <a:latin typeface="Consolas"/>
+                <a:latin typeface="Courier New" pitchFamily="49" charset="0"/>
               </a:rPr>
               <a:t># usuários de exemplo (admin / escola2024)</a:t>
             </a:r>
@@ -10502,7 +10504,7 @@
                 <a:solidFill>
                   <a:srgbClr val="7FD3F0"/>
                 </a:solidFill>
-                <a:latin typeface="Consolas"/>
+                <a:latin typeface="Courier New" pitchFamily="49" charset="0"/>
               </a:rPr>
               <a:t>python</a:t>
             </a:r>
@@ -10511,7 +10513,7 @@
                 <a:solidFill>
                   <a:srgbClr val="E6EDF3"/>
                 </a:solidFill>
-                <a:latin typeface="Consolas"/>
+                <a:latin typeface="Courier New" pitchFamily="49" charset="0"/>
               </a:rPr>
               <a:t> manage.py seed_demo</a:t>
             </a:r>
@@ -10698,11 +10700,11 @@
               <a:t>Esqueceu de ativar o .venv? O sintoma é </a:t>
             </a:r>
             <a:r>
-              <a:rPr sz="1400" b="0" i="0">
+              <a:rPr sz="1250" b="0" i="0">
                 <a:solidFill>
                   <a:srgbClr val="FFFFFF"/>
                 </a:solidFill>
-                <a:latin typeface="Consolas"/>
+                <a:latin typeface="Courier New" pitchFamily="49" charset="0"/>
               </a:rPr>
               <a:t>No module named 'django'</a:t>
             </a:r>
@@ -10796,11 +10798,11 @@
               <a:t>O servidor recarrega sozinho quando um </a:t>
             </a:r>
             <a:r>
-              <a:rPr sz="1400" b="0" i="0">
+              <a:rPr sz="1250" b="0" i="0">
                 <a:solidFill>
                   <a:srgbClr val="00397B"/>
                 </a:solidFill>
-                <a:latin typeface="Consolas"/>
+                <a:latin typeface="Courier New" pitchFamily="49" charset="0"/>
               </a:rPr>
               <a:t>.py</a:t>
             </a:r>
@@ -10986,13 +10988,30 @@
               <a:t>Por que </a:t>
             </a:r>
             <a:r>
+              <a:rPr sz="2000" b="1" i="0">
+                <a:solidFill>
+                  <a:srgbClr val="FFFFFF"/>
+                </a:solidFill>
+                <a:latin typeface="Courier New" pitchFamily="49" charset="0"/>
+              </a:rPr>
+              <a:t>nota1</a:t>
+            </a:r>
+            <a:r>
               <a:rPr sz="2200" b="1" i="0">
                 <a:solidFill>
                   <a:srgbClr val="FFFFFF"/>
                 </a:solidFill>
-                <a:latin typeface="Consolas"/>
-              </a:rPr>
-              <a:t>nota1</a:t>
+              </a:rPr>
+              <a:t> fica em </a:t>
+            </a:r>
+            <a:r>
+              <a:rPr sz="2000" b="1" i="0">
+                <a:solidFill>
+                  <a:srgbClr val="FFFFFF"/>
+                </a:solidFill>
+                <a:latin typeface="Courier New" pitchFamily="49" charset="0"/>
+              </a:rPr>
+              <a:t>inscricao</a:t>
             </a:r>
             <a:r>
               <a:rPr sz="2200" b="1" i="0">
@@ -11000,48 +11019,31 @@
                   <a:srgbClr val="FFFFFF"/>
                 </a:solidFill>
               </a:rPr>
-              <a:t> fica em </a:t>
+              <a:t>, e não em </a:t>
+            </a:r>
+            <a:r>
+              <a:rPr sz="2000" b="1" i="0">
+                <a:solidFill>
+                  <a:srgbClr val="FFFFFF"/>
+                </a:solidFill>
+                <a:latin typeface="Courier New" pitchFamily="49" charset="0"/>
+              </a:rPr>
+              <a:t>aluno</a:t>
             </a:r>
             <a:r>
               <a:rPr sz="2200" b="1" i="0">
                 <a:solidFill>
                   <a:srgbClr val="FFFFFF"/>
                 </a:solidFill>
-                <a:latin typeface="Consolas"/>
-              </a:rPr>
-              <a:t>inscricao</a:t>
-            </a:r>
-            <a:r>
-              <a:rPr sz="2200" b="1" i="0">
+              </a:rPr>
+              <a:t> nem em </a:t>
+            </a:r>
+            <a:r>
+              <a:rPr sz="2000" b="1" i="0">
                 <a:solidFill>
                   <a:srgbClr val="FFFFFF"/>
                 </a:solidFill>
-              </a:rPr>
-              <a:t>, e não em </a:t>
-            </a:r>
-            <a:r>
-              <a:rPr sz="2200" b="1" i="0">
-                <a:solidFill>
-                  <a:srgbClr val="FFFFFF"/>
-                </a:solidFill>
-                <a:latin typeface="Consolas"/>
-              </a:rPr>
-              <a:t>aluno</a:t>
-            </a:r>
-            <a:r>
-              <a:rPr sz="2200" b="1" i="0">
-                <a:solidFill>
-                  <a:srgbClr val="FFFFFF"/>
-                </a:solidFill>
-              </a:rPr>
-              <a:t> nem em </a:t>
-            </a:r>
-            <a:r>
-              <a:rPr sz="2200" b="1" i="0">
-                <a:solidFill>
-                  <a:srgbClr val="FFFFFF"/>
-                </a:solidFill>
-                <a:latin typeface="Consolas"/>
+                <a:latin typeface="Courier New" pitchFamily="49" charset="0"/>
               </a:rPr>
               <a:t>disciplina</a:t>
             </a:r>
@@ -11120,7 +11122,7 @@
           <a:noFill/>
         </p:spPr>
         <p:txBody>
-          <a:bodyPr wrap="square" lIns="0" tIns="18288" rIns="0" bIns="18288" anchor="t">
+          <a:bodyPr wrap="none" lIns="0" tIns="18288" rIns="0" bIns="18288" anchor="t">
             <a:noAutofit/>
           </a:bodyPr>
           <a:lstStyle/>
@@ -11131,7 +11133,7 @@
                 <a:solidFill>
                   <a:srgbClr val="00397B"/>
                 </a:solidFill>
-                <a:latin typeface="Consolas"/>
+                <a:latin typeface="Courier New" pitchFamily="49" charset="0"/>
               </a:rPr>
               <a:t>aluno</a:t>
             </a:r>
@@ -11155,7 +11157,7 @@
           <a:noFill/>
         </p:spPr>
         <p:txBody>
-          <a:bodyPr wrap="square" lIns="0" tIns="18288" rIns="0" bIns="18288" anchor="t">
+          <a:bodyPr wrap="none" lIns="0" tIns="18288" rIns="0" bIns="18288" anchor="t">
             <a:noAutofit/>
           </a:bodyPr>
           <a:lstStyle/>
@@ -11166,7 +11168,7 @@
                 <a:solidFill>
                   <a:srgbClr val="3A3A3A"/>
                 </a:solidFill>
-                <a:latin typeface="Consolas"/>
+                <a:latin typeface="Courier New" pitchFamily="49" charset="0"/>
               </a:rPr>
               <a:t>matricula</a:t>
             </a:r>
@@ -11178,7 +11180,7 @@
                 <a:solidFill>
                   <a:srgbClr val="3A3A3A"/>
                 </a:solidFill>
-                <a:latin typeface="Consolas"/>
+                <a:latin typeface="Courier New" pitchFamily="49" charset="0"/>
               </a:rPr>
               <a:t>nome</a:t>
             </a:r>
@@ -11190,7 +11192,7 @@
                 <a:solidFill>
                   <a:srgbClr val="3A3A3A"/>
                 </a:solidFill>
-                <a:latin typeface="Consolas"/>
+                <a:latin typeface="Courier New" pitchFamily="49" charset="0"/>
               </a:rPr>
               <a:t>email</a:t>
             </a:r>
@@ -11202,7 +11204,7 @@
                 <a:solidFill>
                   <a:srgbClr val="3A3A3A"/>
                 </a:solidFill>
-                <a:latin typeface="Consolas"/>
+                <a:latin typeface="Courier New" pitchFamily="49" charset="0"/>
               </a:rPr>
               <a:t>ativo</a:t>
             </a:r>
@@ -11273,7 +11275,7 @@
           <a:noFill/>
         </p:spPr>
         <p:txBody>
-          <a:bodyPr wrap="square" lIns="0" tIns="18288" rIns="0" bIns="18288" anchor="t">
+          <a:bodyPr wrap="none" lIns="0" tIns="18288" rIns="0" bIns="18288" anchor="t">
             <a:noAutofit/>
           </a:bodyPr>
           <a:lstStyle/>
@@ -11284,7 +11286,7 @@
                 <a:solidFill>
                   <a:srgbClr val="FFFFFF"/>
                 </a:solidFill>
-                <a:latin typeface="Consolas"/>
+                <a:latin typeface="Courier New" pitchFamily="49" charset="0"/>
               </a:rPr>
               <a:t>inscricao</a:t>
             </a:r>
@@ -11308,7 +11310,7 @@
           <a:noFill/>
         </p:spPr>
         <p:txBody>
-          <a:bodyPr wrap="square" lIns="0" tIns="18288" rIns="0" bIns="18288" anchor="t">
+          <a:bodyPr wrap="none" lIns="0" tIns="18288" rIns="0" bIns="18288" anchor="t">
             <a:noAutofit/>
           </a:bodyPr>
           <a:lstStyle/>
@@ -11319,7 +11321,7 @@
                 <a:solidFill>
                   <a:srgbClr val="FFFFFF"/>
                 </a:solidFill>
-                <a:latin typeface="Consolas"/>
+                <a:latin typeface="Courier New" pitchFamily="49" charset="0"/>
               </a:rPr>
               <a:t>aluno_id (FK)</a:t>
             </a:r>
@@ -11331,7 +11333,7 @@
                 <a:solidFill>
                   <a:srgbClr val="FFFFFF"/>
                 </a:solidFill>
-                <a:latin typeface="Consolas"/>
+                <a:latin typeface="Courier New" pitchFamily="49" charset="0"/>
               </a:rPr>
               <a:t>disciplina_id (FK)</a:t>
             </a:r>
@@ -11343,7 +11345,7 @@
                 <a:solidFill>
                   <a:srgbClr val="FFFFFF"/>
                 </a:solidFill>
-                <a:latin typeface="Consolas"/>
+                <a:latin typeface="Courier New" pitchFamily="49" charset="0"/>
               </a:rPr>
               <a:t>nota1, nota2</a:t>
             </a:r>
@@ -11414,7 +11416,7 @@
           <a:noFill/>
         </p:spPr>
         <p:txBody>
-          <a:bodyPr wrap="square" lIns="0" tIns="18288" rIns="0" bIns="18288" anchor="t">
+          <a:bodyPr wrap="none" lIns="0" tIns="18288" rIns="0" bIns="18288" anchor="t">
             <a:noAutofit/>
           </a:bodyPr>
           <a:lstStyle/>
@@ -11425,7 +11427,7 @@
                 <a:solidFill>
                   <a:srgbClr val="00397B"/>
                 </a:solidFill>
-                <a:latin typeface="Consolas"/>
+                <a:latin typeface="Courier New" pitchFamily="49" charset="0"/>
               </a:rPr>
               <a:t>disciplina</a:t>
             </a:r>
@@ -11449,7 +11451,7 @@
           <a:noFill/>
         </p:spPr>
         <p:txBody>
-          <a:bodyPr wrap="square" lIns="0" tIns="18288" rIns="0" bIns="18288" anchor="t">
+          <a:bodyPr wrap="none" lIns="0" tIns="18288" rIns="0" bIns="18288" anchor="t">
             <a:noAutofit/>
           </a:bodyPr>
           <a:lstStyle/>
@@ -11460,7 +11462,7 @@
                 <a:solidFill>
                   <a:srgbClr val="3A3A3A"/>
                 </a:solidFill>
-                <a:latin typeface="Consolas"/>
+                <a:latin typeface="Courier New" pitchFamily="49" charset="0"/>
               </a:rPr>
               <a:t>codigo</a:t>
             </a:r>
@@ -11472,7 +11474,7 @@
                 <a:solidFill>
                   <a:srgbClr val="3A3A3A"/>
                 </a:solidFill>
-                <a:latin typeface="Consolas"/>
+                <a:latin typeface="Courier New" pitchFamily="49" charset="0"/>
               </a:rPr>
               <a:t>nome</a:t>
             </a:r>
@@ -11484,7 +11486,7 @@
                 <a:solidFill>
                   <a:srgbClr val="3A3A3A"/>
                 </a:solidFill>
-                <a:latin typeface="Consolas"/>
+                <a:latin typeface="Courier New" pitchFamily="49" charset="0"/>
               </a:rPr>
               <a:t>carga_horaria</a:t>
             </a:r>
@@ -12087,7 +12089,7 @@
           <a:noFill/>
         </p:spPr>
         <p:txBody>
-          <a:bodyPr wrap="square" lIns="0" tIns="18288" rIns="0" bIns="18288" anchor="t">
+          <a:bodyPr wrap="none" lIns="0" tIns="18288" rIns="0" bIns="18288" anchor="t">
             <a:noAutofit/>
           </a:bodyPr>
           <a:lstStyle/>
@@ -12098,7 +12100,7 @@
                 <a:solidFill>
                   <a:srgbClr val="9AA5B1"/>
                 </a:solidFill>
-                <a:latin typeface="Consolas"/>
+                <a:latin typeface="Courier New" pitchFamily="49" charset="0"/>
               </a:rPr>
               <a:t>academico/models.py · TODO 1</a:t>
             </a:r>
@@ -12122,27 +12124,27 @@
           <a:noFill/>
         </p:spPr>
         <p:txBody>
-          <a:bodyPr wrap="square" lIns="0" tIns="18288" rIns="0" bIns="18288" anchor="t">
+          <a:bodyPr wrap="none" lIns="0" tIns="18288" rIns="0" bIns="18288" anchor="t">
             <a:noAutofit/>
           </a:bodyPr>
           <a:lstStyle/>
           <a:p>
             <a:pPr algn="l"/>
             <a:r>
-              <a:rPr sz="1400" b="0" i="0">
+              <a:rPr sz="1350" b="0" i="0">
                 <a:solidFill>
                   <a:srgbClr val="7FD3F0"/>
                 </a:solidFill>
-                <a:latin typeface="Consolas"/>
+                <a:latin typeface="Courier New" pitchFamily="49" charset="0"/>
               </a:rPr>
               <a:t>class</a:t>
             </a:r>
             <a:r>
-              <a:rPr sz="1400" b="0" i="0">
+              <a:rPr sz="1350" b="0" i="0">
                 <a:solidFill>
                   <a:srgbClr val="E6EDF3"/>
                 </a:solidFill>
-                <a:latin typeface="Consolas"/>
+                <a:latin typeface="Courier New" pitchFamily="49" charset="0"/>
               </a:rPr>
               <a:t> Aluno(models.Model):</a:t>
             </a:r>
@@ -12150,11 +12152,11 @@
           <a:p>
             <a:pPr algn="l"/>
             <a:r>
-              <a:rPr sz="1400" b="0" i="0">
+              <a:rPr sz="1350" b="0" i="0">
                 <a:solidFill>
                   <a:srgbClr val="E6EDF3"/>
                 </a:solidFill>
-                <a:latin typeface="Consolas"/>
+                <a:latin typeface="Courier New" pitchFamily="49" charset="0"/>
               </a:rPr>
               <a:t>    matricula = models.CharField(</a:t>
             </a:r>
@@ -12162,47 +12164,47 @@
           <a:p>
             <a:pPr algn="l"/>
             <a:r>
-              <a:rPr sz="1400" b="0" i="0">
+              <a:rPr sz="1350" b="0" i="0">
                 <a:solidFill>
                   <a:srgbClr val="E6EDF3"/>
                 </a:solidFill>
-                <a:latin typeface="Consolas"/>
+                <a:latin typeface="Courier New" pitchFamily="49" charset="0"/>
               </a:rPr>
               <a:t>        </a:t>
             </a:r>
             <a:r>
-              <a:rPr sz="1400" b="0" i="0">
+              <a:rPr sz="1350" b="0" i="0">
                 <a:solidFill>
                   <a:srgbClr val="F2C078"/>
                 </a:solidFill>
-                <a:latin typeface="Consolas"/>
+                <a:latin typeface="Courier New" pitchFamily="49" charset="0"/>
               </a:rPr>
               <a:t>"matricula"</a:t>
             </a:r>
             <a:r>
-              <a:rPr sz="1400" b="0" i="0">
+              <a:rPr sz="1350" b="0" i="0">
                 <a:solidFill>
                   <a:srgbClr val="E6EDF3"/>
                 </a:solidFill>
-                <a:latin typeface="Consolas"/>
+                <a:latin typeface="Courier New" pitchFamily="49" charset="0"/>
               </a:rPr>
               <a:t>, max_length=20, unique=</a:t>
             </a:r>
             <a:r>
-              <a:rPr sz="1400" b="0" i="0">
+              <a:rPr sz="1350" b="0" i="0">
                 <a:solidFill>
                   <a:srgbClr val="7FD3F0"/>
                 </a:solidFill>
-                <a:latin typeface="Consolas"/>
+                <a:latin typeface="Courier New" pitchFamily="49" charset="0"/>
               </a:rPr>
               <a:t>True</a:t>
             </a:r>
             <a:r>
-              <a:rPr sz="1400" b="0" i="0">
+              <a:rPr sz="1350" b="0" i="0">
                 <a:solidFill>
                   <a:srgbClr val="E6EDF3"/>
                 </a:solidFill>
-                <a:latin typeface="Consolas"/>
+                <a:latin typeface="Courier New" pitchFamily="49" charset="0"/>
               </a:rPr>
               <a:t>)</a:t>
             </a:r>
@@ -12210,29 +12212,29 @@
           <a:p>
             <a:pPr algn="l"/>
             <a:r>
-              <a:rPr sz="1400" b="0" i="0">
+              <a:rPr sz="1350" b="0" i="0">
                 <a:solidFill>
                   <a:srgbClr val="E6EDF3"/>
                 </a:solidFill>
-                <a:latin typeface="Consolas"/>
+                <a:latin typeface="Courier New" pitchFamily="49" charset="0"/>
               </a:rPr>
               <a:t>    nome = models.CharField(</a:t>
             </a:r>
             <a:r>
-              <a:rPr sz="1400" b="0" i="0">
+              <a:rPr sz="1350" b="0" i="0">
                 <a:solidFill>
                   <a:srgbClr val="F2C078"/>
                 </a:solidFill>
-                <a:latin typeface="Consolas"/>
+                <a:latin typeface="Courier New" pitchFamily="49" charset="0"/>
               </a:rPr>
               <a:t>"nome"</a:t>
             </a:r>
             <a:r>
-              <a:rPr sz="1400" b="0" i="0">
+              <a:rPr sz="1350" b="0" i="0">
                 <a:solidFill>
                   <a:srgbClr val="E6EDF3"/>
                 </a:solidFill>
-                <a:latin typeface="Consolas"/>
+                <a:latin typeface="Courier New" pitchFamily="49" charset="0"/>
               </a:rPr>
               <a:t>, max_length=120)</a:t>
             </a:r>
@@ -12240,47 +12242,47 @@
           <a:p>
             <a:pPr algn="l"/>
             <a:r>
-              <a:rPr sz="1400" b="0" i="0">
+              <a:rPr sz="1350" b="0" i="0">
                 <a:solidFill>
                   <a:srgbClr val="E6EDF3"/>
                 </a:solidFill>
-                <a:latin typeface="Consolas"/>
+                <a:latin typeface="Courier New" pitchFamily="49" charset="0"/>
               </a:rPr>
               <a:t>    email = models.EmailField(</a:t>
             </a:r>
             <a:r>
-              <a:rPr sz="1400" b="0" i="0">
+              <a:rPr sz="1350" b="0" i="0">
                 <a:solidFill>
                   <a:srgbClr val="F2C078"/>
                 </a:solidFill>
-                <a:latin typeface="Consolas"/>
+                <a:latin typeface="Courier New" pitchFamily="49" charset="0"/>
               </a:rPr>
               <a:t>"e-mail"</a:t>
             </a:r>
             <a:r>
-              <a:rPr sz="1400" b="0" i="0">
+              <a:rPr sz="1350" b="0" i="0">
                 <a:solidFill>
                   <a:srgbClr val="E6EDF3"/>
                 </a:solidFill>
-                <a:latin typeface="Consolas"/>
+                <a:latin typeface="Courier New" pitchFamily="49" charset="0"/>
               </a:rPr>
               <a:t>, blank=</a:t>
             </a:r>
             <a:r>
-              <a:rPr sz="1400" b="0" i="0">
+              <a:rPr sz="1350" b="0" i="0">
                 <a:solidFill>
                   <a:srgbClr val="7FD3F0"/>
                 </a:solidFill>
-                <a:latin typeface="Consolas"/>
+                <a:latin typeface="Courier New" pitchFamily="49" charset="0"/>
               </a:rPr>
               <a:t>True</a:t>
             </a:r>
             <a:r>
-              <a:rPr sz="1400" b="0" i="0">
+              <a:rPr sz="1350" b="0" i="0">
                 <a:solidFill>
                   <a:srgbClr val="E6EDF3"/>
                 </a:solidFill>
-                <a:latin typeface="Consolas"/>
+                <a:latin typeface="Courier New" pitchFamily="49" charset="0"/>
               </a:rPr>
               <a:t>)</a:t>
             </a:r>
@@ -12288,11 +12290,11 @@
           <a:p>
             <a:pPr algn="l"/>
             <a:r>
-              <a:rPr sz="1400" b="0" i="0">
+              <a:rPr sz="1350" b="0" i="0">
                 <a:solidFill>
                   <a:srgbClr val="E6EDF3"/>
                 </a:solidFill>
-                <a:latin typeface="Consolas"/>
+                <a:latin typeface="Courier New" pitchFamily="49" charset="0"/>
               </a:rPr>
               <a:t>    data_nascimento = models.DateField(</a:t>
             </a:r>
@@ -12300,65 +12302,65 @@
           <a:p>
             <a:pPr algn="l"/>
             <a:r>
-              <a:rPr sz="1400" b="0" i="0">
+              <a:rPr sz="1350" b="0" i="0">
                 <a:solidFill>
                   <a:srgbClr val="E6EDF3"/>
                 </a:solidFill>
-                <a:latin typeface="Consolas"/>
+                <a:latin typeface="Courier New" pitchFamily="49" charset="0"/>
               </a:rPr>
               <a:t>        </a:t>
             </a:r>
             <a:r>
-              <a:rPr sz="1400" b="0" i="0">
+              <a:rPr sz="1350" b="0" i="0">
                 <a:solidFill>
                   <a:srgbClr val="F2C078"/>
                 </a:solidFill>
-                <a:latin typeface="Consolas"/>
+                <a:latin typeface="Courier New" pitchFamily="49" charset="0"/>
               </a:rPr>
               <a:t>"data de nascimento"</a:t>
             </a:r>
             <a:r>
-              <a:rPr sz="1400" b="0" i="0">
+              <a:rPr sz="1350" b="0" i="0">
                 <a:solidFill>
                   <a:srgbClr val="E6EDF3"/>
                 </a:solidFill>
-                <a:latin typeface="Consolas"/>
+                <a:latin typeface="Courier New" pitchFamily="49" charset="0"/>
               </a:rPr>
               <a:t>, null=</a:t>
             </a:r>
             <a:r>
-              <a:rPr sz="1400" b="0" i="0">
+              <a:rPr sz="1350" b="0" i="0">
                 <a:solidFill>
                   <a:srgbClr val="7FD3F0"/>
                 </a:solidFill>
-                <a:latin typeface="Consolas"/>
+                <a:latin typeface="Courier New" pitchFamily="49" charset="0"/>
               </a:rPr>
               <a:t>True</a:t>
             </a:r>
             <a:r>
-              <a:rPr sz="1400" b="0" i="0">
+              <a:rPr sz="1350" b="0" i="0">
                 <a:solidFill>
                   <a:srgbClr val="E6EDF3"/>
                 </a:solidFill>
-                <a:latin typeface="Consolas"/>
+                <a:latin typeface="Courier New" pitchFamily="49" charset="0"/>
               </a:rPr>
               <a:t>, blank=</a:t>
             </a:r>
             <a:r>
-              <a:rPr sz="1400" b="0" i="0">
+              <a:rPr sz="1350" b="0" i="0">
                 <a:solidFill>
                   <a:srgbClr val="7FD3F0"/>
                 </a:solidFill>
-                <a:latin typeface="Consolas"/>
+                <a:latin typeface="Courier New" pitchFamily="49" charset="0"/>
               </a:rPr>
               <a:t>True</a:t>
             </a:r>
             <a:r>
-              <a:rPr sz="1400" b="0" i="0">
+              <a:rPr sz="1350" b="0" i="0">
                 <a:solidFill>
                   <a:srgbClr val="E6EDF3"/>
                 </a:solidFill>
-                <a:latin typeface="Consolas"/>
+                <a:latin typeface="Courier New" pitchFamily="49" charset="0"/>
               </a:rPr>
               <a:t>)</a:t>
             </a:r>
@@ -12366,47 +12368,47 @@
           <a:p>
             <a:pPr algn="l"/>
             <a:r>
-              <a:rPr sz="1400" b="0" i="0">
+              <a:rPr sz="1350" b="0" i="0">
                 <a:solidFill>
                   <a:srgbClr val="E6EDF3"/>
                 </a:solidFill>
-                <a:latin typeface="Consolas"/>
+                <a:latin typeface="Courier New" pitchFamily="49" charset="0"/>
               </a:rPr>
               <a:t>    ativo = models.BooleanField(</a:t>
             </a:r>
             <a:r>
-              <a:rPr sz="1400" b="0" i="0">
+              <a:rPr sz="1350" b="0" i="0">
                 <a:solidFill>
                   <a:srgbClr val="F2C078"/>
                 </a:solidFill>
-                <a:latin typeface="Consolas"/>
+                <a:latin typeface="Courier New" pitchFamily="49" charset="0"/>
               </a:rPr>
               <a:t>"ativo"</a:t>
             </a:r>
             <a:r>
-              <a:rPr sz="1400" b="0" i="0">
+              <a:rPr sz="1350" b="0" i="0">
                 <a:solidFill>
                   <a:srgbClr val="E6EDF3"/>
                 </a:solidFill>
-                <a:latin typeface="Consolas"/>
+                <a:latin typeface="Courier New" pitchFamily="49" charset="0"/>
               </a:rPr>
               <a:t>, default=</a:t>
             </a:r>
             <a:r>
-              <a:rPr sz="1400" b="0" i="0">
+              <a:rPr sz="1350" b="0" i="0">
                 <a:solidFill>
                   <a:srgbClr val="7FD3F0"/>
                 </a:solidFill>
-                <a:latin typeface="Consolas"/>
+                <a:latin typeface="Courier New" pitchFamily="49" charset="0"/>
               </a:rPr>
               <a:t>True</a:t>
             </a:r>
             <a:r>
-              <a:rPr sz="1400" b="0" i="0">
+              <a:rPr sz="1350" b="0" i="0">
                 <a:solidFill>
                   <a:srgbClr val="E6EDF3"/>
                 </a:solidFill>
-                <a:latin typeface="Consolas"/>
+                <a:latin typeface="Courier New" pitchFamily="49" charset="0"/>
               </a:rPr>
               <a:t>)</a:t>
             </a:r>
@@ -12414,11 +12416,11 @@
           <a:p>
             <a:pPr algn="l"/>
             <a:r>
-              <a:rPr sz="1400" b="0" i="0">
+              <a:rPr sz="1350" b="0" i="0">
                 <a:solidFill>
                   <a:srgbClr val="E6EDF3"/>
                 </a:solidFill>
-                <a:latin typeface="Consolas"/>
+                <a:latin typeface="Courier New" pitchFamily="49" charset="0"/>
               </a:rPr>
               <a:t> </a:t>
             </a:r>
@@ -12426,29 +12428,29 @@
           <a:p>
             <a:pPr algn="l"/>
             <a:r>
-              <a:rPr sz="1400" b="0" i="0">
+              <a:rPr sz="1350" b="0" i="0">
                 <a:solidFill>
                   <a:srgbClr val="E6EDF3"/>
                 </a:solidFill>
-                <a:latin typeface="Consolas"/>
+                <a:latin typeface="Courier New" pitchFamily="49" charset="0"/>
               </a:rPr>
               <a:t>    </a:t>
             </a:r>
             <a:r>
-              <a:rPr sz="1400" b="0" i="0">
+              <a:rPr sz="1350" b="0" i="0">
                 <a:solidFill>
                   <a:srgbClr val="7FD3F0"/>
                 </a:solidFill>
-                <a:latin typeface="Consolas"/>
+                <a:latin typeface="Courier New" pitchFamily="49" charset="0"/>
               </a:rPr>
               <a:t>class</a:t>
             </a:r>
             <a:r>
-              <a:rPr sz="1400" b="0" i="0">
+              <a:rPr sz="1350" b="0" i="0">
                 <a:solidFill>
                   <a:srgbClr val="E6EDF3"/>
                 </a:solidFill>
-                <a:latin typeface="Consolas"/>
+                <a:latin typeface="Courier New" pitchFamily="49" charset="0"/>
               </a:rPr>
               <a:t> Meta:</a:t>
             </a:r>
@@ -12456,20 +12458,20 @@
           <a:p>
             <a:pPr algn="l"/>
             <a:r>
-              <a:rPr sz="1400" b="0" i="0">
+              <a:rPr sz="1350" b="0" i="0">
                 <a:solidFill>
                   <a:srgbClr val="E6EDF3"/>
                 </a:solidFill>
-                <a:latin typeface="Consolas"/>
+                <a:latin typeface="Courier New" pitchFamily="49" charset="0"/>
               </a:rPr>
               <a:t>        db_table = </a:t>
             </a:r>
             <a:r>
-              <a:rPr sz="1400" b="0" i="0">
+              <a:rPr sz="1350" b="0" i="0">
                 <a:solidFill>
                   <a:srgbClr val="F2C078"/>
                 </a:solidFill>
-                <a:latin typeface="Consolas"/>
+                <a:latin typeface="Courier New" pitchFamily="49" charset="0"/>
               </a:rPr>
               <a:t>"aluno"</a:t>
             </a:r>
@@ -12477,29 +12479,29 @@
           <a:p>
             <a:pPr algn="l"/>
             <a:r>
-              <a:rPr sz="1400" b="0" i="0">
+              <a:rPr sz="1350" b="0" i="0">
                 <a:solidFill>
                   <a:srgbClr val="E6EDF3"/>
                 </a:solidFill>
-                <a:latin typeface="Consolas"/>
+                <a:latin typeface="Courier New" pitchFamily="49" charset="0"/>
               </a:rPr>
               <a:t>        ordering = [</a:t>
             </a:r>
             <a:r>
-              <a:rPr sz="1400" b="0" i="0">
+              <a:rPr sz="1350" b="0" i="0">
                 <a:solidFill>
                   <a:srgbClr val="F2C078"/>
                 </a:solidFill>
-                <a:latin typeface="Consolas"/>
+                <a:latin typeface="Courier New" pitchFamily="49" charset="0"/>
               </a:rPr>
               <a:t>"nome"</a:t>
             </a:r>
             <a:r>
-              <a:rPr sz="1400" b="0" i="0">
+              <a:rPr sz="1350" b="0" i="0">
                 <a:solidFill>
                   <a:srgbClr val="E6EDF3"/>
                 </a:solidFill>
-                <a:latin typeface="Consolas"/>
+                <a:latin typeface="Courier New" pitchFamily="49" charset="0"/>
               </a:rPr>
               <a:t>]</a:t>
             </a:r>
@@ -12507,11 +12509,11 @@
           <a:p>
             <a:pPr algn="l"/>
             <a:r>
-              <a:rPr sz="1400" b="0" i="0">
+              <a:rPr sz="1350" b="0" i="0">
                 <a:solidFill>
                   <a:srgbClr val="E6EDF3"/>
                 </a:solidFill>
-                <a:latin typeface="Consolas"/>
+                <a:latin typeface="Courier New" pitchFamily="49" charset="0"/>
               </a:rPr>
               <a:t> </a:t>
             </a:r>
@@ -12519,29 +12521,29 @@
           <a:p>
             <a:pPr algn="l"/>
             <a:r>
-              <a:rPr sz="1400" b="0" i="0">
+              <a:rPr sz="1350" b="0" i="0">
                 <a:solidFill>
                   <a:srgbClr val="E6EDF3"/>
                 </a:solidFill>
-                <a:latin typeface="Consolas"/>
+                <a:latin typeface="Courier New" pitchFamily="49" charset="0"/>
               </a:rPr>
               <a:t>    </a:t>
             </a:r>
             <a:r>
-              <a:rPr sz="1400" b="0" i="0">
+              <a:rPr sz="1350" b="0" i="0">
                 <a:solidFill>
                   <a:srgbClr val="7FD3F0"/>
                 </a:solidFill>
-                <a:latin typeface="Consolas"/>
+                <a:latin typeface="Courier New" pitchFamily="49" charset="0"/>
               </a:rPr>
               <a:t>def</a:t>
             </a:r>
             <a:r>
-              <a:rPr sz="1400" b="0" i="0">
+              <a:rPr sz="1350" b="0" i="0">
                 <a:solidFill>
                   <a:srgbClr val="E6EDF3"/>
                 </a:solidFill>
-                <a:latin typeface="Consolas"/>
+                <a:latin typeface="Courier New" pitchFamily="49" charset="0"/>
               </a:rPr>
               <a:t> __str__(self):</a:t>
             </a:r>
@@ -12549,38 +12551,38 @@
           <a:p>
             <a:pPr algn="l"/>
             <a:r>
-              <a:rPr sz="1400" b="0" i="0">
+              <a:rPr sz="1350" b="0" i="0">
                 <a:solidFill>
                   <a:srgbClr val="E6EDF3"/>
                 </a:solidFill>
-                <a:latin typeface="Consolas"/>
+                <a:latin typeface="Courier New" pitchFamily="49" charset="0"/>
               </a:rPr>
               <a:t>        </a:t>
             </a:r>
             <a:r>
-              <a:rPr sz="1400" b="0" i="0">
+              <a:rPr sz="1350" b="0" i="0">
                 <a:solidFill>
                   <a:srgbClr val="7FD3F0"/>
                 </a:solidFill>
-                <a:latin typeface="Consolas"/>
+                <a:latin typeface="Courier New" pitchFamily="49" charset="0"/>
               </a:rPr>
               <a:t>return</a:t>
             </a:r>
             <a:r>
-              <a:rPr sz="1400" b="0" i="0">
+              <a:rPr sz="1350" b="0" i="0">
                 <a:solidFill>
                   <a:srgbClr val="E6EDF3"/>
                 </a:solidFill>
-                <a:latin typeface="Consolas"/>
+                <a:latin typeface="Courier New" pitchFamily="49" charset="0"/>
               </a:rPr>
               <a:t> </a:t>
             </a:r>
             <a:r>
-              <a:rPr sz="1400" b="0" i="0">
+              <a:rPr sz="1350" b="0" i="0">
                 <a:solidFill>
                   <a:srgbClr val="F2C078"/>
                 </a:solidFill>
-                <a:latin typeface="Consolas"/>
+                <a:latin typeface="Courier New" pitchFamily="49" charset="0"/>
               </a:rPr>
               <a:t>f"{self.matricula} - {self.nome}"</a:t>
             </a:r>
@@ -12651,7 +12653,7 @@
           <a:noFill/>
         </p:spPr>
         <p:txBody>
-          <a:bodyPr wrap="square" lIns="0" tIns="18288" rIns="0" bIns="18288" anchor="t">
+          <a:bodyPr wrap="none" lIns="0" tIns="18288" rIns="0" bIns="18288" anchor="t">
             <a:noAutofit/>
           </a:bodyPr>
           <a:lstStyle/>
@@ -12662,7 +12664,7 @@
                 <a:solidFill>
                   <a:srgbClr val="1185AA"/>
                 </a:solidFill>
-                <a:latin typeface="Consolas"/>
+                <a:latin typeface="Courier New" pitchFamily="49" charset="0"/>
               </a:rPr>
               <a:t>CharField(max_length=...)</a:t>
             </a:r>
@@ -12767,7 +12769,7 @@
           <a:noFill/>
         </p:spPr>
         <p:txBody>
-          <a:bodyPr wrap="square" lIns="0" tIns="18288" rIns="0" bIns="18288" anchor="t">
+          <a:bodyPr wrap="none" lIns="0" tIns="18288" rIns="0" bIns="18288" anchor="t">
             <a:noAutofit/>
           </a:bodyPr>
           <a:lstStyle/>
@@ -12778,7 +12780,7 @@
                 <a:solidFill>
                   <a:srgbClr val="1185AA"/>
                 </a:solidFill>
-                <a:latin typeface="Consolas"/>
+                <a:latin typeface="Courier New" pitchFamily="49" charset="0"/>
               </a:rPr>
               <a:t>unique=True</a:t>
             </a:r>
@@ -12883,7 +12885,7 @@
           <a:noFill/>
         </p:spPr>
         <p:txBody>
-          <a:bodyPr wrap="square" lIns="0" tIns="18288" rIns="0" bIns="18288" anchor="t">
+          <a:bodyPr wrap="none" lIns="0" tIns="18288" rIns="0" bIns="18288" anchor="t">
             <a:noAutofit/>
           </a:bodyPr>
           <a:lstStyle/>
@@ -12894,7 +12896,7 @@
                 <a:solidFill>
                   <a:srgbClr val="1185AA"/>
                 </a:solidFill>
-                <a:latin typeface="Consolas"/>
+                <a:latin typeface="Courier New" pitchFamily="49" charset="0"/>
               </a:rPr>
               <a:t>blank × null</a:t>
             </a:r>
@@ -12999,7 +13001,7 @@
           <a:noFill/>
         </p:spPr>
         <p:txBody>
-          <a:bodyPr wrap="square" lIns="0" tIns="18288" rIns="0" bIns="18288" anchor="t">
+          <a:bodyPr wrap="none" lIns="0" tIns="18288" rIns="0" bIns="18288" anchor="t">
             <a:noAutofit/>
           </a:bodyPr>
           <a:lstStyle/>
@@ -13010,7 +13012,7 @@
                 <a:solidFill>
                   <a:srgbClr val="1185AA"/>
                 </a:solidFill>
-                <a:latin typeface="Consolas"/>
+                <a:latin typeface="Courier New" pitchFamily="49" charset="0"/>
               </a:rPr>
               <a:t>db_table = "aluno"</a:t>
             </a:r>
@@ -13183,7 +13185,7 @@
           <a:noFill/>
         </p:spPr>
         <p:txBody>
-          <a:bodyPr wrap="square" lIns="0" tIns="18288" rIns="0" bIns="18288" anchor="t">
+          <a:bodyPr wrap="none" lIns="0" tIns="18288" rIns="0" bIns="18288" anchor="t">
             <a:noAutofit/>
           </a:bodyPr>
           <a:lstStyle/>
@@ -13194,7 +13196,7 @@
                 <a:solidFill>
                   <a:srgbClr val="00397B"/>
                 </a:solidFill>
-                <a:latin typeface="Consolas"/>
+                <a:latin typeface="Courier New" pitchFamily="49" charset="0"/>
               </a:rPr>
               <a:t>models.py</a:t>
             </a:r>
@@ -13321,7 +13323,7 @@
           <a:noFill/>
         </p:spPr>
         <p:txBody>
-          <a:bodyPr wrap="square" lIns="0" tIns="18288" rIns="0" bIns="18288" anchor="t">
+          <a:bodyPr wrap="none" lIns="0" tIns="18288" rIns="0" bIns="18288" anchor="t">
             <a:noAutofit/>
           </a:bodyPr>
           <a:lstStyle/>
@@ -13332,7 +13334,7 @@
                 <a:solidFill>
                   <a:srgbClr val="00397B"/>
                 </a:solidFill>
-                <a:latin typeface="Consolas"/>
+                <a:latin typeface="Courier New" pitchFamily="49" charset="0"/>
               </a:rPr>
               <a:t>0001_initial.py</a:t>
             </a:r>
@@ -13459,7 +13461,7 @@
           <a:noFill/>
         </p:spPr>
         <p:txBody>
-          <a:bodyPr wrap="square" lIns="0" tIns="18288" rIns="0" bIns="18288" anchor="t">
+          <a:bodyPr wrap="none" lIns="0" tIns="18288" rIns="0" bIns="18288" anchor="t">
             <a:noAutofit/>
           </a:bodyPr>
           <a:lstStyle/>
@@ -13470,7 +13472,7 @@
                 <a:solidFill>
                   <a:srgbClr val="00397B"/>
                 </a:solidFill>
-                <a:latin typeface="Consolas"/>
+                <a:latin typeface="Courier New" pitchFamily="49" charset="0"/>
               </a:rPr>
               <a:t>escola.sqlite3</a:t>
             </a:r>
@@ -13564,7 +13566,7 @@
           <a:noFill/>
         </p:spPr>
         <p:txBody>
-          <a:bodyPr wrap="square" lIns="0" tIns="18288" rIns="0" bIns="18288" anchor="t">
+          <a:bodyPr wrap="none" lIns="0" tIns="18288" rIns="0" bIns="18288" anchor="t">
             <a:noAutofit/>
           </a:bodyPr>
           <a:lstStyle/>
@@ -13575,7 +13577,7 @@
                 <a:solidFill>
                   <a:srgbClr val="1185AA"/>
                 </a:solidFill>
-                <a:latin typeface="Consolas"/>
+                <a:latin typeface="Courier New" pitchFamily="49" charset="0"/>
               </a:rPr>
               <a:t>makemigrations</a:t>
             </a:r>
@@ -13635,7 +13637,7 @@
           <a:noFill/>
         </p:spPr>
         <p:txBody>
-          <a:bodyPr wrap="square" lIns="0" tIns="18288" rIns="0" bIns="18288" anchor="t">
+          <a:bodyPr wrap="none" lIns="0" tIns="18288" rIns="0" bIns="18288" anchor="t">
             <a:noAutofit/>
           </a:bodyPr>
           <a:lstStyle/>
@@ -13646,7 +13648,7 @@
                 <a:solidFill>
                   <a:srgbClr val="1185AA"/>
                 </a:solidFill>
-                <a:latin typeface="Consolas"/>
+                <a:latin typeface="Courier New" pitchFamily="49" charset="0"/>
               </a:rPr>
               <a:t>migrate</a:t>
             </a:r>
@@ -13852,7 +13854,7 @@
           <a:noFill/>
         </p:spPr>
         <p:txBody>
-          <a:bodyPr wrap="square" lIns="0" tIns="18288" rIns="0" bIns="18288" anchor="t">
+          <a:bodyPr wrap="none" lIns="0" tIns="18288" rIns="0" bIns="18288" anchor="t">
             <a:noAutofit/>
           </a:bodyPr>
           <a:lstStyle/>
@@ -13863,7 +13865,7 @@
                 <a:solidFill>
                   <a:srgbClr val="9AA5B1"/>
                 </a:solidFill>
-                <a:latin typeface="Consolas"/>
+                <a:latin typeface="Courier New" pitchFamily="49" charset="0"/>
               </a:rPr>
               <a:t>terminal</a:t>
             </a:r>
@@ -13887,7 +13889,7 @@
           <a:noFill/>
         </p:spPr>
         <p:txBody>
-          <a:bodyPr wrap="square" lIns="0" tIns="18288" rIns="0" bIns="18288" anchor="t">
+          <a:bodyPr wrap="none" lIns="0" tIns="18288" rIns="0" bIns="18288" anchor="t">
             <a:noAutofit/>
           </a:bodyPr>
           <a:lstStyle/>
@@ -13898,7 +13900,7 @@
                 <a:solidFill>
                   <a:srgbClr val="7FD3F0"/>
                 </a:solidFill>
-                <a:latin typeface="Consolas"/>
+                <a:latin typeface="Courier New" pitchFamily="49" charset="0"/>
               </a:rPr>
               <a:t>python</a:t>
             </a:r>
@@ -13907,7 +13909,7 @@
                 <a:solidFill>
                   <a:srgbClr val="E6EDF3"/>
                 </a:solidFill>
-                <a:latin typeface="Consolas"/>
+                <a:latin typeface="Courier New" pitchFamily="49" charset="0"/>
               </a:rPr>
               <a:t> manage.py sqlmigrate academico 0001</a:t>
             </a:r>
@@ -13919,7 +13921,7 @@
                 <a:solidFill>
                   <a:srgbClr val="8B98A5"/>
                 </a:solidFill>
-                <a:latin typeface="Consolas"/>
+                <a:latin typeface="Courier New" pitchFamily="49" charset="0"/>
               </a:rPr>
               <a:t>-- saída (resumida): o SQL que a classe Aluno gerou</a:t>
             </a:r>
@@ -13931,7 +13933,7 @@
                 <a:solidFill>
                   <a:srgbClr val="A9DC76"/>
                 </a:solidFill>
-                <a:latin typeface="Consolas"/>
+                <a:latin typeface="Courier New" pitchFamily="49" charset="0"/>
               </a:rPr>
               <a:t>CREATE TABLE "aluno" ("id" integer NOT NULL PRIMARY KEY AUTOINCREMENT,</a:t>
             </a:r>
@@ -13943,7 +13945,7 @@
                 <a:solidFill>
                   <a:srgbClr val="A9DC76"/>
                 </a:solidFill>
-                <a:latin typeface="Consolas"/>
+                <a:latin typeface="Courier New" pitchFamily="49" charset="0"/>
               </a:rPr>
               <a:t>  "matricula" varchar(20) NOT NULL UNIQUE, "nome" varchar(120) NOT NULL, ...);</a:t>
             </a:r>
@@ -14089,11 +14091,11 @@
                     <a:p>
                       <a:pPr algn="l"/>
                       <a:r>
-                        <a:rPr sz="1300" b="0" i="0">
+                        <a:rPr sz="1150" b="0" i="0">
                           <a:solidFill>
                             <a:srgbClr val="00397B"/>
                           </a:solidFill>
-                          <a:latin typeface="Consolas"/>
+                          <a:latin typeface="Courier New" pitchFamily="49" charset="0"/>
                         </a:rPr>
                         <a:t>Aluno.objects.all()</a:t>
                       </a:r>
@@ -14112,11 +14114,11 @@
                     <a:p>
                       <a:pPr algn="l"/>
                       <a:r>
-                        <a:rPr sz="1300" b="0" i="0">
+                        <a:rPr sz="1150" b="0" i="0">
                           <a:solidFill>
                             <a:srgbClr val="00397B"/>
                           </a:solidFill>
-                          <a:latin typeface="Consolas"/>
+                          <a:latin typeface="Courier New" pitchFamily="49" charset="0"/>
                         </a:rPr>
                         <a:t>SELECT * FROM aluno ORDER BY nome</a:t>
                       </a:r>
@@ -14142,11 +14144,11 @@
                     <a:p>
                       <a:pPr algn="l"/>
                       <a:r>
-                        <a:rPr sz="1300" b="0" i="0">
+                        <a:rPr sz="1150" b="0" i="0">
                           <a:solidFill>
                             <a:srgbClr val="00397B"/>
                           </a:solidFill>
-                          <a:latin typeface="Consolas"/>
+                          <a:latin typeface="Courier New" pitchFamily="49" charset="0"/>
                         </a:rPr>
                         <a:t>alunos.filter(Q(nome__icontains=b) | Q(matricula__icontains=b))</a:t>
                       </a:r>
@@ -14165,11 +14167,11 @@
                     <a:p>
                       <a:pPr algn="l"/>
                       <a:r>
-                        <a:rPr sz="1300" b="0" i="0">
+                        <a:rPr sz="1150" b="0" i="0">
                           <a:solidFill>
                             <a:srgbClr val="00397B"/>
                           </a:solidFill>
-                          <a:latin typeface="Consolas"/>
+                          <a:latin typeface="Courier New" pitchFamily="49" charset="0"/>
                         </a:rPr>
                         <a:t>WHERE nome LIKE %b% OR matricula LIKE %b%</a:t>
                       </a:r>
@@ -14195,11 +14197,11 @@
                     <a:p>
                       <a:pPr algn="l"/>
                       <a:r>
-                        <a:rPr sz="1300" b="0" i="0">
+                        <a:rPr sz="1150" b="0" i="0">
                           <a:solidFill>
                             <a:srgbClr val="00397B"/>
                           </a:solidFill>
-                          <a:latin typeface="Consolas"/>
+                          <a:latin typeface="Courier New" pitchFamily="49" charset="0"/>
                         </a:rPr>
                         <a:t>get_object_or_404(Aluno, pk=7)</a:t>
                       </a:r>
@@ -14218,11 +14220,11 @@
                     <a:p>
                       <a:pPr algn="l"/>
                       <a:r>
-                        <a:rPr sz="1300" b="0" i="0">
+                        <a:rPr sz="1150" b="0" i="0">
                           <a:solidFill>
                             <a:srgbClr val="00397B"/>
                           </a:solidFill>
-                          <a:latin typeface="Consolas"/>
+                          <a:latin typeface="Courier New" pitchFamily="49" charset="0"/>
                         </a:rPr>
                         <a:t>WHERE id = 7  (ou a página 404)</a:t>
                       </a:r>
@@ -14248,11 +14250,11 @@
                     <a:p>
                       <a:pPr algn="l"/>
                       <a:r>
-                        <a:rPr sz="1300" b="0" i="0">
+                        <a:rPr sz="1150" b="0" i="0">
                           <a:solidFill>
                             <a:srgbClr val="00397B"/>
                           </a:solidFill>
-                          <a:latin typeface="Consolas"/>
+                          <a:latin typeface="Courier New" pitchFamily="49" charset="0"/>
                         </a:rPr>
                         <a:t>AlunoForm(request.POST, instance=aluno).save()</a:t>
                       </a:r>
@@ -14271,11 +14273,11 @@
                     <a:p>
                       <a:pPr algn="l"/>
                       <a:r>
-                        <a:rPr sz="1300" b="0" i="0">
+                        <a:rPr sz="1150" b="0" i="0">
                           <a:solidFill>
                             <a:srgbClr val="00397B"/>
                           </a:solidFill>
-                          <a:latin typeface="Consolas"/>
+                          <a:latin typeface="Courier New" pitchFamily="49" charset="0"/>
                         </a:rPr>
                         <a:t>UPDATE aluno SET ... WHERE id = 7</a:t>
                       </a:r>
@@ -14301,11 +14303,11 @@
                     <a:p>
                       <a:pPr algn="l"/>
                       <a:r>
-                        <a:rPr sz="1300" b="0" i="0">
+                        <a:rPr sz="1150" b="0" i="0">
                           <a:solidFill>
                             <a:srgbClr val="00397B"/>
                           </a:solidFill>
-                          <a:latin typeface="Consolas"/>
+                          <a:latin typeface="Courier New" pitchFamily="49" charset="0"/>
                         </a:rPr>
                         <a:t>Inscricao.objects.select_related("aluno", "disciplina")</a:t>
                       </a:r>
@@ -14324,11 +14326,11 @@
                     <a:p>
                       <a:pPr algn="l"/>
                       <a:r>
-                        <a:rPr sz="1300" b="0" i="0">
+                        <a:rPr sz="1150" b="0" i="0">
                           <a:solidFill>
                             <a:srgbClr val="00397B"/>
                           </a:solidFill>
-                          <a:latin typeface="Consolas"/>
+                          <a:latin typeface="Courier New" pitchFamily="49" charset="0"/>
                         </a:rPr>
                         <a:t>SELECT ... JOIN aluno ... JOIN disciplina</a:t>
                       </a:r>
@@ -14595,7 +14597,7 @@
           <a:noFill/>
         </p:spPr>
         <p:txBody>
-          <a:bodyPr wrap="square" lIns="0" tIns="18288" rIns="0" bIns="18288" anchor="t">
+          <a:bodyPr wrap="none" lIns="0" tIns="18288" rIns="0" bIns="18288" anchor="t">
             <a:noAutofit/>
           </a:bodyPr>
           <a:lstStyle/>
@@ -14606,7 +14608,7 @@
                 <a:solidFill>
                   <a:srgbClr val="9AA5B1"/>
                 </a:solidFill>
-                <a:latin typeface="Consolas"/>
+                <a:latin typeface="Courier New" pitchFamily="49" charset="0"/>
               </a:rPr>
               <a:t>academico/views.py · TODO 7</a:t>
             </a:r>
@@ -14630,18 +14632,18 @@
           <a:noFill/>
         </p:spPr>
         <p:txBody>
-          <a:bodyPr wrap="square" lIns="0" tIns="18288" rIns="0" bIns="18288" anchor="t">
+          <a:bodyPr wrap="none" lIns="0" tIns="18288" rIns="0" bIns="18288" anchor="t">
             <a:noAutofit/>
           </a:bodyPr>
           <a:lstStyle/>
           <a:p>
             <a:pPr algn="l"/>
             <a:r>
-              <a:rPr sz="1600" b="0" i="0">
+              <a:rPr sz="1500" b="0" i="0">
                 <a:solidFill>
                   <a:srgbClr val="C792EA"/>
                 </a:solidFill>
-                <a:latin typeface="Consolas"/>
+                <a:latin typeface="Courier New" pitchFamily="49" charset="0"/>
               </a:rPr>
               <a:t>@login_required</a:t>
             </a:r>
@@ -14649,20 +14651,20 @@
           <a:p>
             <a:pPr algn="l"/>
             <a:r>
-              <a:rPr sz="1600" b="0" i="0">
+              <a:rPr sz="1500" b="0" i="0">
                 <a:solidFill>
                   <a:srgbClr val="7FD3F0"/>
                 </a:solidFill>
-                <a:latin typeface="Consolas"/>
+                <a:latin typeface="Courier New" pitchFamily="49" charset="0"/>
               </a:rPr>
               <a:t>def</a:t>
             </a:r>
             <a:r>
-              <a:rPr sz="1600" b="0" i="0">
+              <a:rPr sz="1500" b="0" i="0">
                 <a:solidFill>
                   <a:srgbClr val="E6EDF3"/>
                 </a:solidFill>
-                <a:latin typeface="Consolas"/>
+                <a:latin typeface="Courier New" pitchFamily="49" charset="0"/>
               </a:rPr>
               <a:t> aluno_lista(request):</a:t>
             </a:r>
@@ -14670,11 +14672,11 @@
           <a:p>
             <a:pPr algn="l"/>
             <a:r>
-              <a:rPr sz="1600" b="0" i="0">
+              <a:rPr sz="1500" b="0" i="0">
                 <a:solidFill>
                   <a:srgbClr val="E6EDF3"/>
                 </a:solidFill>
-                <a:latin typeface="Consolas"/>
+                <a:latin typeface="Courier New" pitchFamily="49" charset="0"/>
               </a:rPr>
               <a:t>    alunos = Aluno.objects.all()</a:t>
             </a:r>
@@ -14682,47 +14684,47 @@
           <a:p>
             <a:pPr algn="l"/>
             <a:r>
-              <a:rPr sz="1600" b="0" i="0">
+              <a:rPr sz="1500" b="0" i="0">
                 <a:solidFill>
                   <a:srgbClr val="E6EDF3"/>
                 </a:solidFill>
-                <a:latin typeface="Consolas"/>
+                <a:latin typeface="Courier New" pitchFamily="49" charset="0"/>
               </a:rPr>
               <a:t>    busca = request.GET.get(</a:t>
             </a:r>
             <a:r>
-              <a:rPr sz="1600" b="0" i="0">
+              <a:rPr sz="1500" b="0" i="0">
                 <a:solidFill>
                   <a:srgbClr val="F2C078"/>
                 </a:solidFill>
-                <a:latin typeface="Consolas"/>
+                <a:latin typeface="Courier New" pitchFamily="49" charset="0"/>
               </a:rPr>
               <a:t>"busca"</a:t>
             </a:r>
             <a:r>
-              <a:rPr sz="1600" b="0" i="0">
+              <a:rPr sz="1500" b="0" i="0">
                 <a:solidFill>
                   <a:srgbClr val="E6EDF3"/>
                 </a:solidFill>
-                <a:latin typeface="Consolas"/>
+                <a:latin typeface="Courier New" pitchFamily="49" charset="0"/>
               </a:rPr>
               <a:t>, </a:t>
             </a:r>
             <a:r>
-              <a:rPr sz="1600" b="0" i="0">
+              <a:rPr sz="1500" b="0" i="0">
                 <a:solidFill>
                   <a:srgbClr val="F2C078"/>
                 </a:solidFill>
-                <a:latin typeface="Consolas"/>
+                <a:latin typeface="Courier New" pitchFamily="49" charset="0"/>
               </a:rPr>
               <a:t>""</a:t>
             </a:r>
             <a:r>
-              <a:rPr sz="1600" b="0" i="0">
+              <a:rPr sz="1500" b="0" i="0">
                 <a:solidFill>
                   <a:srgbClr val="E6EDF3"/>
                 </a:solidFill>
-                <a:latin typeface="Consolas"/>
+                <a:latin typeface="Courier New" pitchFamily="49" charset="0"/>
               </a:rPr>
               <a:t>).strip()</a:t>
             </a:r>
@@ -14730,29 +14732,29 @@
           <a:p>
             <a:pPr algn="l"/>
             <a:r>
-              <a:rPr sz="1600" b="0" i="0">
+              <a:rPr sz="1500" b="0" i="0">
                 <a:solidFill>
                   <a:srgbClr val="E6EDF3"/>
                 </a:solidFill>
-                <a:latin typeface="Consolas"/>
+                <a:latin typeface="Courier New" pitchFamily="49" charset="0"/>
               </a:rPr>
               <a:t>    </a:t>
             </a:r>
             <a:r>
-              <a:rPr sz="1600" b="0" i="0">
+              <a:rPr sz="1500" b="0" i="0">
                 <a:solidFill>
                   <a:srgbClr val="7FD3F0"/>
                 </a:solidFill>
-                <a:latin typeface="Consolas"/>
+                <a:latin typeface="Courier New" pitchFamily="49" charset="0"/>
               </a:rPr>
               <a:t>if</a:t>
             </a:r>
             <a:r>
-              <a:rPr sz="1600" b="0" i="0">
+              <a:rPr sz="1500" b="0" i="0">
                 <a:solidFill>
                   <a:srgbClr val="E6EDF3"/>
                 </a:solidFill>
-                <a:latin typeface="Consolas"/>
+                <a:latin typeface="Courier New" pitchFamily="49" charset="0"/>
               </a:rPr>
               <a:t> busca:</a:t>
             </a:r>
@@ -14760,11 +14762,11 @@
           <a:p>
             <a:pPr algn="l"/>
             <a:r>
-              <a:rPr sz="1600" b="0" i="0">
+              <a:rPr sz="1500" b="0" i="0">
                 <a:solidFill>
                   <a:srgbClr val="E6EDF3"/>
                 </a:solidFill>
-                <a:latin typeface="Consolas"/>
+                <a:latin typeface="Courier New" pitchFamily="49" charset="0"/>
               </a:rPr>
               <a:t>        alunos = alunos.filter(</a:t>
             </a:r>
@@ -14772,11 +14774,11 @@
           <a:p>
             <a:pPr algn="l"/>
             <a:r>
-              <a:rPr sz="1600" b="0" i="0">
+              <a:rPr sz="1500" b="0" i="0">
                 <a:solidFill>
                   <a:srgbClr val="E6EDF3"/>
                 </a:solidFill>
-                <a:latin typeface="Consolas"/>
+                <a:latin typeface="Courier New" pitchFamily="49" charset="0"/>
               </a:rPr>
               <a:t>            Q(nome__icontains=busca)</a:t>
             </a:r>
@@ -14784,11 +14786,11 @@
           <a:p>
             <a:pPr algn="l"/>
             <a:r>
-              <a:rPr sz="1600" b="0" i="0">
+              <a:rPr sz="1500" b="0" i="0">
                 <a:solidFill>
                   <a:srgbClr val="E6EDF3"/>
                 </a:solidFill>
-                <a:latin typeface="Consolas"/>
+                <a:latin typeface="Courier New" pitchFamily="49" charset="0"/>
               </a:rPr>
               <a:t>            | Q(matricula__icontains=busca))</a:t>
             </a:r>
@@ -14796,29 +14798,29 @@
           <a:p>
             <a:pPr algn="l"/>
             <a:r>
-              <a:rPr sz="1600" b="0" i="0">
+              <a:rPr sz="1500" b="0" i="0">
                 <a:solidFill>
                   <a:srgbClr val="E6EDF3"/>
                 </a:solidFill>
-                <a:latin typeface="Consolas"/>
+                <a:latin typeface="Courier New" pitchFamily="49" charset="0"/>
               </a:rPr>
               <a:t>    </a:t>
             </a:r>
             <a:r>
-              <a:rPr sz="1600" b="0" i="0">
+              <a:rPr sz="1500" b="0" i="0">
                 <a:solidFill>
                   <a:srgbClr val="7FD3F0"/>
                 </a:solidFill>
-                <a:latin typeface="Consolas"/>
+                <a:latin typeface="Courier New" pitchFamily="49" charset="0"/>
               </a:rPr>
               <a:t>return</a:t>
             </a:r>
             <a:r>
-              <a:rPr sz="1600" b="0" i="0">
+              <a:rPr sz="1500" b="0" i="0">
                 <a:solidFill>
                   <a:srgbClr val="E6EDF3"/>
                 </a:solidFill>
-                <a:latin typeface="Consolas"/>
+                <a:latin typeface="Courier New" pitchFamily="49" charset="0"/>
               </a:rPr>
               <a:t> render(</a:t>
             </a:r>
@@ -14826,11 +14828,11 @@
           <a:p>
             <a:pPr algn="l"/>
             <a:r>
-              <a:rPr sz="1600" b="0" i="0">
+              <a:rPr sz="1500" b="0" i="0">
                 <a:solidFill>
                   <a:srgbClr val="E6EDF3"/>
                 </a:solidFill>
-                <a:latin typeface="Consolas"/>
+                <a:latin typeface="Courier New" pitchFamily="49" charset="0"/>
               </a:rPr>
               <a:t>        request,</a:t>
             </a:r>
@@ -14838,29 +14840,29 @@
           <a:p>
             <a:pPr algn="l"/>
             <a:r>
-              <a:rPr sz="1600" b="0" i="0">
+              <a:rPr sz="1500" b="0" i="0">
                 <a:solidFill>
                   <a:srgbClr val="E6EDF3"/>
                 </a:solidFill>
-                <a:latin typeface="Consolas"/>
+                <a:latin typeface="Courier New" pitchFamily="49" charset="0"/>
               </a:rPr>
               <a:t>        </a:t>
             </a:r>
             <a:r>
-              <a:rPr sz="1600" b="0" i="0">
+              <a:rPr sz="1500" b="0" i="0">
                 <a:solidFill>
                   <a:srgbClr val="F2C078"/>
                 </a:solidFill>
-                <a:latin typeface="Consolas"/>
+                <a:latin typeface="Courier New" pitchFamily="49" charset="0"/>
               </a:rPr>
               <a:t>"academico/aluno_lista.html"</a:t>
             </a:r>
             <a:r>
-              <a:rPr sz="1600" b="0" i="0">
+              <a:rPr sz="1500" b="0" i="0">
                 <a:solidFill>
                   <a:srgbClr val="E6EDF3"/>
                 </a:solidFill>
-                <a:latin typeface="Consolas"/>
+                <a:latin typeface="Courier New" pitchFamily="49" charset="0"/>
               </a:rPr>
               <a:t>,</a:t>
             </a:r>
@@ -14868,47 +14870,47 @@
           <a:p>
             <a:pPr algn="l"/>
             <a:r>
-              <a:rPr sz="1600" b="0" i="0">
+              <a:rPr sz="1500" b="0" i="0">
                 <a:solidFill>
                   <a:srgbClr val="E6EDF3"/>
                 </a:solidFill>
-                <a:latin typeface="Consolas"/>
+                <a:latin typeface="Courier New" pitchFamily="49" charset="0"/>
               </a:rPr>
               <a:t>        {</a:t>
             </a:r>
             <a:r>
-              <a:rPr sz="1600" b="0" i="0">
+              <a:rPr sz="1500" b="0" i="0">
                 <a:solidFill>
                   <a:srgbClr val="F2C078"/>
                 </a:solidFill>
-                <a:latin typeface="Consolas"/>
+                <a:latin typeface="Courier New" pitchFamily="49" charset="0"/>
               </a:rPr>
               <a:t>"alunos"</a:t>
             </a:r>
             <a:r>
-              <a:rPr sz="1600" b="0" i="0">
+              <a:rPr sz="1500" b="0" i="0">
                 <a:solidFill>
                   <a:srgbClr val="E6EDF3"/>
                 </a:solidFill>
-                <a:latin typeface="Consolas"/>
+                <a:latin typeface="Courier New" pitchFamily="49" charset="0"/>
               </a:rPr>
               <a:t>: alunos, </a:t>
             </a:r>
             <a:r>
-              <a:rPr sz="1600" b="0" i="0">
+              <a:rPr sz="1500" b="0" i="0">
                 <a:solidFill>
                   <a:srgbClr val="F2C078"/>
                 </a:solidFill>
-                <a:latin typeface="Consolas"/>
+                <a:latin typeface="Courier New" pitchFamily="49" charset="0"/>
               </a:rPr>
               <a:t>"busca"</a:t>
             </a:r>
             <a:r>
-              <a:rPr sz="1600" b="0" i="0">
+              <a:rPr sz="1500" b="0" i="0">
                 <a:solidFill>
                   <a:srgbClr val="E6EDF3"/>
                 </a:solidFill>
-                <a:latin typeface="Consolas"/>
+                <a:latin typeface="Courier New" pitchFamily="49" charset="0"/>
               </a:rPr>
               <a:t>: busca})</a:t>
             </a:r>
@@ -15072,11 +15074,11 @@
           <a:p>
             <a:pPr algn="l"/>
             <a:r>
-              <a:rPr sz="1400" b="0" i="0">
+              <a:rPr sz="1250" b="0" i="0">
                 <a:solidFill>
                   <a:srgbClr val="00397B"/>
                 </a:solidFill>
-                <a:latin typeface="Consolas"/>
+                <a:latin typeface="Courier New" pitchFamily="49" charset="0"/>
               </a:rPr>
               <a:t>Aluno.objects.all()</a:t>
             </a:r>
@@ -15256,28 +15258,28 @@
               <a:t>Lê o </a:t>
             </a:r>
             <a:r>
+              <a:rPr sz="1250" b="0" i="0">
+                <a:solidFill>
+                  <a:srgbClr val="00397B"/>
+                </a:solidFill>
+                <a:latin typeface="Courier New" pitchFamily="49" charset="0"/>
+              </a:rPr>
+              <a:t>?busca=</a:t>
+            </a:r>
+            <a:r>
               <a:rPr sz="1400" b="0" i="0">
                 <a:solidFill>
+                  <a:srgbClr val="3A3A3A"/>
+                </a:solidFill>
+              </a:rPr>
+              <a:t> da URL e filtra com </a:t>
+            </a:r>
+            <a:r>
+              <a:rPr sz="1250" b="0" i="0">
+                <a:solidFill>
                   <a:srgbClr val="00397B"/>
                 </a:solidFill>
-                <a:latin typeface="Consolas"/>
-              </a:rPr>
-              <a:t>?busca=</a:t>
-            </a:r>
-            <a:r>
-              <a:rPr sz="1400" b="0" i="0">
-                <a:solidFill>
-                  <a:srgbClr val="3A3A3A"/>
-                </a:solidFill>
-              </a:rPr>
-              <a:t> da URL e filtra com </a:t>
-            </a:r>
-            <a:r>
-              <a:rPr sz="1400" b="0" i="0">
-                <a:solidFill>
-                  <a:srgbClr val="00397B"/>
-                </a:solidFill>
-                <a:latin typeface="Consolas"/>
+                <a:latin typeface="Courier New" pitchFamily="49" charset="0"/>
               </a:rPr>
               <a:t>Q</a:t>
             </a:r>
@@ -15449,28 +15451,28 @@
           <a:p>
             <a:pPr algn="l"/>
             <a:r>
+              <a:rPr sz="1250" b="0" i="0">
+                <a:solidFill>
+                  <a:srgbClr val="00397B"/>
+                </a:solidFill>
+                <a:latin typeface="Courier New" pitchFamily="49" charset="0"/>
+              </a:rPr>
+              <a:t>render()</a:t>
+            </a:r>
+            <a:r>
               <a:rPr sz="1400" b="0" i="0">
                 <a:solidFill>
+                  <a:srgbClr val="3A3A3A"/>
+                </a:solidFill>
+              </a:rPr>
+              <a:t> junta template e contexto: a chave </a:t>
+            </a:r>
+            <a:r>
+              <a:rPr sz="1250" b="0" i="0">
+                <a:solidFill>
                   <a:srgbClr val="00397B"/>
                 </a:solidFill>
-                <a:latin typeface="Consolas"/>
-              </a:rPr>
-              <a:t>render()</a:t>
-            </a:r>
-            <a:r>
-              <a:rPr sz="1400" b="0" i="0">
-                <a:solidFill>
-                  <a:srgbClr val="3A3A3A"/>
-                </a:solidFill>
-              </a:rPr>
-              <a:t> junta template e contexto: a chave </a:t>
-            </a:r>
-            <a:r>
-              <a:rPr sz="1400" b="0" i="0">
-                <a:solidFill>
-                  <a:srgbClr val="00397B"/>
-                </a:solidFill>
-                <a:latin typeface="Consolas"/>
+                <a:latin typeface="Courier New" pitchFamily="49" charset="0"/>
               </a:rPr>
               <a:t>"alunos"</a:t>
             </a:r>
@@ -15730,7 +15732,7 @@
           <a:noFill/>
         </p:spPr>
         <p:txBody>
-          <a:bodyPr wrap="square" lIns="0" tIns="18288" rIns="0" bIns="18288" anchor="t">
+          <a:bodyPr wrap="none" lIns="0" tIns="18288" rIns="0" bIns="18288" anchor="t">
             <a:noAutofit/>
           </a:bodyPr>
           <a:lstStyle/>
@@ -15741,7 +15743,7 @@
                 <a:solidFill>
                   <a:srgbClr val="9AA5B1"/>
                 </a:solidFill>
-                <a:latin typeface="Consolas"/>
+                <a:latin typeface="Courier New" pitchFamily="49" charset="0"/>
               </a:rPr>
               <a:t>aluno_lista.html (resumido)</a:t>
             </a:r>
@@ -15765,18 +15767,18 @@
           <a:noFill/>
         </p:spPr>
         <p:txBody>
-          <a:bodyPr wrap="square" lIns="0" tIns="18288" rIns="0" bIns="18288" anchor="t">
+          <a:bodyPr wrap="none" lIns="0" tIns="18288" rIns="0" bIns="18288" anchor="t">
             <a:noAutofit/>
           </a:bodyPr>
           <a:lstStyle/>
           <a:p>
             <a:pPr algn="l"/>
             <a:r>
-              <a:rPr sz="1500" b="0" i="0">
+              <a:rPr sz="1450" b="0" i="0">
                 <a:solidFill>
                   <a:srgbClr val="C792EA"/>
                 </a:solidFill>
-                <a:latin typeface="Consolas"/>
+                <a:latin typeface="Courier New" pitchFamily="49" charset="0"/>
               </a:rPr>
               <a:t>{% extends "base.html" %}</a:t>
             </a:r>
@@ -15784,11 +15786,11 @@
           <a:p>
             <a:pPr algn="l"/>
             <a:r>
-              <a:rPr sz="1500" b="0" i="0">
+              <a:rPr sz="1450" b="0" i="0">
                 <a:solidFill>
                   <a:srgbClr val="C792EA"/>
                 </a:solidFill>
-                <a:latin typeface="Consolas"/>
+                <a:latin typeface="Courier New" pitchFamily="49" charset="0"/>
               </a:rPr>
               <a:t>{% block conteudo %}</a:t>
             </a:r>
@@ -15796,20 +15798,20 @@
           <a:p>
             <a:pPr algn="l"/>
             <a:r>
-              <a:rPr sz="1500" b="0" i="0">
+              <a:rPr sz="1450" b="0" i="0">
                 <a:solidFill>
                   <a:srgbClr val="E6EDF3"/>
                 </a:solidFill>
-                <a:latin typeface="Consolas"/>
+                <a:latin typeface="Courier New" pitchFamily="49" charset="0"/>
               </a:rPr>
               <a:t>  </a:t>
             </a:r>
             <a:r>
-              <a:rPr sz="1500" b="0" i="0">
+              <a:rPr sz="1450" b="0" i="0">
                 <a:solidFill>
                   <a:srgbClr val="C792EA"/>
                 </a:solidFill>
-                <a:latin typeface="Consolas"/>
+                <a:latin typeface="Courier New" pitchFamily="49" charset="0"/>
               </a:rPr>
               <a:t>{% for aluno in alunos %}</a:t>
             </a:r>
@@ -15817,20 +15819,20 @@
           <a:p>
             <a:pPr algn="l"/>
             <a:r>
-              <a:rPr sz="1500" b="0" i="0">
+              <a:rPr sz="1450" b="0" i="0">
                 <a:solidFill>
                   <a:srgbClr val="E6EDF3"/>
                 </a:solidFill>
-                <a:latin typeface="Consolas"/>
+                <a:latin typeface="Courier New" pitchFamily="49" charset="0"/>
               </a:rPr>
               <a:t>    </a:t>
             </a:r>
             <a:r>
-              <a:rPr sz="1500" b="0" i="0">
+              <a:rPr sz="1450" b="0" i="0">
                 <a:solidFill>
                   <a:srgbClr val="C792EA"/>
                 </a:solidFill>
-                <a:latin typeface="Consolas"/>
+                <a:latin typeface="Courier New" pitchFamily="49" charset="0"/>
               </a:rPr>
               <a:t>{{ aluno.nome }}</a:t>
             </a:r>
@@ -15838,20 +15840,20 @@
           <a:p>
             <a:pPr algn="l"/>
             <a:r>
-              <a:rPr sz="1500" b="0" i="0">
+              <a:rPr sz="1450" b="0" i="0">
                 <a:solidFill>
                   <a:srgbClr val="E6EDF3"/>
                 </a:solidFill>
-                <a:latin typeface="Consolas"/>
+                <a:latin typeface="Courier New" pitchFamily="49" charset="0"/>
               </a:rPr>
               <a:t>    </a:t>
             </a:r>
             <a:r>
-              <a:rPr sz="1500" b="0" i="0">
+              <a:rPr sz="1450" b="0" i="0">
                 <a:solidFill>
                   <a:srgbClr val="C792EA"/>
                 </a:solidFill>
-                <a:latin typeface="Consolas"/>
+                <a:latin typeface="Courier New" pitchFamily="49" charset="0"/>
               </a:rPr>
               <a:t>{% url 'academico:aluno_editar' aluno.pk %}</a:t>
             </a:r>
@@ -15859,20 +15861,20 @@
           <a:p>
             <a:pPr algn="l"/>
             <a:r>
-              <a:rPr sz="1500" b="0" i="0">
+              <a:rPr sz="1450" b="0" i="0">
                 <a:solidFill>
                   <a:srgbClr val="E6EDF3"/>
                 </a:solidFill>
-                <a:latin typeface="Consolas"/>
+                <a:latin typeface="Courier New" pitchFamily="49" charset="0"/>
               </a:rPr>
               <a:t>  </a:t>
             </a:r>
             <a:r>
-              <a:rPr sz="1500" b="0" i="0">
+              <a:rPr sz="1450" b="0" i="0">
                 <a:solidFill>
                   <a:srgbClr val="C792EA"/>
                 </a:solidFill>
-                <a:latin typeface="Consolas"/>
+                <a:latin typeface="Courier New" pitchFamily="49" charset="0"/>
               </a:rPr>
               <a:t>{% empty %}</a:t>
             </a:r>
@@ -15880,11 +15882,11 @@
           <a:p>
             <a:pPr algn="l"/>
             <a:r>
-              <a:rPr sz="1500" b="0" i="0">
+              <a:rPr sz="1450" b="0" i="0">
                 <a:solidFill>
                   <a:srgbClr val="E6EDF3"/>
                 </a:solidFill>
-                <a:latin typeface="Consolas"/>
+                <a:latin typeface="Courier New" pitchFamily="49" charset="0"/>
               </a:rPr>
               <a:t>    Nenhum aluno cadastrado ainda.</a:t>
             </a:r>
@@ -15892,20 +15894,20 @@
           <a:p>
             <a:pPr algn="l"/>
             <a:r>
-              <a:rPr sz="1500" b="0" i="0">
+              <a:rPr sz="1450" b="0" i="0">
                 <a:solidFill>
                   <a:srgbClr val="E6EDF3"/>
                 </a:solidFill>
-                <a:latin typeface="Consolas"/>
+                <a:latin typeface="Courier New" pitchFamily="49" charset="0"/>
               </a:rPr>
               <a:t>  </a:t>
             </a:r>
             <a:r>
-              <a:rPr sz="1500" b="0" i="0">
+              <a:rPr sz="1450" b="0" i="0">
                 <a:solidFill>
                   <a:srgbClr val="C792EA"/>
                 </a:solidFill>
-                <a:latin typeface="Consolas"/>
+                <a:latin typeface="Courier New" pitchFamily="49" charset="0"/>
               </a:rPr>
               <a:t>{% endfor %}</a:t>
             </a:r>
@@ -15913,11 +15915,11 @@
           <a:p>
             <a:pPr algn="l"/>
             <a:r>
-              <a:rPr sz="1500" b="0" i="0">
+              <a:rPr sz="1450" b="0" i="0">
                 <a:solidFill>
                   <a:srgbClr val="C792EA"/>
                 </a:solidFill>
-                <a:latin typeface="Consolas"/>
+                <a:latin typeface="Courier New" pitchFamily="49" charset="0"/>
               </a:rPr>
               <a:t>{% endblock %}</a:t>
             </a:r>
@@ -16123,7 +16125,7 @@
           <a:noFill/>
         </p:spPr>
         <p:txBody>
-          <a:bodyPr wrap="square" lIns="0" tIns="18288" rIns="0" bIns="18288" anchor="t">
+          <a:bodyPr wrap="none" lIns="0" tIns="18288" rIns="0" bIns="18288" anchor="t">
             <a:noAutofit/>
           </a:bodyPr>
           <a:lstStyle/>
@@ -16134,7 +16136,7 @@
                 <a:solidFill>
                   <a:srgbClr val="9AA5B1"/>
                 </a:solidFill>
-                <a:latin typeface="Consolas"/>
+                <a:latin typeface="Courier New" pitchFamily="49" charset="0"/>
               </a:rPr>
               <a:t>academico/urls.py</a:t>
             </a:r>
@@ -16158,27 +16160,27 @@
           <a:noFill/>
         </p:spPr>
         <p:txBody>
-          <a:bodyPr wrap="square" lIns="0" tIns="18288" rIns="0" bIns="18288" anchor="t">
+          <a:bodyPr wrap="none" lIns="0" tIns="18288" rIns="0" bIns="18288" anchor="t">
             <a:noAutofit/>
           </a:bodyPr>
           <a:lstStyle/>
           <a:p>
             <a:pPr algn="l"/>
             <a:r>
-              <a:rPr sz="1350" b="0" i="0">
+              <a:rPr sz="1300" b="0" i="0">
                 <a:solidFill>
                   <a:srgbClr val="E6EDF3"/>
                 </a:solidFill>
-                <a:latin typeface="Consolas"/>
+                <a:latin typeface="Courier New" pitchFamily="49" charset="0"/>
               </a:rPr>
               <a:t>app_name = </a:t>
             </a:r>
             <a:r>
-              <a:rPr sz="1350" b="0" i="0">
+              <a:rPr sz="1300" b="0" i="0">
                 <a:solidFill>
                   <a:srgbClr val="F2C078"/>
                 </a:solidFill>
-                <a:latin typeface="Consolas"/>
+                <a:latin typeface="Courier New" pitchFamily="49" charset="0"/>
               </a:rPr>
               <a:t>"academico"</a:t>
             </a:r>
@@ -16186,11 +16188,11 @@
           <a:p>
             <a:pPr algn="l"/>
             <a:r>
-              <a:rPr sz="1350" b="0" i="0">
+              <a:rPr sz="1300" b="0" i="0">
                 <a:solidFill>
                   <a:srgbClr val="E6EDF3"/>
                 </a:solidFill>
-                <a:latin typeface="Consolas"/>
+                <a:latin typeface="Courier New" pitchFamily="49" charset="0"/>
               </a:rPr>
               <a:t> </a:t>
             </a:r>
@@ -16198,11 +16200,11 @@
           <a:p>
             <a:pPr algn="l"/>
             <a:r>
-              <a:rPr sz="1350" b="0" i="0">
+              <a:rPr sz="1300" b="0" i="0">
                 <a:solidFill>
                   <a:srgbClr val="E6EDF3"/>
                 </a:solidFill>
-                <a:latin typeface="Consolas"/>
+                <a:latin typeface="Courier New" pitchFamily="49" charset="0"/>
               </a:rPr>
               <a:t>urlpatterns = [</a:t>
             </a:r>
@@ -16210,29 +16212,29 @@
           <a:p>
             <a:pPr algn="l"/>
             <a:r>
-              <a:rPr sz="1350" b="0" i="0">
+              <a:rPr sz="1300" b="0" i="0">
                 <a:solidFill>
                   <a:srgbClr val="E6EDF3"/>
                 </a:solidFill>
-                <a:latin typeface="Consolas"/>
+                <a:latin typeface="Courier New" pitchFamily="49" charset="0"/>
               </a:rPr>
               <a:t>    path(</a:t>
             </a:r>
             <a:r>
-              <a:rPr sz="1350" b="0" i="0">
+              <a:rPr sz="1300" b="0" i="0">
                 <a:solidFill>
                   <a:srgbClr val="F2C078"/>
                 </a:solidFill>
-                <a:latin typeface="Consolas"/>
+                <a:latin typeface="Courier New" pitchFamily="49" charset="0"/>
               </a:rPr>
               <a:t>"alunos/"</a:t>
             </a:r>
             <a:r>
-              <a:rPr sz="1350" b="0" i="0">
+              <a:rPr sz="1300" b="0" i="0">
                 <a:solidFill>
                   <a:srgbClr val="E6EDF3"/>
                 </a:solidFill>
-                <a:latin typeface="Consolas"/>
+                <a:latin typeface="Courier New" pitchFamily="49" charset="0"/>
               </a:rPr>
               <a:t>, views.aluno_lista,</a:t>
             </a:r>
@@ -16240,29 +16242,29 @@
           <a:p>
             <a:pPr algn="l"/>
             <a:r>
-              <a:rPr sz="1350" b="0" i="0">
+              <a:rPr sz="1300" b="0" i="0">
                 <a:solidFill>
                   <a:srgbClr val="E6EDF3"/>
                 </a:solidFill>
-                <a:latin typeface="Consolas"/>
+                <a:latin typeface="Courier New" pitchFamily="49" charset="0"/>
               </a:rPr>
               <a:t>         name=</a:t>
             </a:r>
             <a:r>
-              <a:rPr sz="1350" b="0" i="0">
+              <a:rPr sz="1300" b="0" i="0">
                 <a:solidFill>
                   <a:srgbClr val="F2C078"/>
                 </a:solidFill>
-                <a:latin typeface="Consolas"/>
+                <a:latin typeface="Courier New" pitchFamily="49" charset="0"/>
               </a:rPr>
               <a:t>"aluno_lista"</a:t>
             </a:r>
             <a:r>
-              <a:rPr sz="1350" b="0" i="0">
+              <a:rPr sz="1300" b="0" i="0">
                 <a:solidFill>
                   <a:srgbClr val="E6EDF3"/>
                 </a:solidFill>
-                <a:latin typeface="Consolas"/>
+                <a:latin typeface="Courier New" pitchFamily="49" charset="0"/>
               </a:rPr>
               <a:t>),</a:t>
             </a:r>
@@ -16270,29 +16272,29 @@
           <a:p>
             <a:pPr algn="l"/>
             <a:r>
-              <a:rPr sz="1350" b="0" i="0">
+              <a:rPr sz="1300" b="0" i="0">
                 <a:solidFill>
                   <a:srgbClr val="E6EDF3"/>
                 </a:solidFill>
-                <a:latin typeface="Consolas"/>
+                <a:latin typeface="Courier New" pitchFamily="49" charset="0"/>
               </a:rPr>
               <a:t>    path(</a:t>
             </a:r>
             <a:r>
-              <a:rPr sz="1350" b="0" i="0">
+              <a:rPr sz="1300" b="0" i="0">
                 <a:solidFill>
                   <a:srgbClr val="F2C078"/>
                 </a:solidFill>
-                <a:latin typeface="Consolas"/>
+                <a:latin typeface="Courier New" pitchFamily="49" charset="0"/>
               </a:rPr>
               <a:t>"alunos/&lt;int:pk&gt;/editar/"</a:t>
             </a:r>
             <a:r>
-              <a:rPr sz="1350" b="0" i="0">
+              <a:rPr sz="1300" b="0" i="0">
                 <a:solidFill>
                   <a:srgbClr val="E6EDF3"/>
                 </a:solidFill>
-                <a:latin typeface="Consolas"/>
+                <a:latin typeface="Courier New" pitchFamily="49" charset="0"/>
               </a:rPr>
               <a:t>,</a:t>
             </a:r>
@@ -16300,11 +16302,11 @@
           <a:p>
             <a:pPr algn="l"/>
             <a:r>
-              <a:rPr sz="1350" b="0" i="0">
+              <a:rPr sz="1300" b="0" i="0">
                 <a:solidFill>
                   <a:srgbClr val="E6EDF3"/>
                 </a:solidFill>
-                <a:latin typeface="Consolas"/>
+                <a:latin typeface="Courier New" pitchFamily="49" charset="0"/>
               </a:rPr>
               <a:t>         views.aluno_editar,</a:t>
             </a:r>
@@ -16312,29 +16314,29 @@
           <a:p>
             <a:pPr algn="l"/>
             <a:r>
-              <a:rPr sz="1350" b="0" i="0">
+              <a:rPr sz="1300" b="0" i="0">
                 <a:solidFill>
                   <a:srgbClr val="E6EDF3"/>
                 </a:solidFill>
-                <a:latin typeface="Consolas"/>
+                <a:latin typeface="Courier New" pitchFamily="49" charset="0"/>
               </a:rPr>
               <a:t>         name=</a:t>
             </a:r>
             <a:r>
-              <a:rPr sz="1350" b="0" i="0">
+              <a:rPr sz="1300" b="0" i="0">
                 <a:solidFill>
                   <a:srgbClr val="F2C078"/>
                 </a:solidFill>
-                <a:latin typeface="Consolas"/>
+                <a:latin typeface="Courier New" pitchFamily="49" charset="0"/>
               </a:rPr>
               <a:t>"aluno_editar"</a:t>
             </a:r>
             <a:r>
-              <a:rPr sz="1350" b="0" i="0">
+              <a:rPr sz="1300" b="0" i="0">
                 <a:solidFill>
                   <a:srgbClr val="E6EDF3"/>
                 </a:solidFill>
-                <a:latin typeface="Consolas"/>
+                <a:latin typeface="Courier New" pitchFamily="49" charset="0"/>
               </a:rPr>
               <a:t>),</a:t>
             </a:r>
@@ -16342,11 +16344,11 @@
           <a:p>
             <a:pPr algn="l"/>
             <a:r>
-              <a:rPr sz="1350" b="0" i="0">
+              <a:rPr sz="1300" b="0" i="0">
                 <a:solidFill>
                   <a:srgbClr val="E6EDF3"/>
                 </a:solidFill>
-                <a:latin typeface="Consolas"/>
+                <a:latin typeface="Courier New" pitchFamily="49" charset="0"/>
               </a:rPr>
               <a:t>]</a:t>
             </a:r>
@@ -16533,28 +16535,28 @@
               <a:t>Mandou </a:t>
             </a:r>
             <a:r>
+              <a:rPr sz="1350" b="0" i="0">
+                <a:solidFill>
+                  <a:srgbClr val="FFFFFF"/>
+                </a:solidFill>
+                <a:latin typeface="Courier New" pitchFamily="49" charset="0"/>
+              </a:rPr>
+              <a:t>aluno</a:t>
+            </a:r>
+            <a:r>
               <a:rPr sz="1500" b="0" i="0">
                 <a:solidFill>
                   <a:srgbClr val="FFFFFF"/>
                 </a:solidFill>
-                <a:latin typeface="Consolas"/>
-              </a:rPr>
-              <a:t>aluno</a:t>
-            </a:r>
-            <a:r>
-              <a:rPr sz="1500" b="0" i="0">
+              </a:rPr>
+              <a:t> no contexto e o template espera </a:t>
+            </a:r>
+            <a:r>
+              <a:rPr sz="1350" b="0" i="0">
                 <a:solidFill>
                   <a:srgbClr val="FFFFFF"/>
                 </a:solidFill>
-              </a:rPr>
-              <a:t> no contexto e o template espera </a:t>
-            </a:r>
-            <a:r>
-              <a:rPr sz="1500" b="0" i="0">
-                <a:solidFill>
-                  <a:srgbClr val="FFFFFF"/>
-                </a:solidFill>
-                <a:latin typeface="Consolas"/>
+                <a:latin typeface="Courier New" pitchFamily="49" charset="0"/>
               </a:rPr>
               <a:t>alunos</a:t>
             </a:r>
@@ -16814,7 +16816,7 @@
           <a:noFill/>
         </p:spPr>
         <p:txBody>
-          <a:bodyPr wrap="square" lIns="0" tIns="18288" rIns="0" bIns="18288" anchor="t">
+          <a:bodyPr wrap="none" lIns="0" tIns="18288" rIns="0" bIns="18288" anchor="t">
             <a:noAutofit/>
           </a:bodyPr>
           <a:lstStyle/>
@@ -16825,7 +16827,7 @@
                 <a:solidFill>
                   <a:srgbClr val="9AA5B1"/>
                 </a:solidFill>
-                <a:latin typeface="Consolas"/>
+                <a:latin typeface="Courier New" pitchFamily="49" charset="0"/>
               </a:rPr>
               <a:t>academico/views.py · TODO 8</a:t>
             </a:r>
@@ -16849,18 +16851,18 @@
           <a:noFill/>
         </p:spPr>
         <p:txBody>
-          <a:bodyPr wrap="square" lIns="0" tIns="18288" rIns="0" bIns="18288" anchor="t">
+          <a:bodyPr wrap="none" lIns="0" tIns="18288" rIns="0" bIns="18288" anchor="t">
             <a:noAutofit/>
           </a:bodyPr>
           <a:lstStyle/>
           <a:p>
             <a:pPr algn="l"/>
             <a:r>
-              <a:rPr sz="1450" b="0" i="0" dirty="0">
+              <a:rPr sz="1350" b="0" i="0" dirty="0">
                 <a:solidFill>
                   <a:srgbClr val="C792EA"/>
                 </a:solidFill>
-                <a:latin typeface="Consolas"/>
+                <a:latin typeface="Courier New" pitchFamily="49" charset="0"/>
               </a:rPr>
               <a:t>@login_required</a:t>
             </a:r>
@@ -16868,38 +16870,38 @@
           <a:p>
             <a:pPr algn="l"/>
             <a:r>
-              <a:rPr sz="1450" b="0" i="0" dirty="0">
+              <a:rPr sz="1350" b="0" i="0" dirty="0">
                 <a:solidFill>
                   <a:srgbClr val="7FD3F0"/>
                 </a:solidFill>
-                <a:latin typeface="Consolas"/>
+                <a:latin typeface="Courier New" pitchFamily="49" charset="0"/>
               </a:rPr>
               <a:t>def</a:t>
             </a:r>
             <a:r>
-              <a:rPr sz="1450" b="0" i="0" dirty="0">
+              <a:rPr sz="1350" b="0" i="0" dirty="0">
                 <a:solidFill>
                   <a:srgbClr val="E6EDF3"/>
                 </a:solidFill>
-                <a:latin typeface="Consolas"/>
+                <a:latin typeface="Courier New" pitchFamily="49" charset="0"/>
               </a:rPr>
               <a:t> </a:t>
             </a:r>
             <a:r>
-              <a:rPr sz="1450" b="0" i="0" dirty="0" err="1">
+              <a:rPr sz="1350" b="0" i="0" dirty="0" err="1">
                 <a:solidFill>
                   <a:srgbClr val="E6EDF3"/>
                 </a:solidFill>
-                <a:latin typeface="Consolas"/>
+                <a:latin typeface="Courier New" pitchFamily="49" charset="0"/>
               </a:rPr>
               <a:t>aluno_novo</a:t>
             </a:r>
             <a:r>
-              <a:rPr sz="1450" b="0" i="0" dirty="0">
+              <a:rPr sz="1350" b="0" i="0" dirty="0">
                 <a:solidFill>
                   <a:srgbClr val="E6EDF3"/>
                 </a:solidFill>
-                <a:latin typeface="Consolas"/>
+                <a:latin typeface="Courier New" pitchFamily="49" charset="0"/>
               </a:rPr>
               <a:t>(request):</a:t>
             </a:r>
@@ -16907,92 +16909,92 @@
           <a:p>
             <a:pPr algn="l"/>
             <a:r>
-              <a:rPr sz="1450" b="0" i="0" dirty="0">
+              <a:rPr sz="1350" b="0" i="0" dirty="0">
                 <a:solidFill>
                   <a:srgbClr val="E6EDF3"/>
                 </a:solidFill>
-                <a:latin typeface="Consolas"/>
+                <a:latin typeface="Courier New" pitchFamily="49" charset="0"/>
               </a:rPr>
               <a:t>    </a:t>
             </a:r>
             <a:r>
-              <a:rPr sz="1450" b="0" i="0" dirty="0">
+              <a:rPr sz="1350" b="0" i="0" dirty="0">
                 <a:solidFill>
                   <a:srgbClr val="7FD3F0"/>
                 </a:solidFill>
-                <a:latin typeface="Consolas"/>
+                <a:latin typeface="Courier New" pitchFamily="49" charset="0"/>
               </a:rPr>
               <a:t>if</a:t>
             </a:r>
             <a:r>
-              <a:rPr sz="1450" b="0" i="0" dirty="0">
+              <a:rPr sz="1350" b="0" i="0" dirty="0">
                 <a:solidFill>
                   <a:srgbClr val="E6EDF3"/>
                 </a:solidFill>
-                <a:latin typeface="Consolas"/>
+                <a:latin typeface="Courier New" pitchFamily="49" charset="0"/>
               </a:rPr>
               <a:t> </a:t>
             </a:r>
             <a:r>
-              <a:rPr sz="1450" b="0" i="0" dirty="0" err="1">
+              <a:rPr sz="1350" b="0" i="0" dirty="0" err="1">
                 <a:solidFill>
                   <a:srgbClr val="E6EDF3"/>
                 </a:solidFill>
-                <a:latin typeface="Consolas"/>
+                <a:latin typeface="Courier New" pitchFamily="49" charset="0"/>
               </a:rPr>
               <a:t>request.method</a:t>
             </a:r>
             <a:r>
-              <a:rPr sz="1450" b="0" i="0" dirty="0">
+              <a:rPr sz="1350" b="0" i="0" dirty="0">
                 <a:solidFill>
                   <a:srgbClr val="E6EDF3"/>
                 </a:solidFill>
-                <a:latin typeface="Consolas"/>
+                <a:latin typeface="Courier New" pitchFamily="49" charset="0"/>
               </a:rPr>
               <a:t> == </a:t>
             </a:r>
             <a:r>
-              <a:rPr sz="1450" b="0" i="0" dirty="0">
+              <a:rPr sz="1350" b="0" i="0" dirty="0">
                 <a:solidFill>
                   <a:srgbClr val="F2C078"/>
                 </a:solidFill>
-                <a:latin typeface="Consolas"/>
+                <a:latin typeface="Courier New" pitchFamily="49" charset="0"/>
               </a:rPr>
               <a:t>"POST"</a:t>
             </a:r>
             <a:r>
-              <a:rPr sz="1450" b="0" i="0" dirty="0">
+              <a:rPr sz="1350" b="0" i="0" dirty="0">
                 <a:solidFill>
                   <a:srgbClr val="E6EDF3"/>
                 </a:solidFill>
-                <a:latin typeface="Consolas"/>
+                <a:latin typeface="Courier New" pitchFamily="49" charset="0"/>
               </a:rPr>
               <a:t>:   </a:t>
             </a:r>
             <a:r>
-              <a:rPr sz="1450" b="0" i="1" dirty="0">
+              <a:rPr sz="1350" b="0" i="1" dirty="0">
                 <a:solidFill>
                   <a:srgbClr val="8B98A5"/>
                 </a:solidFill>
-                <a:latin typeface="Consolas"/>
+                <a:latin typeface="Courier New" pitchFamily="49" charset="0"/>
               </a:rPr>
               <a:t># </a:t>
             </a:r>
             <a:r>
-              <a:rPr sz="1450" b="0" i="1" dirty="0" err="1">
+              <a:rPr sz="1350" b="0" i="1" dirty="0" err="1">
                 <a:solidFill>
                   <a:srgbClr val="8B98A5"/>
                 </a:solidFill>
-                <a:latin typeface="Consolas"/>
+                <a:latin typeface="Courier New" pitchFamily="49" charset="0"/>
               </a:rPr>
               <a:t>enviou</a:t>
             </a:r>
             <a:r>
-              <a:rPr sz="1450" b="0" i="1" dirty="0">
+              <a:rPr sz="1350" b="0" i="1" dirty="0">
                 <a:solidFill>
                   <a:srgbClr val="8B98A5"/>
                 </a:solidFill>
-                <a:latin typeface="Consolas"/>
+                <a:latin typeface="Courier New" pitchFamily="49" charset="0"/>
               </a:rPr>
               <a:t> o form</a:t>
             </a:r>
@@ -17000,47 +17002,47 @@
           <a:p>
             <a:pPr algn="l"/>
             <a:r>
-              <a:rPr sz="1450" b="0" i="0" dirty="0">
+              <a:rPr sz="1350" b="0" i="0" dirty="0">
                 <a:solidFill>
                   <a:srgbClr val="E6EDF3"/>
                 </a:solidFill>
-                <a:latin typeface="Consolas"/>
+                <a:latin typeface="Courier New" pitchFamily="49" charset="0"/>
               </a:rPr>
               <a:t>        form = </a:t>
             </a:r>
             <a:r>
-              <a:rPr sz="1450" b="0" i="0" dirty="0" err="1">
+              <a:rPr sz="1350" b="0" i="0" dirty="0" err="1">
                 <a:solidFill>
                   <a:srgbClr val="FF0000"/>
                 </a:solidFill>
-                <a:latin typeface="Consolas"/>
+                <a:latin typeface="Courier New" pitchFamily="49" charset="0"/>
               </a:rPr>
               <a:t>AlunoForm</a:t>
             </a:r>
             <a:r>
-              <a:rPr sz="1450" b="0" i="0" dirty="0">
+              <a:rPr sz="1350" b="0" i="0" dirty="0">
                 <a:solidFill>
                   <a:srgbClr val="E6EDF3"/>
                 </a:solidFill>
-                <a:latin typeface="Consolas"/>
+                <a:latin typeface="Courier New" pitchFamily="49" charset="0"/>
               </a:rPr>
               <a:t>(</a:t>
             </a:r>
             <a:r>
-              <a:rPr sz="1450" b="0" i="0" dirty="0" err="1">
+              <a:rPr sz="1350" b="0" i="0" dirty="0" err="1">
                 <a:solidFill>
                   <a:srgbClr val="E6EDF3"/>
                 </a:solidFill>
-                <a:latin typeface="Consolas"/>
+                <a:latin typeface="Courier New" pitchFamily="49" charset="0"/>
               </a:rPr>
               <a:t>request.POST</a:t>
             </a:r>
             <a:r>
-              <a:rPr sz="1450" b="0" i="0" dirty="0">
+              <a:rPr sz="1350" b="0" i="0" dirty="0">
                 <a:solidFill>
                   <a:srgbClr val="E6EDF3"/>
                 </a:solidFill>
-                <a:latin typeface="Consolas"/>
+                <a:latin typeface="Courier New" pitchFamily="49" charset="0"/>
               </a:rPr>
               <a:t>)</a:t>
             </a:r>
@@ -17048,47 +17050,47 @@
           <a:p>
             <a:pPr algn="l"/>
             <a:r>
-              <a:rPr sz="1450" b="0" i="0" dirty="0">
+              <a:rPr sz="1350" b="0" i="0" dirty="0">
                 <a:solidFill>
                   <a:srgbClr val="E6EDF3"/>
                 </a:solidFill>
-                <a:latin typeface="Consolas"/>
+                <a:latin typeface="Courier New" pitchFamily="49" charset="0"/>
               </a:rPr>
               <a:t>        </a:t>
             </a:r>
             <a:r>
-              <a:rPr sz="1450" b="0" i="0" dirty="0">
+              <a:rPr sz="1350" b="0" i="0" dirty="0">
                 <a:solidFill>
                   <a:srgbClr val="7FD3F0"/>
                 </a:solidFill>
-                <a:latin typeface="Consolas"/>
+                <a:latin typeface="Courier New" pitchFamily="49" charset="0"/>
               </a:rPr>
               <a:t>if</a:t>
             </a:r>
             <a:r>
-              <a:rPr sz="1450" b="0" i="0" dirty="0">
+              <a:rPr sz="1350" b="0" i="0" dirty="0">
                 <a:solidFill>
                   <a:srgbClr val="E6EDF3"/>
                 </a:solidFill>
-                <a:latin typeface="Consolas"/>
+                <a:latin typeface="Courier New" pitchFamily="49" charset="0"/>
               </a:rPr>
               <a:t> </a:t>
             </a:r>
             <a:r>
-              <a:rPr sz="1450" b="0" i="0" dirty="0" err="1">
+              <a:rPr sz="1350" b="0" i="0" dirty="0" err="1">
                 <a:solidFill>
                   <a:srgbClr val="E6EDF3"/>
                 </a:solidFill>
-                <a:latin typeface="Consolas"/>
+                <a:latin typeface="Courier New" pitchFamily="49" charset="0"/>
               </a:rPr>
               <a:t>form.is_valid</a:t>
             </a:r>
             <a:r>
-              <a:rPr sz="1450" b="0" i="0" dirty="0">
+              <a:rPr sz="1350" b="0" i="0" dirty="0">
                 <a:solidFill>
                   <a:srgbClr val="E6EDF3"/>
                 </a:solidFill>
-                <a:latin typeface="Consolas"/>
+                <a:latin typeface="Courier New" pitchFamily="49" charset="0"/>
               </a:rPr>
               <a:t>():</a:t>
             </a:r>
@@ -17096,56 +17098,56 @@
           <a:p>
             <a:pPr algn="l"/>
             <a:r>
-              <a:rPr sz="1450" b="0" i="0" dirty="0">
+              <a:rPr sz="1350" b="0" i="0" dirty="0">
                 <a:solidFill>
                   <a:srgbClr val="E6EDF3"/>
                 </a:solidFill>
-                <a:latin typeface="Consolas"/>
+                <a:latin typeface="Courier New" pitchFamily="49" charset="0"/>
               </a:rPr>
               <a:t>            </a:t>
             </a:r>
             <a:r>
-              <a:rPr sz="1450" b="0" i="0" dirty="0" err="1">
+              <a:rPr sz="1350" b="0" i="0" dirty="0" err="1">
                 <a:solidFill>
                   <a:srgbClr val="E6EDF3"/>
                 </a:solidFill>
-                <a:latin typeface="Consolas"/>
+                <a:latin typeface="Courier New" pitchFamily="49" charset="0"/>
               </a:rPr>
               <a:t>aluno</a:t>
             </a:r>
             <a:r>
-              <a:rPr sz="1450" b="0" i="0" dirty="0">
+              <a:rPr sz="1350" b="0" i="0" dirty="0">
                 <a:solidFill>
                   <a:srgbClr val="E6EDF3"/>
                 </a:solidFill>
-                <a:latin typeface="Consolas"/>
+                <a:latin typeface="Courier New" pitchFamily="49" charset="0"/>
               </a:rPr>
               <a:t> = </a:t>
             </a:r>
             <a:r>
-              <a:rPr sz="1450" b="0" i="0" dirty="0" err="1">
+              <a:rPr sz="1350" b="0" i="0" dirty="0" err="1">
                 <a:solidFill>
                   <a:srgbClr val="E6EDF3"/>
                 </a:solidFill>
-                <a:latin typeface="Consolas"/>
+                <a:latin typeface="Courier New" pitchFamily="49" charset="0"/>
               </a:rPr>
               <a:t>form.save</a:t>
             </a:r>
             <a:r>
-              <a:rPr sz="1450" b="0" i="0" dirty="0">
+              <a:rPr sz="1350" b="0" i="0" dirty="0">
                 <a:solidFill>
                   <a:srgbClr val="E6EDF3"/>
                 </a:solidFill>
-                <a:latin typeface="Consolas"/>
+                <a:latin typeface="Courier New" pitchFamily="49" charset="0"/>
               </a:rPr>
               <a:t>()    </a:t>
             </a:r>
             <a:r>
-              <a:rPr sz="1450" b="0" i="1" dirty="0">
+              <a:rPr sz="1350" b="0" i="1" dirty="0">
                 <a:solidFill>
                   <a:srgbClr val="8B98A5"/>
                 </a:solidFill>
-                <a:latin typeface="Consolas"/>
+                <a:latin typeface="Courier New" pitchFamily="49" charset="0"/>
               </a:rPr>
               <a:t># INSERT</a:t>
             </a:r>
@@ -17153,83 +17155,83 @@
           <a:p>
             <a:pPr algn="l"/>
             <a:r>
-              <a:rPr sz="1450" b="0" i="0" dirty="0">
+              <a:rPr sz="1350" b="0" i="0" dirty="0">
                 <a:solidFill>
                   <a:srgbClr val="E6EDF3"/>
                 </a:solidFill>
-                <a:latin typeface="Consolas"/>
+                <a:latin typeface="Courier New" pitchFamily="49" charset="0"/>
               </a:rPr>
               <a:t>            </a:t>
             </a:r>
             <a:r>
-              <a:rPr sz="1450" b="0" i="0" dirty="0" err="1">
+              <a:rPr sz="1350" b="0" i="0" dirty="0" err="1">
                 <a:solidFill>
                   <a:srgbClr val="E6EDF3"/>
                 </a:solidFill>
-                <a:latin typeface="Consolas"/>
+                <a:latin typeface="Courier New" pitchFamily="49" charset="0"/>
               </a:rPr>
               <a:t>messages.success</a:t>
             </a:r>
             <a:r>
-              <a:rPr sz="1450" b="0" i="0" dirty="0">
+              <a:rPr sz="1350" b="0" i="0" dirty="0">
                 <a:solidFill>
                   <a:srgbClr val="E6EDF3"/>
                 </a:solidFill>
-                <a:latin typeface="Consolas"/>
+                <a:latin typeface="Courier New" pitchFamily="49" charset="0"/>
               </a:rPr>
               <a:t>(request, </a:t>
             </a:r>
             <a:r>
-              <a:rPr sz="1450" b="0" i="0" dirty="0">
+              <a:rPr sz="1350" b="0" i="0" dirty="0">
                 <a:solidFill>
                   <a:srgbClr val="F2C078"/>
                 </a:solidFill>
-                <a:latin typeface="Consolas"/>
+                <a:latin typeface="Courier New" pitchFamily="49" charset="0"/>
               </a:rPr>
               <a:t>"</a:t>
             </a:r>
             <a:r>
-              <a:rPr sz="1450" b="0" i="0" dirty="0" err="1">
+              <a:rPr sz="1350" b="0" i="0" dirty="0" err="1">
                 <a:solidFill>
                   <a:srgbClr val="F2C078"/>
                 </a:solidFill>
-                <a:latin typeface="Consolas"/>
+                <a:latin typeface="Courier New" pitchFamily="49" charset="0"/>
               </a:rPr>
               <a:t>Aluno</a:t>
             </a:r>
             <a:r>
-              <a:rPr sz="1450" b="0" i="0" dirty="0">
+              <a:rPr sz="1350" b="0" i="0" dirty="0">
                 <a:solidFill>
                   <a:srgbClr val="F2C078"/>
                 </a:solidFill>
-                <a:latin typeface="Consolas"/>
+                <a:latin typeface="Courier New" pitchFamily="49" charset="0"/>
               </a:rPr>
               <a:t> </a:t>
             </a:r>
             <a:r>
-              <a:rPr sz="1450" b="0" i="0" dirty="0" err="1">
+              <a:rPr sz="1350" b="0" i="0" dirty="0" err="1">
                 <a:solidFill>
                   <a:srgbClr val="F2C078"/>
                 </a:solidFill>
-                <a:latin typeface="Consolas"/>
+                <a:latin typeface="Courier New" pitchFamily="49" charset="0"/>
               </a:rPr>
               <a:t>cadastrado</a:t>
             </a:r>
             <a:r>
-              <a:rPr sz="1450" b="0" i="0" dirty="0">
+              <a:rPr sz="1350" b="0" i="0" dirty="0">
                 <a:solidFill>
                   <a:srgbClr val="F2C078"/>
                 </a:solidFill>
-                <a:latin typeface="Consolas"/>
+                <a:latin typeface="Courier New" pitchFamily="49" charset="0"/>
               </a:rPr>
               <a:t>."</a:t>
             </a:r>
             <a:r>
-              <a:rPr sz="1450" b="0" i="0" dirty="0">
+              <a:rPr sz="1350" b="0" i="0" dirty="0">
                 <a:solidFill>
                   <a:srgbClr val="E6EDF3"/>
                 </a:solidFill>
-                <a:latin typeface="Consolas"/>
+                <a:latin typeface="Courier New" pitchFamily="49" charset="0"/>
               </a:rPr>
               <a:t>)</a:t>
             </a:r>
@@ -17237,65 +17239,65 @@
           <a:p>
             <a:pPr algn="l"/>
             <a:r>
-              <a:rPr sz="1450" b="0" i="0" dirty="0">
+              <a:rPr sz="1350" b="0" i="0" dirty="0">
                 <a:solidFill>
                   <a:srgbClr val="E6EDF3"/>
                 </a:solidFill>
-                <a:latin typeface="Consolas"/>
+                <a:latin typeface="Courier New" pitchFamily="49" charset="0"/>
               </a:rPr>
               <a:t>            </a:t>
             </a:r>
             <a:r>
-              <a:rPr sz="1450" b="0" i="0" dirty="0">
+              <a:rPr sz="1350" b="0" i="0" dirty="0">
                 <a:solidFill>
                   <a:srgbClr val="7FD3F0"/>
                 </a:solidFill>
-                <a:latin typeface="Consolas"/>
+                <a:latin typeface="Courier New" pitchFamily="49" charset="0"/>
               </a:rPr>
               <a:t>return</a:t>
             </a:r>
             <a:r>
-              <a:rPr sz="1450" b="0" i="0" dirty="0">
+              <a:rPr sz="1350" b="0" i="0" dirty="0">
                 <a:solidFill>
                   <a:srgbClr val="E6EDF3"/>
                 </a:solidFill>
-                <a:latin typeface="Consolas"/>
+                <a:latin typeface="Courier New" pitchFamily="49" charset="0"/>
               </a:rPr>
               <a:t> redirect(</a:t>
             </a:r>
             <a:r>
-              <a:rPr sz="1450" b="0" i="0" dirty="0">
+              <a:rPr sz="1350" b="0" i="0" dirty="0">
                 <a:solidFill>
                   <a:srgbClr val="F2C078"/>
                 </a:solidFill>
-                <a:latin typeface="Consolas"/>
+                <a:latin typeface="Courier New" pitchFamily="49" charset="0"/>
               </a:rPr>
               <a:t>"</a:t>
             </a:r>
             <a:r>
-              <a:rPr sz="1450" b="0" i="0" dirty="0" err="1">
+              <a:rPr sz="1350" b="0" i="0" dirty="0" err="1">
                 <a:solidFill>
                   <a:srgbClr val="F2C078"/>
                 </a:solidFill>
-                <a:latin typeface="Consolas"/>
+                <a:latin typeface="Courier New" pitchFamily="49" charset="0"/>
               </a:rPr>
               <a:t>academico:aluno_lista</a:t>
             </a:r>
             <a:r>
-              <a:rPr sz="1450" b="0" i="0" dirty="0">
+              <a:rPr sz="1350" b="0" i="0" dirty="0">
                 <a:solidFill>
                   <a:srgbClr val="F2C078"/>
                 </a:solidFill>
-                <a:latin typeface="Consolas"/>
+                <a:latin typeface="Courier New" pitchFamily="49" charset="0"/>
               </a:rPr>
               <a:t>"</a:t>
             </a:r>
             <a:r>
-              <a:rPr sz="1450" b="0" i="0" dirty="0">
+              <a:rPr sz="1350" b="0" i="0" dirty="0">
                 <a:solidFill>
                   <a:srgbClr val="E6EDF3"/>
                 </a:solidFill>
-                <a:latin typeface="Consolas"/>
+                <a:latin typeface="Courier New" pitchFamily="49" charset="0"/>
               </a:rPr>
               <a:t>)</a:t>
             </a:r>
@@ -17303,119 +17305,119 @@
           <a:p>
             <a:pPr algn="l"/>
             <a:r>
-              <a:rPr sz="1450" b="0" i="0" dirty="0">
+              <a:rPr sz="1350" b="0" i="0" dirty="0">
                 <a:solidFill>
                   <a:srgbClr val="E6EDF3"/>
                 </a:solidFill>
-                <a:latin typeface="Consolas"/>
+                <a:latin typeface="Courier New" pitchFamily="49" charset="0"/>
               </a:rPr>
               <a:t>    </a:t>
             </a:r>
             <a:r>
-              <a:rPr sz="1450" b="0" i="0" dirty="0">
+              <a:rPr sz="1350" b="0" i="0" dirty="0">
                 <a:solidFill>
                   <a:srgbClr val="7FD3F0"/>
                 </a:solidFill>
-                <a:latin typeface="Consolas"/>
+                <a:latin typeface="Courier New" pitchFamily="49" charset="0"/>
               </a:rPr>
               <a:t>else</a:t>
             </a:r>
             <a:r>
-              <a:rPr sz="1450" b="0" i="0" dirty="0">
+              <a:rPr sz="1350" b="0" i="0" dirty="0">
                 <a:solidFill>
                   <a:srgbClr val="E6EDF3"/>
                 </a:solidFill>
-                <a:latin typeface="Consolas"/>
+                <a:latin typeface="Courier New" pitchFamily="49" charset="0"/>
               </a:rPr>
               <a:t>:                          </a:t>
             </a:r>
             <a:r>
-              <a:rPr sz="1450" b="0" i="1" dirty="0">
+              <a:rPr sz="1350" b="0" i="1" dirty="0">
                 <a:solidFill>
                   <a:srgbClr val="8B98A5"/>
                 </a:solidFill>
-                <a:latin typeface="Consolas"/>
+                <a:latin typeface="Courier New" pitchFamily="49" charset="0"/>
               </a:rPr>
               <a:t># </a:t>
             </a:r>
             <a:r>
-              <a:rPr sz="1450" b="0" i="1" dirty="0" err="1">
+              <a:rPr sz="1350" b="0" i="1" dirty="0" err="1">
                 <a:solidFill>
                   <a:srgbClr val="8B98A5"/>
                 </a:solidFill>
-                <a:latin typeface="Consolas"/>
+                <a:latin typeface="Courier New" pitchFamily="49" charset="0"/>
               </a:rPr>
               <a:t>só</a:t>
             </a:r>
             <a:r>
-              <a:rPr sz="1450" b="0" i="1" dirty="0">
+              <a:rPr sz="1350" b="0" i="1" dirty="0">
                 <a:solidFill>
                   <a:srgbClr val="8B98A5"/>
                 </a:solidFill>
-                <a:latin typeface="Consolas"/>
+                <a:latin typeface="Courier New" pitchFamily="49" charset="0"/>
               </a:rPr>
               <a:t> </a:t>
             </a:r>
             <a:r>
-              <a:rPr sz="1450" b="0" i="1" dirty="0" err="1">
+              <a:rPr sz="1350" b="0" i="1" dirty="0" err="1">
                 <a:solidFill>
                   <a:srgbClr val="8B98A5"/>
                 </a:solidFill>
-                <a:latin typeface="Consolas"/>
+                <a:latin typeface="Courier New" pitchFamily="49" charset="0"/>
               </a:rPr>
               <a:t>abriu</a:t>
             </a:r>
             <a:r>
-              <a:rPr sz="1450" b="0" i="1" dirty="0">
+              <a:rPr sz="1350" b="0" i="1" dirty="0">
                 <a:solidFill>
                   <a:srgbClr val="8B98A5"/>
                 </a:solidFill>
-                <a:latin typeface="Consolas"/>
+                <a:latin typeface="Courier New" pitchFamily="49" charset="0"/>
               </a:rPr>
               <a:t> a </a:t>
             </a:r>
             <a:r>
-              <a:rPr sz="1450" b="0" i="1" dirty="0" err="1">
+              <a:rPr sz="1350" b="0" i="1" dirty="0" err="1">
                 <a:solidFill>
                   <a:srgbClr val="8B98A5"/>
                 </a:solidFill>
-                <a:latin typeface="Consolas"/>
+                <a:latin typeface="Courier New" pitchFamily="49" charset="0"/>
               </a:rPr>
               <a:t>tela</a:t>
             </a:r>
-            <a:endParaRPr sz="1450" b="0" i="1" dirty="0">
+            <a:endParaRPr sz="1350" b="0" i="1" dirty="0">
               <a:solidFill>
                 <a:srgbClr val="8B98A5"/>
               </a:solidFill>
-              <a:latin typeface="Consolas"/>
+              <a:latin typeface="Courier New" pitchFamily="49" charset="0"/>
             </a:endParaRPr>
           </a:p>
           <a:p>
             <a:pPr algn="l"/>
             <a:r>
-              <a:rPr sz="1450" b="0" i="0" dirty="0">
+              <a:rPr sz="1350" b="0" i="0" dirty="0">
                 <a:solidFill>
                   <a:srgbClr val="E6EDF3"/>
                 </a:solidFill>
-                <a:latin typeface="Consolas"/>
+                <a:latin typeface="Courier New" pitchFamily="49" charset="0"/>
               </a:rPr>
               <a:t>        form = </a:t>
             </a:r>
             <a:r>
-              <a:rPr sz="1450" b="0" i="0" dirty="0" err="1">
+              <a:rPr sz="1350" b="0" i="0" dirty="0" err="1">
                 <a:solidFill>
                   <a:srgbClr val="E6EDF3"/>
                 </a:solidFill>
-                <a:latin typeface="Consolas"/>
+                <a:latin typeface="Courier New" pitchFamily="49" charset="0"/>
               </a:rPr>
               <a:t>AlunoForm</a:t>
             </a:r>
             <a:r>
-              <a:rPr sz="1450" b="0" i="0" dirty="0">
+              <a:rPr sz="1350" b="0" i="0" dirty="0">
                 <a:solidFill>
                   <a:srgbClr val="E6EDF3"/>
                 </a:solidFill>
-                <a:latin typeface="Consolas"/>
+                <a:latin typeface="Courier New" pitchFamily="49" charset="0"/>
               </a:rPr>
               <a:t>()</a:t>
             </a:r>
@@ -17423,11 +17425,11 @@
           <a:p>
             <a:pPr algn="l"/>
             <a:r>
-              <a:rPr sz="1450" b="0" i="0" dirty="0">
+              <a:rPr sz="1350" b="0" i="0" dirty="0">
                 <a:solidFill>
                   <a:srgbClr val="E6EDF3"/>
                 </a:solidFill>
-                <a:latin typeface="Consolas"/>
+                <a:latin typeface="Courier New" pitchFamily="49" charset="0"/>
               </a:rPr>
               <a:t> </a:t>
             </a:r>
@@ -17435,65 +17437,65 @@
           <a:p>
             <a:pPr algn="l"/>
             <a:r>
-              <a:rPr sz="1450" b="0" i="0" dirty="0">
+              <a:rPr sz="1350" b="0" i="0" dirty="0">
                 <a:solidFill>
                   <a:srgbClr val="E6EDF3"/>
                 </a:solidFill>
-                <a:latin typeface="Consolas"/>
+                <a:latin typeface="Courier New" pitchFamily="49" charset="0"/>
               </a:rPr>
               <a:t>    </a:t>
             </a:r>
             <a:r>
-              <a:rPr sz="1450" b="0" i="0" dirty="0">
+              <a:rPr sz="1350" b="0" i="0" dirty="0">
                 <a:solidFill>
                   <a:srgbClr val="7FD3F0"/>
                 </a:solidFill>
-                <a:latin typeface="Consolas"/>
+                <a:latin typeface="Courier New" pitchFamily="49" charset="0"/>
               </a:rPr>
               <a:t>return</a:t>
             </a:r>
             <a:r>
-              <a:rPr sz="1450" b="0" i="0" dirty="0">
+              <a:rPr sz="1350" b="0" i="0" dirty="0">
                 <a:solidFill>
                   <a:srgbClr val="E6EDF3"/>
                 </a:solidFill>
-                <a:latin typeface="Consolas"/>
+                <a:latin typeface="Courier New" pitchFamily="49" charset="0"/>
               </a:rPr>
               <a:t> render(request, </a:t>
             </a:r>
             <a:r>
-              <a:rPr sz="1450" b="0" i="0" dirty="0">
+              <a:rPr sz="1350" b="0" i="0" dirty="0">
                 <a:solidFill>
                   <a:srgbClr val="F2C078"/>
                 </a:solidFill>
-                <a:latin typeface="Consolas"/>
+                <a:latin typeface="Courier New" pitchFamily="49" charset="0"/>
               </a:rPr>
               <a:t>"</a:t>
             </a:r>
             <a:r>
-              <a:rPr sz="1450" b="0" i="0" dirty="0" err="1">
+              <a:rPr sz="1350" b="0" i="0" dirty="0" err="1">
                 <a:solidFill>
                   <a:srgbClr val="F2C078"/>
                 </a:solidFill>
-                <a:latin typeface="Consolas"/>
+                <a:latin typeface="Courier New" pitchFamily="49" charset="0"/>
               </a:rPr>
               <a:t>academico</a:t>
             </a:r>
             <a:r>
-              <a:rPr sz="1450" b="0" i="0" dirty="0">
+              <a:rPr sz="1350" b="0" i="0" dirty="0">
                 <a:solidFill>
                   <a:srgbClr val="F2C078"/>
                 </a:solidFill>
-                <a:latin typeface="Consolas"/>
+                <a:latin typeface="Courier New" pitchFamily="49" charset="0"/>
               </a:rPr>
               <a:t>/aluno_form.html"</a:t>
             </a:r>
             <a:r>
-              <a:rPr sz="1450" b="0" i="0" dirty="0">
+              <a:rPr sz="1350" b="0" i="0" dirty="0">
                 <a:solidFill>
                   <a:srgbClr val="E6EDF3"/>
                 </a:solidFill>
-                <a:latin typeface="Consolas"/>
+                <a:latin typeface="Courier New" pitchFamily="49" charset="0"/>
               </a:rPr>
               <a:t>,</a:t>
             </a:r>
@@ -17501,101 +17503,101 @@
           <a:p>
             <a:pPr algn="l"/>
             <a:r>
-              <a:rPr sz="1450" b="0" i="0" dirty="0">
+              <a:rPr sz="1350" b="0" i="0" dirty="0">
                 <a:solidFill>
                   <a:srgbClr val="E6EDF3"/>
                 </a:solidFill>
-                <a:latin typeface="Consolas"/>
+                <a:latin typeface="Courier New" pitchFamily="49" charset="0"/>
               </a:rPr>
               <a:t>                  {</a:t>
             </a:r>
             <a:r>
-              <a:rPr sz="1450" b="0" i="0" dirty="0">
+              <a:rPr sz="1350" b="0" i="0" dirty="0">
                 <a:solidFill>
                   <a:srgbClr val="F2C078"/>
                 </a:solidFill>
-                <a:latin typeface="Consolas"/>
+                <a:latin typeface="Courier New" pitchFamily="49" charset="0"/>
               </a:rPr>
               <a:t>"form"</a:t>
             </a:r>
             <a:r>
-              <a:rPr sz="1450" b="0" i="0" dirty="0">
+              <a:rPr sz="1350" b="0" i="0" dirty="0">
                 <a:solidFill>
                   <a:srgbClr val="E6EDF3"/>
                 </a:solidFill>
-                <a:latin typeface="Consolas"/>
+                <a:latin typeface="Courier New" pitchFamily="49" charset="0"/>
               </a:rPr>
               <a:t>: form, </a:t>
             </a:r>
             <a:r>
-              <a:rPr sz="1450" b="0" i="0" dirty="0">
+              <a:rPr sz="1350" b="0" i="0" dirty="0">
                 <a:solidFill>
                   <a:srgbClr val="F2C078"/>
                 </a:solidFill>
-                <a:latin typeface="Consolas"/>
+                <a:latin typeface="Courier New" pitchFamily="49" charset="0"/>
               </a:rPr>
               <a:t>"</a:t>
             </a:r>
             <a:r>
-              <a:rPr sz="1450" b="0" i="0" dirty="0" err="1">
+              <a:rPr sz="1350" b="0" i="0" dirty="0" err="1">
                 <a:solidFill>
                   <a:srgbClr val="F2C078"/>
                 </a:solidFill>
-                <a:latin typeface="Consolas"/>
+                <a:latin typeface="Courier New" pitchFamily="49" charset="0"/>
               </a:rPr>
               <a:t>titulo</a:t>
             </a:r>
             <a:r>
-              <a:rPr sz="1450" b="0" i="0" dirty="0">
+              <a:rPr sz="1350" b="0" i="0" dirty="0">
                 <a:solidFill>
                   <a:srgbClr val="F2C078"/>
                 </a:solidFill>
-                <a:latin typeface="Consolas"/>
+                <a:latin typeface="Courier New" pitchFamily="49" charset="0"/>
               </a:rPr>
               <a:t>"</a:t>
             </a:r>
             <a:r>
-              <a:rPr sz="1450" b="0" i="0" dirty="0">
+              <a:rPr sz="1350" b="0" i="0" dirty="0">
                 <a:solidFill>
                   <a:srgbClr val="E6EDF3"/>
                 </a:solidFill>
-                <a:latin typeface="Consolas"/>
+                <a:latin typeface="Courier New" pitchFamily="49" charset="0"/>
               </a:rPr>
               <a:t>: </a:t>
             </a:r>
             <a:r>
-              <a:rPr sz="1450" b="0" i="0" dirty="0">
+              <a:rPr sz="1350" b="0" i="0" dirty="0">
                 <a:solidFill>
                   <a:srgbClr val="F2C078"/>
                 </a:solidFill>
-                <a:latin typeface="Consolas"/>
+                <a:latin typeface="Courier New" pitchFamily="49" charset="0"/>
               </a:rPr>
               <a:t>"Novo </a:t>
             </a:r>
             <a:r>
-              <a:rPr sz="1450" b="0" i="0" dirty="0" err="1">
+              <a:rPr sz="1350" b="0" i="0" dirty="0" err="1">
                 <a:solidFill>
                   <a:srgbClr val="F2C078"/>
                 </a:solidFill>
-                <a:latin typeface="Consolas"/>
+                <a:latin typeface="Courier New" pitchFamily="49" charset="0"/>
               </a:rPr>
               <a:t>aluno</a:t>
             </a:r>
             <a:r>
-              <a:rPr sz="1450" b="0" i="0" dirty="0">
+              <a:rPr sz="1350" b="0" i="0" dirty="0">
                 <a:solidFill>
                   <a:srgbClr val="F2C078"/>
                 </a:solidFill>
-                <a:latin typeface="Consolas"/>
+                <a:latin typeface="Courier New" pitchFamily="49" charset="0"/>
               </a:rPr>
               <a:t>"</a:t>
             </a:r>
             <a:r>
-              <a:rPr sz="1450" b="0" i="0" dirty="0">
+              <a:rPr sz="1350" b="0" i="0" dirty="0">
                 <a:solidFill>
                   <a:srgbClr val="E6EDF3"/>
                 </a:solidFill>
-                <a:latin typeface="Consolas"/>
+                <a:latin typeface="Courier New" pitchFamily="49" charset="0"/>
               </a:rPr>
               <a:t>})</a:t>
             </a:r>
@@ -17822,28 +17824,28 @@
           <a:p>
             <a:pPr algn="l"/>
             <a:r>
+              <a:rPr sz="1250" b="0" i="0">
+                <a:solidFill>
+                  <a:srgbClr val="00397B"/>
+                </a:solidFill>
+                <a:latin typeface="Courier New" pitchFamily="49" charset="0"/>
+              </a:rPr>
+              <a:t>AlunoForm(request.POST, instance=aluno)</a:t>
+            </a:r>
+            <a:r>
               <a:rPr sz="1400" b="0" i="0">
                 <a:solidFill>
+                  <a:srgbClr val="3A3A3A"/>
+                </a:solidFill>
+              </a:rPr>
+              <a:t> faz o </a:t>
+            </a:r>
+            <a:r>
+              <a:rPr sz="1250" b="0" i="0">
+                <a:solidFill>
                   <a:srgbClr val="00397B"/>
                 </a:solidFill>
-                <a:latin typeface="Consolas"/>
-              </a:rPr>
-              <a:t>AlunoForm(request.POST, instance=aluno)</a:t>
-            </a:r>
-            <a:r>
-              <a:rPr sz="1400" b="0" i="0">
-                <a:solidFill>
-                  <a:srgbClr val="3A3A3A"/>
-                </a:solidFill>
-              </a:rPr>
-              <a:t> faz o </a:t>
-            </a:r>
-            <a:r>
-              <a:rPr sz="1400" b="0" i="0">
-                <a:solidFill>
-                  <a:srgbClr val="00397B"/>
-                </a:solidFill>
-                <a:latin typeface="Consolas"/>
+                <a:latin typeface="Courier New" pitchFamily="49" charset="0"/>
               </a:rPr>
               <a:t>save()</a:t>
             </a:r>
@@ -18103,7 +18105,7 @@
           <a:noFill/>
         </p:spPr>
         <p:txBody>
-          <a:bodyPr wrap="square" lIns="0" tIns="18288" rIns="0" bIns="18288" anchor="t">
+          <a:bodyPr wrap="none" lIns="0" tIns="18288" rIns="0" bIns="18288" anchor="t">
             <a:noAutofit/>
           </a:bodyPr>
           <a:lstStyle/>
@@ -18114,7 +18116,7 @@
                 <a:solidFill>
                   <a:srgbClr val="9AA5B1"/>
                 </a:solidFill>
-                <a:latin typeface="Consolas"/>
+                <a:latin typeface="Courier New" pitchFamily="49" charset="0"/>
               </a:rPr>
               <a:t>academico/forms.py · TODO 4</a:t>
             </a:r>
@@ -18138,81 +18140,81 @@
           <a:noFill/>
         </p:spPr>
         <p:txBody>
-          <a:bodyPr wrap="square" lIns="0" tIns="18288" rIns="0" bIns="18288" anchor="t">
+          <a:bodyPr wrap="none" lIns="0" tIns="18288" rIns="0" bIns="18288" anchor="t">
             <a:noAutofit/>
           </a:bodyPr>
           <a:lstStyle/>
           <a:p>
             <a:pPr algn="l"/>
             <a:r>
-              <a:rPr sz="1550" b="0" i="0" dirty="0">
+              <a:rPr sz="1450" b="0" i="0" dirty="0">
                 <a:solidFill>
                   <a:srgbClr val="7FD3F0"/>
                 </a:solidFill>
-                <a:latin typeface="Consolas"/>
+                <a:latin typeface="Courier New" pitchFamily="49" charset="0"/>
               </a:rPr>
               <a:t>class</a:t>
             </a:r>
             <a:r>
-              <a:rPr sz="1550" b="0" i="0" dirty="0">
+              <a:rPr sz="1450" b="0" i="0" dirty="0">
                 <a:solidFill>
                   <a:srgbClr val="E6EDF3"/>
                 </a:solidFill>
-                <a:latin typeface="Consolas"/>
+                <a:latin typeface="Courier New" pitchFamily="49" charset="0"/>
               </a:rPr>
               <a:t> </a:t>
             </a:r>
             <a:r>
-              <a:rPr sz="1550" b="0" i="0" dirty="0" err="1">
+              <a:rPr sz="1450" b="0" i="0" dirty="0" err="1">
                 <a:solidFill>
                   <a:srgbClr val="FF0000"/>
                 </a:solidFill>
-                <a:latin typeface="Consolas"/>
+                <a:latin typeface="Courier New" pitchFamily="49" charset="0"/>
               </a:rPr>
               <a:t>AlunoForm</a:t>
             </a:r>
             <a:r>
-              <a:rPr sz="1550" b="0" i="0" dirty="0">
+              <a:rPr sz="1450" b="0" i="0" dirty="0">
                 <a:solidFill>
                   <a:srgbClr val="E6EDF3"/>
                 </a:solidFill>
-                <a:latin typeface="Consolas"/>
+                <a:latin typeface="Courier New" pitchFamily="49" charset="0"/>
               </a:rPr>
               <a:t>(</a:t>
             </a:r>
             <a:r>
-              <a:rPr sz="1550" b="0" i="0" dirty="0" err="1">
+              <a:rPr sz="1450" b="0" i="0" dirty="0" err="1">
                 <a:solidFill>
                   <a:srgbClr val="E6EDF3"/>
                 </a:solidFill>
-                <a:latin typeface="Consolas"/>
+                <a:latin typeface="Courier New" pitchFamily="49" charset="0"/>
               </a:rPr>
               <a:t>BootstrapMixin</a:t>
             </a:r>
             <a:r>
-              <a:rPr sz="1550" b="0" i="0" dirty="0">
+              <a:rPr sz="1450" b="0" i="0" dirty="0">
                 <a:solidFill>
                   <a:srgbClr val="E6EDF3"/>
                 </a:solidFill>
-                <a:latin typeface="Consolas"/>
+                <a:latin typeface="Courier New" pitchFamily="49" charset="0"/>
               </a:rPr>
               <a:t>, </a:t>
             </a:r>
             <a:r>
-              <a:rPr sz="1550" b="0" i="0" dirty="0" err="1">
+              <a:rPr sz="1450" b="0" i="0" dirty="0" err="1">
                 <a:solidFill>
                   <a:srgbClr val="E6EDF3"/>
                 </a:solidFill>
-                <a:latin typeface="Consolas"/>
+                <a:latin typeface="Courier New" pitchFamily="49" charset="0"/>
               </a:rPr>
               <a:t>forms.ModelForm</a:t>
             </a:r>
             <a:r>
-              <a:rPr sz="1550" b="0" i="0" dirty="0">
+              <a:rPr sz="1450" b="0" i="0" dirty="0">
                 <a:solidFill>
                   <a:srgbClr val="E6EDF3"/>
                 </a:solidFill>
-                <a:latin typeface="Consolas"/>
+                <a:latin typeface="Courier New" pitchFamily="49" charset="0"/>
               </a:rPr>
               <a:t>):</a:t>
             </a:r>
@@ -18220,29 +18222,29 @@
           <a:p>
             <a:pPr algn="l"/>
             <a:r>
-              <a:rPr sz="1550" b="0" i="0" dirty="0">
+              <a:rPr sz="1450" b="0" i="0" dirty="0">
                 <a:solidFill>
                   <a:srgbClr val="E6EDF3"/>
                 </a:solidFill>
-                <a:latin typeface="Consolas"/>
+                <a:latin typeface="Courier New" pitchFamily="49" charset="0"/>
               </a:rPr>
               <a:t>    </a:t>
             </a:r>
             <a:r>
-              <a:rPr sz="1550" b="0" i="0" dirty="0">
+              <a:rPr sz="1450" b="0" i="0" dirty="0">
                 <a:solidFill>
                   <a:srgbClr val="7FD3F0"/>
                 </a:solidFill>
-                <a:latin typeface="Consolas"/>
+                <a:latin typeface="Courier New" pitchFamily="49" charset="0"/>
               </a:rPr>
               <a:t>class</a:t>
             </a:r>
             <a:r>
-              <a:rPr sz="1550" b="0" i="0" dirty="0">
+              <a:rPr sz="1450" b="0" i="0" dirty="0">
                 <a:solidFill>
                   <a:srgbClr val="E6EDF3"/>
                 </a:solidFill>
-                <a:latin typeface="Consolas"/>
+                <a:latin typeface="Courier New" pitchFamily="49" charset="0"/>
               </a:rPr>
               <a:t> Meta:</a:t>
             </a:r>
@@ -18250,110 +18252,110 @@
           <a:p>
             <a:pPr algn="l"/>
             <a:r>
-              <a:rPr sz="1550" b="0" i="0" dirty="0">
+              <a:rPr sz="1450" b="0" i="0" dirty="0">
                 <a:solidFill>
                   <a:srgbClr val="E6EDF3"/>
                 </a:solidFill>
-                <a:latin typeface="Consolas"/>
+                <a:latin typeface="Courier New" pitchFamily="49" charset="0"/>
               </a:rPr>
               <a:t>        model = </a:t>
             </a:r>
             <a:r>
-              <a:rPr sz="1550" b="0" i="0" dirty="0" err="1">
+              <a:rPr sz="1450" b="0" i="0" dirty="0" err="1">
                 <a:solidFill>
                   <a:srgbClr val="E6EDF3"/>
                 </a:solidFill>
-                <a:latin typeface="Consolas"/>
+                <a:latin typeface="Courier New" pitchFamily="49" charset="0"/>
               </a:rPr>
               <a:t>Aluno</a:t>
             </a:r>
-            <a:endParaRPr sz="1550" b="0" i="0" dirty="0">
+            <a:endParaRPr sz="1450" b="0" i="0" dirty="0">
               <a:solidFill>
                 <a:srgbClr val="E6EDF3"/>
               </a:solidFill>
-              <a:latin typeface="Consolas"/>
+              <a:latin typeface="Courier New" pitchFamily="49" charset="0"/>
             </a:endParaRPr>
           </a:p>
           <a:p>
             <a:pPr algn="l"/>
             <a:r>
-              <a:rPr sz="1550" b="0" i="0" dirty="0">
+              <a:rPr sz="1450" b="0" i="0" dirty="0">
                 <a:solidFill>
                   <a:srgbClr val="E6EDF3"/>
                 </a:solidFill>
-                <a:latin typeface="Consolas"/>
+                <a:latin typeface="Courier New" pitchFamily="49" charset="0"/>
               </a:rPr>
               <a:t>        fields = [</a:t>
             </a:r>
             <a:r>
-              <a:rPr sz="1550" b="0" i="0" dirty="0">
+              <a:rPr sz="1450" b="0" i="0" dirty="0">
                 <a:solidFill>
                   <a:srgbClr val="F2C078"/>
                 </a:solidFill>
-                <a:latin typeface="Consolas"/>
+                <a:latin typeface="Courier New" pitchFamily="49" charset="0"/>
               </a:rPr>
               <a:t>"matricula"</a:t>
             </a:r>
             <a:r>
-              <a:rPr sz="1550" b="0" i="0" dirty="0">
+              <a:rPr sz="1450" b="0" i="0" dirty="0">
                 <a:solidFill>
                   <a:srgbClr val="E6EDF3"/>
                 </a:solidFill>
-                <a:latin typeface="Consolas"/>
+                <a:latin typeface="Courier New" pitchFamily="49" charset="0"/>
               </a:rPr>
               <a:t>, </a:t>
             </a:r>
             <a:r>
-              <a:rPr sz="1550" b="0" i="0" dirty="0">
+              <a:rPr sz="1450" b="0" i="0" dirty="0">
                 <a:solidFill>
                   <a:srgbClr val="F2C078"/>
                 </a:solidFill>
-                <a:latin typeface="Consolas"/>
+                <a:latin typeface="Courier New" pitchFamily="49" charset="0"/>
               </a:rPr>
               <a:t>"</a:t>
             </a:r>
             <a:r>
-              <a:rPr sz="1550" b="0" i="0" dirty="0" err="1">
+              <a:rPr sz="1450" b="0" i="0" dirty="0" err="1">
                 <a:solidFill>
                   <a:srgbClr val="F2C078"/>
                 </a:solidFill>
-                <a:latin typeface="Consolas"/>
+                <a:latin typeface="Courier New" pitchFamily="49" charset="0"/>
               </a:rPr>
               <a:t>nome</a:t>
             </a:r>
             <a:r>
-              <a:rPr sz="1550" b="0" i="0" dirty="0">
+              <a:rPr sz="1450" b="0" i="0" dirty="0">
                 <a:solidFill>
                   <a:srgbClr val="F2C078"/>
                 </a:solidFill>
-                <a:latin typeface="Consolas"/>
+                <a:latin typeface="Courier New" pitchFamily="49" charset="0"/>
               </a:rPr>
               <a:t>"</a:t>
             </a:r>
             <a:r>
-              <a:rPr sz="1550" b="0" i="0" dirty="0">
+              <a:rPr sz="1450" b="0" i="0" dirty="0">
                 <a:solidFill>
                   <a:srgbClr val="E6EDF3"/>
                 </a:solidFill>
-                <a:latin typeface="Consolas"/>
+                <a:latin typeface="Courier New" pitchFamily="49" charset="0"/>
               </a:rPr>
               <a:t>, </a:t>
             </a:r>
             <a:r>
-              <a:rPr sz="1550" b="0" i="0" dirty="0">
+              <a:rPr sz="1450" b="0" i="0" dirty="0">
                 <a:solidFill>
                   <a:srgbClr val="F2C078"/>
                 </a:solidFill>
-                <a:latin typeface="Consolas"/>
+                <a:latin typeface="Courier New" pitchFamily="49" charset="0"/>
               </a:rPr>
               <a:t>"email"</a:t>
             </a:r>
             <a:r>
-              <a:rPr sz="1550" b="0" i="0" dirty="0">
+              <a:rPr sz="1450" b="0" i="0" dirty="0">
                 <a:solidFill>
                   <a:srgbClr val="E6EDF3"/>
                 </a:solidFill>
-                <a:latin typeface="Consolas"/>
+                <a:latin typeface="Courier New" pitchFamily="49" charset="0"/>
               </a:rPr>
               <a:t>,</a:t>
             </a:r>
@@ -18361,83 +18363,83 @@
           <a:p>
             <a:pPr algn="l"/>
             <a:r>
-              <a:rPr sz="1550" b="0" i="0" dirty="0">
+              <a:rPr sz="1450" b="0" i="0" dirty="0">
                 <a:solidFill>
                   <a:srgbClr val="E6EDF3"/>
                 </a:solidFill>
-                <a:latin typeface="Consolas"/>
+                <a:latin typeface="Courier New" pitchFamily="49" charset="0"/>
               </a:rPr>
               <a:t>                  </a:t>
             </a:r>
             <a:r>
-              <a:rPr sz="1550" b="0" i="0" dirty="0">
+              <a:rPr sz="1450" b="0" i="0" dirty="0">
                 <a:solidFill>
                   <a:srgbClr val="F2C078"/>
                 </a:solidFill>
-                <a:latin typeface="Consolas"/>
+                <a:latin typeface="Courier New" pitchFamily="49" charset="0"/>
               </a:rPr>
               <a:t>"</a:t>
             </a:r>
             <a:r>
-              <a:rPr sz="1550" b="0" i="0" dirty="0" err="1">
+              <a:rPr sz="1450" b="0" i="0" dirty="0" err="1">
                 <a:solidFill>
                   <a:srgbClr val="F2C078"/>
                 </a:solidFill>
-                <a:latin typeface="Consolas"/>
+                <a:latin typeface="Courier New" pitchFamily="49" charset="0"/>
               </a:rPr>
               <a:t>data_nascimento</a:t>
             </a:r>
             <a:r>
-              <a:rPr sz="1550" b="0" i="0" dirty="0">
+              <a:rPr sz="1450" b="0" i="0" dirty="0">
                 <a:solidFill>
                   <a:srgbClr val="F2C078"/>
                 </a:solidFill>
-                <a:latin typeface="Consolas"/>
+                <a:latin typeface="Courier New" pitchFamily="49" charset="0"/>
               </a:rPr>
               <a:t>"</a:t>
             </a:r>
             <a:r>
-              <a:rPr sz="1550" b="0" i="0" dirty="0">
+              <a:rPr sz="1450" b="0" i="0" dirty="0">
                 <a:solidFill>
                   <a:srgbClr val="E6EDF3"/>
                 </a:solidFill>
-                <a:latin typeface="Consolas"/>
+                <a:latin typeface="Courier New" pitchFamily="49" charset="0"/>
               </a:rPr>
               <a:t>, </a:t>
             </a:r>
             <a:r>
-              <a:rPr sz="1550" b="0" i="0" dirty="0">
+              <a:rPr sz="1450" b="0" i="0" dirty="0">
                 <a:solidFill>
                   <a:srgbClr val="F2C078"/>
                 </a:solidFill>
-                <a:latin typeface="Consolas"/>
+                <a:latin typeface="Courier New" pitchFamily="49" charset="0"/>
               </a:rPr>
               <a:t>"</a:t>
             </a:r>
             <a:r>
-              <a:rPr sz="1550" b="0" i="0" dirty="0" err="1">
+              <a:rPr sz="1450" b="0" i="0" dirty="0" err="1">
                 <a:solidFill>
                   <a:srgbClr val="F2C078"/>
                 </a:solidFill>
-                <a:latin typeface="Consolas"/>
+                <a:latin typeface="Courier New" pitchFamily="49" charset="0"/>
               </a:rPr>
               <a:t>ativo</a:t>
             </a:r>
             <a:r>
-              <a:rPr sz="1550" b="0" i="0" dirty="0">
+              <a:rPr sz="1450" b="0" i="0" dirty="0">
                 <a:solidFill>
                   <a:srgbClr val="F2C078"/>
                 </a:solidFill>
-                <a:latin typeface="Consolas"/>
+                <a:latin typeface="Courier New" pitchFamily="49" charset="0"/>
               </a:rPr>
               <a:t>"</a:t>
             </a:r>
             <a:r>
-              <a:rPr sz="1550" b="0" i="0" dirty="0">
+              <a:rPr sz="1450" b="0" i="0" dirty="0">
                 <a:solidFill>
                   <a:srgbClr val="E6EDF3"/>
                 </a:solidFill>
-                <a:latin typeface="Consolas"/>
+                <a:latin typeface="Courier New" pitchFamily="49" charset="0"/>
               </a:rPr>
               <a:t>]</a:t>
             </a:r>
@@ -18445,11 +18447,11 @@
           <a:p>
             <a:pPr algn="l"/>
             <a:r>
-              <a:rPr sz="1550" b="0" i="0" dirty="0">
+              <a:rPr sz="1450" b="0" i="0" dirty="0">
                 <a:solidFill>
                   <a:srgbClr val="E6EDF3"/>
                 </a:solidFill>
-                <a:latin typeface="Consolas"/>
+                <a:latin typeface="Courier New" pitchFamily="49" charset="0"/>
               </a:rPr>
               <a:t> </a:t>
             </a:r>
@@ -18457,47 +18459,47 @@
           <a:p>
             <a:pPr algn="l"/>
             <a:r>
-              <a:rPr sz="1550" b="0" i="0" dirty="0">
+              <a:rPr sz="1450" b="0" i="0" dirty="0">
                 <a:solidFill>
                   <a:srgbClr val="E6EDF3"/>
                 </a:solidFill>
-                <a:latin typeface="Consolas"/>
+                <a:latin typeface="Courier New" pitchFamily="49" charset="0"/>
               </a:rPr>
               <a:t>    </a:t>
             </a:r>
             <a:r>
-              <a:rPr sz="1550" b="0" i="0" dirty="0">
+              <a:rPr sz="1450" b="0" i="0" dirty="0">
                 <a:solidFill>
                   <a:srgbClr val="7FD3F0"/>
                 </a:solidFill>
-                <a:latin typeface="Consolas"/>
+                <a:latin typeface="Courier New" pitchFamily="49" charset="0"/>
               </a:rPr>
               <a:t>def</a:t>
             </a:r>
             <a:r>
-              <a:rPr sz="1550" b="0" i="0" dirty="0">
+              <a:rPr sz="1450" b="0" i="0" dirty="0">
                 <a:solidFill>
                   <a:srgbClr val="E6EDF3"/>
                 </a:solidFill>
-                <a:latin typeface="Consolas"/>
+                <a:latin typeface="Courier New" pitchFamily="49" charset="0"/>
               </a:rPr>
               <a:t> </a:t>
             </a:r>
             <a:r>
-              <a:rPr sz="1550" b="0" i="0" dirty="0" err="1">
+              <a:rPr sz="1450" b="0" i="0" dirty="0" err="1">
                 <a:solidFill>
                   <a:srgbClr val="E6EDF3"/>
                 </a:solidFill>
-                <a:latin typeface="Consolas"/>
+                <a:latin typeface="Courier New" pitchFamily="49" charset="0"/>
               </a:rPr>
               <a:t>clean_matricula</a:t>
             </a:r>
             <a:r>
-              <a:rPr sz="1550" b="0" i="0" dirty="0">
+              <a:rPr sz="1450" b="0" i="0" dirty="0">
                 <a:solidFill>
                   <a:srgbClr val="E6EDF3"/>
                 </a:solidFill>
-                <a:latin typeface="Consolas"/>
+                <a:latin typeface="Courier New" pitchFamily="49" charset="0"/>
               </a:rPr>
               <a:t>(self):</a:t>
             </a:r>
@@ -18505,47 +18507,47 @@
           <a:p>
             <a:pPr algn="l"/>
             <a:r>
-              <a:rPr sz="1550" b="0" i="0" dirty="0">
+              <a:rPr sz="1450" b="0" i="0" dirty="0">
                 <a:solidFill>
                   <a:srgbClr val="E6EDF3"/>
                 </a:solidFill>
-                <a:latin typeface="Consolas"/>
+                <a:latin typeface="Courier New" pitchFamily="49" charset="0"/>
               </a:rPr>
               <a:t>        matricula = </a:t>
             </a:r>
             <a:r>
-              <a:rPr sz="1550" b="0" i="0" dirty="0" err="1">
+              <a:rPr sz="1450" b="0" i="0" dirty="0" err="1">
                 <a:solidFill>
                   <a:srgbClr val="E6EDF3"/>
                 </a:solidFill>
-                <a:latin typeface="Consolas"/>
+                <a:latin typeface="Courier New" pitchFamily="49" charset="0"/>
               </a:rPr>
               <a:t>self.cleaned_data</a:t>
             </a:r>
             <a:r>
-              <a:rPr sz="1550" b="0" i="0" dirty="0">
+              <a:rPr sz="1450" b="0" i="0" dirty="0">
                 <a:solidFill>
                   <a:srgbClr val="E6EDF3"/>
                 </a:solidFill>
-                <a:latin typeface="Consolas"/>
+                <a:latin typeface="Courier New" pitchFamily="49" charset="0"/>
               </a:rPr>
               <a:t>[</a:t>
             </a:r>
             <a:r>
-              <a:rPr sz="1550" b="0" i="0" dirty="0">
+              <a:rPr sz="1450" b="0" i="0" dirty="0">
                 <a:solidFill>
                   <a:srgbClr val="F2C078"/>
                 </a:solidFill>
-                <a:latin typeface="Consolas"/>
+                <a:latin typeface="Courier New" pitchFamily="49" charset="0"/>
               </a:rPr>
               <a:t>"matricula"</a:t>
             </a:r>
             <a:r>
-              <a:rPr sz="1550" b="0" i="0" dirty="0">
+              <a:rPr sz="1450" b="0" i="0" dirty="0">
                 <a:solidFill>
                   <a:srgbClr val="E6EDF3"/>
                 </a:solidFill>
-                <a:latin typeface="Consolas"/>
+                <a:latin typeface="Courier New" pitchFamily="49" charset="0"/>
               </a:rPr>
               <a:t>]</a:t>
             </a:r>
@@ -18553,29 +18555,29 @@
           <a:p>
             <a:pPr algn="l"/>
             <a:r>
-              <a:rPr sz="1550" b="0" i="0" dirty="0">
+              <a:rPr sz="1450" b="0" i="0" dirty="0">
                 <a:solidFill>
                   <a:srgbClr val="E6EDF3"/>
                 </a:solidFill>
-                <a:latin typeface="Consolas"/>
+                <a:latin typeface="Courier New" pitchFamily="49" charset="0"/>
               </a:rPr>
               <a:t>        matricula = </a:t>
             </a:r>
             <a:r>
-              <a:rPr sz="1550" b="0" i="0" dirty="0" err="1">
+              <a:rPr sz="1450" b="0" i="0" dirty="0" err="1">
                 <a:solidFill>
                   <a:srgbClr val="E6EDF3"/>
                 </a:solidFill>
-                <a:latin typeface="Consolas"/>
+                <a:latin typeface="Courier New" pitchFamily="49" charset="0"/>
               </a:rPr>
               <a:t>matricula.strip</a:t>
             </a:r>
             <a:r>
-              <a:rPr sz="1550" b="0" i="0" dirty="0">
+              <a:rPr sz="1450" b="0" i="0" dirty="0">
                 <a:solidFill>
                   <a:srgbClr val="E6EDF3"/>
                 </a:solidFill>
-                <a:latin typeface="Consolas"/>
+                <a:latin typeface="Courier New" pitchFamily="49" charset="0"/>
               </a:rPr>
               <a:t>().upper()</a:t>
             </a:r>
@@ -18583,47 +18585,47 @@
           <a:p>
             <a:pPr algn="l"/>
             <a:r>
-              <a:rPr sz="1550" b="0" i="0" dirty="0">
+              <a:rPr sz="1450" b="0" i="0" dirty="0">
                 <a:solidFill>
                   <a:srgbClr val="E6EDF3"/>
                 </a:solidFill>
-                <a:latin typeface="Consolas"/>
+                <a:latin typeface="Courier New" pitchFamily="49" charset="0"/>
               </a:rPr>
               <a:t>        </a:t>
             </a:r>
             <a:r>
-              <a:rPr sz="1550" b="0" i="0" dirty="0">
+              <a:rPr sz="1450" b="0" i="0" dirty="0">
                 <a:solidFill>
                   <a:srgbClr val="7FD3F0"/>
                 </a:solidFill>
-                <a:latin typeface="Consolas"/>
+                <a:latin typeface="Courier New" pitchFamily="49" charset="0"/>
               </a:rPr>
               <a:t>if</a:t>
             </a:r>
             <a:r>
-              <a:rPr sz="1550" b="0" i="0" dirty="0">
+              <a:rPr sz="1450" b="0" i="0" dirty="0">
                 <a:solidFill>
                   <a:srgbClr val="E6EDF3"/>
                 </a:solidFill>
-                <a:latin typeface="Consolas"/>
+                <a:latin typeface="Courier New" pitchFamily="49" charset="0"/>
               </a:rPr>
               <a:t> </a:t>
             </a:r>
             <a:r>
-              <a:rPr sz="1550" b="0" i="0" dirty="0" err="1">
+              <a:rPr sz="1450" b="0" i="0" dirty="0" err="1">
                 <a:solidFill>
                   <a:srgbClr val="E6EDF3"/>
                 </a:solidFill>
-                <a:latin typeface="Consolas"/>
+                <a:latin typeface="Courier New" pitchFamily="49" charset="0"/>
               </a:rPr>
               <a:t>len</a:t>
             </a:r>
             <a:r>
-              <a:rPr sz="1550" b="0" i="0" dirty="0">
+              <a:rPr sz="1450" b="0" i="0" dirty="0">
                 <a:solidFill>
                   <a:srgbClr val="E6EDF3"/>
                 </a:solidFill>
-                <a:latin typeface="Consolas"/>
+                <a:latin typeface="Courier New" pitchFamily="49" charset="0"/>
               </a:rPr>
               <a:t>(matricula) &lt; 4:</a:t>
             </a:r>
@@ -18631,47 +18633,47 @@
           <a:p>
             <a:pPr algn="l"/>
             <a:r>
-              <a:rPr sz="1550" b="0" i="0" dirty="0">
+              <a:rPr sz="1450" b="0" i="0" dirty="0">
                 <a:solidFill>
                   <a:srgbClr val="E6EDF3"/>
                 </a:solidFill>
-                <a:latin typeface="Consolas"/>
+                <a:latin typeface="Courier New" pitchFamily="49" charset="0"/>
               </a:rPr>
               <a:t>            </a:t>
             </a:r>
             <a:r>
-              <a:rPr sz="1550" b="0" i="0" dirty="0">
+              <a:rPr sz="1450" b="0" i="0" dirty="0">
                 <a:solidFill>
                   <a:srgbClr val="7FD3F0"/>
                 </a:solidFill>
-                <a:latin typeface="Consolas"/>
+                <a:latin typeface="Courier New" pitchFamily="49" charset="0"/>
               </a:rPr>
               <a:t>raise</a:t>
             </a:r>
             <a:r>
-              <a:rPr sz="1550" b="0" i="0" dirty="0">
+              <a:rPr sz="1450" b="0" i="0" dirty="0">
                 <a:solidFill>
                   <a:srgbClr val="E6EDF3"/>
                 </a:solidFill>
-                <a:latin typeface="Consolas"/>
+                <a:latin typeface="Courier New" pitchFamily="49" charset="0"/>
               </a:rPr>
               <a:t> </a:t>
             </a:r>
             <a:r>
-              <a:rPr sz="1550" b="0" i="0" dirty="0" err="1">
+              <a:rPr sz="1450" b="0" i="0" dirty="0" err="1">
                 <a:solidFill>
                   <a:srgbClr val="E6EDF3"/>
                 </a:solidFill>
-                <a:latin typeface="Consolas"/>
+                <a:latin typeface="Courier New" pitchFamily="49" charset="0"/>
               </a:rPr>
               <a:t>forms.ValidationError</a:t>
             </a:r>
             <a:r>
-              <a:rPr sz="1550" b="0" i="0" dirty="0">
+              <a:rPr sz="1450" b="0" i="0" dirty="0">
                 <a:solidFill>
                   <a:srgbClr val="E6EDF3"/>
                 </a:solidFill>
-                <a:latin typeface="Consolas"/>
+                <a:latin typeface="Courier New" pitchFamily="49" charset="0"/>
               </a:rPr>
               <a:t>(</a:t>
             </a:r>
@@ -18679,83 +18681,83 @@
           <a:p>
             <a:pPr algn="l"/>
             <a:r>
-              <a:rPr sz="1550" b="0" i="0" dirty="0">
+              <a:rPr sz="1450" b="0" i="0" dirty="0">
                 <a:solidFill>
                   <a:srgbClr val="E6EDF3"/>
                 </a:solidFill>
-                <a:latin typeface="Consolas"/>
+                <a:latin typeface="Courier New" pitchFamily="49" charset="0"/>
               </a:rPr>
               <a:t>                </a:t>
             </a:r>
             <a:r>
-              <a:rPr sz="1550" b="0" i="0" dirty="0">
+              <a:rPr sz="1450" b="0" i="0" dirty="0">
                 <a:solidFill>
                   <a:srgbClr val="F2C078"/>
                 </a:solidFill>
-                <a:latin typeface="Consolas"/>
+                <a:latin typeface="Courier New" pitchFamily="49" charset="0"/>
               </a:rPr>
               <a:t>"Use </a:t>
             </a:r>
             <a:r>
-              <a:rPr sz="1550" b="0" i="0" dirty="0" err="1">
+              <a:rPr sz="1450" b="0" i="0" dirty="0" err="1">
                 <a:solidFill>
                   <a:srgbClr val="F2C078"/>
                 </a:solidFill>
-                <a:latin typeface="Consolas"/>
+                <a:latin typeface="Courier New" pitchFamily="49" charset="0"/>
               </a:rPr>
               <a:t>ao</a:t>
             </a:r>
             <a:r>
-              <a:rPr sz="1550" b="0" i="0" dirty="0">
+              <a:rPr sz="1450" b="0" i="0" dirty="0">
                 <a:solidFill>
                   <a:srgbClr val="F2C078"/>
                 </a:solidFill>
-                <a:latin typeface="Consolas"/>
+                <a:latin typeface="Courier New" pitchFamily="49" charset="0"/>
               </a:rPr>
               <a:t> </a:t>
             </a:r>
             <a:r>
-              <a:rPr sz="1550" b="0" i="0" dirty="0" err="1">
+              <a:rPr sz="1450" b="0" i="0" dirty="0" err="1">
                 <a:solidFill>
                   <a:srgbClr val="F2C078"/>
                 </a:solidFill>
-                <a:latin typeface="Consolas"/>
+                <a:latin typeface="Courier New" pitchFamily="49" charset="0"/>
               </a:rPr>
               <a:t>menos</a:t>
             </a:r>
             <a:r>
-              <a:rPr sz="1550" b="0" i="0" dirty="0">
+              <a:rPr sz="1450" b="0" i="0" dirty="0">
                 <a:solidFill>
                   <a:srgbClr val="F2C078"/>
                 </a:solidFill>
-                <a:latin typeface="Consolas"/>
+                <a:latin typeface="Courier New" pitchFamily="49" charset="0"/>
               </a:rPr>
               <a:t> 4 </a:t>
             </a:r>
             <a:r>
-              <a:rPr sz="1550" b="0" i="0" dirty="0" err="1">
+              <a:rPr sz="1450" b="0" i="0" dirty="0" err="1">
                 <a:solidFill>
                   <a:srgbClr val="F2C078"/>
                 </a:solidFill>
-                <a:latin typeface="Consolas"/>
+                <a:latin typeface="Courier New" pitchFamily="49" charset="0"/>
               </a:rPr>
               <a:t>caracteres</a:t>
             </a:r>
             <a:r>
-              <a:rPr sz="1550" b="0" i="0" dirty="0">
+              <a:rPr sz="1450" b="0" i="0" dirty="0">
                 <a:solidFill>
                   <a:srgbClr val="F2C078"/>
                 </a:solidFill>
-                <a:latin typeface="Consolas"/>
+                <a:latin typeface="Courier New" pitchFamily="49" charset="0"/>
               </a:rPr>
               <a:t>."</a:t>
             </a:r>
             <a:r>
-              <a:rPr sz="1550" b="0" i="0" dirty="0">
+              <a:rPr sz="1450" b="0" i="0" dirty="0">
                 <a:solidFill>
                   <a:srgbClr val="E6EDF3"/>
                 </a:solidFill>
-                <a:latin typeface="Consolas"/>
+                <a:latin typeface="Courier New" pitchFamily="49" charset="0"/>
               </a:rPr>
               <a:t>)</a:t>
             </a:r>
@@ -18763,29 +18765,29 @@
           <a:p>
             <a:pPr algn="l"/>
             <a:r>
-              <a:rPr sz="1550" b="0" i="0" dirty="0">
+              <a:rPr sz="1450" b="0" i="0" dirty="0">
                 <a:solidFill>
                   <a:srgbClr val="E6EDF3"/>
                 </a:solidFill>
-                <a:latin typeface="Consolas"/>
+                <a:latin typeface="Courier New" pitchFamily="49" charset="0"/>
               </a:rPr>
               <a:t>        </a:t>
             </a:r>
             <a:r>
-              <a:rPr sz="1550" b="0" i="0" dirty="0">
+              <a:rPr sz="1450" b="0" i="0" dirty="0">
                 <a:solidFill>
                   <a:srgbClr val="7FD3F0"/>
                 </a:solidFill>
-                <a:latin typeface="Consolas"/>
+                <a:latin typeface="Courier New" pitchFamily="49" charset="0"/>
               </a:rPr>
               <a:t>return</a:t>
             </a:r>
             <a:r>
-              <a:rPr sz="1550" b="0" i="0" dirty="0">
+              <a:rPr sz="1450" b="0" i="0" dirty="0">
                 <a:solidFill>
                   <a:srgbClr val="E6EDF3"/>
                 </a:solidFill>
-                <a:latin typeface="Consolas"/>
+                <a:latin typeface="Courier New" pitchFamily="49" charset="0"/>
               </a:rPr>
               <a:t> matricula</a:t>
             </a:r>
@@ -18957,11 +18959,11 @@
               <a:t>Lê o model e gera cada </a:t>
             </a:r>
             <a:r>
-              <a:rPr sz="1400" b="0" i="0">
+              <a:rPr sz="1250" b="0" i="0">
                 <a:solidFill>
                   <a:srgbClr val="00397B"/>
                 </a:solidFill>
-                <a:latin typeface="Consolas"/>
+                <a:latin typeface="Courier New" pitchFamily="49" charset="0"/>
               </a:rPr>
               <a:t>&lt;input&gt;</a:t>
             </a:r>
@@ -19133,28 +19135,28 @@
           <a:p>
             <a:pPr algn="l"/>
             <a:r>
+              <a:rPr sz="1250" b="0" i="0">
+                <a:solidFill>
+                  <a:srgbClr val="00397B"/>
+                </a:solidFill>
+                <a:latin typeface="Courier New" pitchFamily="49" charset="0"/>
+              </a:rPr>
+              <a:t>is_valid()</a:t>
+            </a:r>
+            <a:r>
               <a:rPr sz="1400" b="0" i="0">
                 <a:solidFill>
+                  <a:srgbClr val="3A3A3A"/>
+                </a:solidFill>
+              </a:rPr>
+              <a:t> roda as regras do model e os </a:t>
+            </a:r>
+            <a:r>
+              <a:rPr sz="1250" b="0" i="0">
+                <a:solidFill>
                   <a:srgbClr val="00397B"/>
                 </a:solidFill>
-                <a:latin typeface="Consolas"/>
-              </a:rPr>
-              <a:t>is_valid()</a:t>
-            </a:r>
-            <a:r>
-              <a:rPr sz="1400" b="0" i="0">
-                <a:solidFill>
-                  <a:srgbClr val="3A3A3A"/>
-                </a:solidFill>
-              </a:rPr>
-              <a:t> roda as regras do model e os </a:t>
-            </a:r>
-            <a:r>
-              <a:rPr sz="1400" b="0" i="0">
-                <a:solidFill>
-                  <a:srgbClr val="00397B"/>
-                </a:solidFill>
-                <a:latin typeface="Consolas"/>
+                <a:latin typeface="Courier New" pitchFamily="49" charset="0"/>
               </a:rPr>
               <a:t>clean_&lt;campo&gt;</a:t>
             </a:r>
@@ -19334,28 +19336,28 @@
               <a:t>"2024-03-15" vira </a:t>
             </a:r>
             <a:r>
+              <a:rPr sz="1250" b="0" i="0">
+                <a:solidFill>
+                  <a:srgbClr val="00397B"/>
+                </a:solidFill>
+                <a:latin typeface="Courier New" pitchFamily="49" charset="0"/>
+              </a:rPr>
+              <a:t>date</a:t>
+            </a:r>
+            <a:r>
               <a:rPr sz="1400" b="0" i="0">
                 <a:solidFill>
+                  <a:srgbClr val="3A3A3A"/>
+                </a:solidFill>
+              </a:rPr>
+              <a:t>. O resultado fica em </a:t>
+            </a:r>
+            <a:r>
+              <a:rPr sz="1250" b="0" i="0">
+                <a:solidFill>
                   <a:srgbClr val="00397B"/>
                 </a:solidFill>
-                <a:latin typeface="Consolas"/>
-              </a:rPr>
-              <a:t>date</a:t>
-            </a:r>
-            <a:r>
-              <a:rPr sz="1400" b="0" i="0">
-                <a:solidFill>
-                  <a:srgbClr val="3A3A3A"/>
-                </a:solidFill>
-              </a:rPr>
-              <a:t>. O resultado fica em </a:t>
-            </a:r>
-            <a:r>
-              <a:rPr sz="1400" b="0" i="0">
-                <a:solidFill>
-                  <a:srgbClr val="00397B"/>
-                </a:solidFill>
-                <a:latin typeface="Consolas"/>
+                <a:latin typeface="Courier New" pitchFamily="49" charset="0"/>
               </a:rPr>
               <a:t>cleaned_data</a:t>
             </a:r>
@@ -19741,7 +19743,7 @@
           <a:noFill/>
         </p:spPr>
         <p:txBody>
-          <a:bodyPr wrap="square" lIns="0" tIns="18288" rIns="0" bIns="18288" anchor="t">
+          <a:bodyPr wrap="none" lIns="0" tIns="18288" rIns="0" bIns="18288" anchor="t">
             <a:noAutofit/>
           </a:bodyPr>
           <a:lstStyle/>
@@ -19752,7 +19754,7 @@
                 <a:solidFill>
                   <a:srgbClr val="9AA5B1"/>
                 </a:solidFill>
-                <a:latin typeface="Consolas"/>
+                <a:latin typeface="Courier New" pitchFamily="49" charset="0"/>
               </a:rPr>
               <a:t>views.py</a:t>
             </a:r>
@@ -19776,7 +19778,7 @@
           <a:noFill/>
         </p:spPr>
         <p:txBody>
-          <a:bodyPr wrap="square" lIns="0" tIns="18288" rIns="0" bIns="18288" anchor="t">
+          <a:bodyPr wrap="none" lIns="0" tIns="18288" rIns="0" bIns="18288" anchor="t">
             <a:noAutofit/>
           </a:bodyPr>
           <a:lstStyle/>
@@ -19787,7 +19789,7 @@
                 <a:solidFill>
                   <a:srgbClr val="C792EA"/>
                 </a:solidFill>
-                <a:latin typeface="Consolas"/>
+                <a:latin typeface="Courier New" pitchFamily="49" charset="0"/>
               </a:rPr>
               <a:t>@somente_coordenacao</a:t>
             </a:r>
@@ -19796,7 +19798,7 @@
                 <a:solidFill>
                   <a:srgbClr val="E6EDF3"/>
                 </a:solidFill>
-                <a:latin typeface="Consolas"/>
+                <a:latin typeface="Courier New" pitchFamily="49" charset="0"/>
               </a:rPr>
               <a:t>   </a:t>
             </a:r>
@@ -19805,7 +19807,7 @@
                 <a:solidFill>
                   <a:srgbClr val="8B98A5"/>
                 </a:solidFill>
-                <a:latin typeface="Consolas"/>
+                <a:latin typeface="Courier New" pitchFamily="49" charset="0"/>
               </a:rPr>
               <a:t># contas/decorators.py</a:t>
             </a:r>
@@ -19817,7 +19819,7 @@
                 <a:solidFill>
                   <a:srgbClr val="7FD3F0"/>
                 </a:solidFill>
-                <a:latin typeface="Consolas"/>
+                <a:latin typeface="Courier New" pitchFamily="49" charset="0"/>
               </a:rPr>
               <a:t>def</a:t>
             </a:r>
@@ -19826,7 +19828,7 @@
                 <a:solidFill>
                   <a:srgbClr val="E6EDF3"/>
                 </a:solidFill>
-                <a:latin typeface="Consolas"/>
+                <a:latin typeface="Courier New" pitchFamily="49" charset="0"/>
               </a:rPr>
               <a:t> usuario_lista(request): ...</a:t>
             </a:r>
@@ -19838,7 +19840,7 @@
                 <a:solidFill>
                   <a:srgbClr val="E6EDF3"/>
                 </a:solidFill>
-                <a:latin typeface="Consolas"/>
+                <a:latin typeface="Courier New" pitchFamily="49" charset="0"/>
               </a:rPr>
               <a:t> </a:t>
             </a:r>
@@ -19850,7 +19852,7 @@
                 <a:solidFill>
                   <a:srgbClr val="C792EA"/>
                 </a:solidFill>
-                <a:latin typeface="Consolas"/>
+                <a:latin typeface="Courier New" pitchFamily="49" charset="0"/>
               </a:rPr>
               <a:t>@login_required</a:t>
             </a:r>
@@ -19859,7 +19861,7 @@
                 <a:solidFill>
                   <a:srgbClr val="E6EDF3"/>
                 </a:solidFill>
-                <a:latin typeface="Consolas"/>
+                <a:latin typeface="Courier New" pitchFamily="49" charset="0"/>
               </a:rPr>
               <a:t>        </a:t>
             </a:r>
@@ -19868,7 +19870,7 @@
                 <a:solidFill>
                   <a:srgbClr val="8B98A5"/>
                 </a:solidFill>
-                <a:latin typeface="Consolas"/>
+                <a:latin typeface="Courier New" pitchFamily="49" charset="0"/>
               </a:rPr>
               <a:t># toda view do academico</a:t>
             </a:r>
@@ -19880,7 +19882,7 @@
                 <a:solidFill>
                   <a:srgbClr val="7FD3F0"/>
                 </a:solidFill>
-                <a:latin typeface="Consolas"/>
+                <a:latin typeface="Courier New" pitchFamily="49" charset="0"/>
               </a:rPr>
               <a:t>def</a:t>
             </a:r>
@@ -19889,7 +19891,7 @@
                 <a:solidFill>
                   <a:srgbClr val="E6EDF3"/>
                 </a:solidFill>
-                <a:latin typeface="Consolas"/>
+                <a:latin typeface="Courier New" pitchFamily="49" charset="0"/>
               </a:rPr>
               <a:t> aluno_lista(request): ...</a:t>
             </a:r>
@@ -20230,7 +20232,7 @@
           <a:noFill/>
         </p:spPr>
         <p:txBody>
-          <a:bodyPr wrap="square" lIns="0" tIns="18288" rIns="0" bIns="18288" anchor="t">
+          <a:bodyPr wrap="none" lIns="0" tIns="18288" rIns="0" bIns="18288" anchor="t">
             <a:noAutofit/>
           </a:bodyPr>
           <a:lstStyle/>
@@ -20241,7 +20243,7 @@
                 <a:solidFill>
                   <a:srgbClr val="9AA5B1"/>
                 </a:solidFill>
-                <a:latin typeface="Consolas"/>
+                <a:latin typeface="Courier New" pitchFamily="49" charset="0"/>
               </a:rPr>
               <a:t>entrega1/crud_aluno.py</a:t>
             </a:r>
@@ -20265,27 +20267,27 @@
           <a:noFill/>
         </p:spPr>
         <p:txBody>
-          <a:bodyPr wrap="square" lIns="0" tIns="18288" rIns="0" bIns="18288" anchor="t">
+          <a:bodyPr wrap="none" lIns="0" tIns="18288" rIns="0" bIns="18288" anchor="t">
             <a:noAutofit/>
           </a:bodyPr>
           <a:lstStyle/>
           <a:p>
             <a:pPr algn="l"/>
             <a:r>
-              <a:rPr sz="1550" b="0" i="0">
+              <a:rPr sz="1500" b="0" i="0">
                 <a:solidFill>
                   <a:srgbClr val="7FD3F0"/>
                 </a:solidFill>
-                <a:latin typeface="Consolas"/>
+                <a:latin typeface="Courier New" pitchFamily="49" charset="0"/>
               </a:rPr>
               <a:t>import</a:t>
             </a:r>
             <a:r>
-              <a:rPr sz="1550" b="0" i="0">
+              <a:rPr sz="1500" b="0" i="0">
                 <a:solidFill>
                   <a:srgbClr val="E6EDF3"/>
                 </a:solidFill>
-                <a:latin typeface="Consolas"/>
+                <a:latin typeface="Courier New" pitchFamily="49" charset="0"/>
               </a:rPr>
               <a:t> sqlite3</a:t>
             </a:r>
@@ -20293,11 +20295,11 @@
           <a:p>
             <a:pPr algn="l"/>
             <a:r>
-              <a:rPr sz="1550" b="0" i="0">
+              <a:rPr sz="1500" b="0" i="0">
                 <a:solidFill>
                   <a:srgbClr val="E6EDF3"/>
                 </a:solidFill>
-                <a:latin typeface="Consolas"/>
+                <a:latin typeface="Courier New" pitchFamily="49" charset="0"/>
               </a:rPr>
               <a:t> </a:t>
             </a:r>
@@ -20305,29 +20307,29 @@
           <a:p>
             <a:pPr algn="l"/>
             <a:r>
-              <a:rPr sz="1550" b="0" i="0">
+              <a:rPr sz="1500" b="0" i="0">
                 <a:solidFill>
                   <a:srgbClr val="E6EDF3"/>
                 </a:solidFill>
-                <a:latin typeface="Consolas"/>
+                <a:latin typeface="Courier New" pitchFamily="49" charset="0"/>
               </a:rPr>
               <a:t>conexao = sqlite3.connect(</a:t>
             </a:r>
             <a:r>
-              <a:rPr sz="1550" b="0" i="0">
+              <a:rPr sz="1500" b="0" i="0">
                 <a:solidFill>
                   <a:srgbClr val="F2C078"/>
                 </a:solidFill>
-                <a:latin typeface="Consolas"/>
+                <a:latin typeface="Courier New" pitchFamily="49" charset="0"/>
               </a:rPr>
               <a:t>"escola.db"</a:t>
             </a:r>
             <a:r>
-              <a:rPr sz="1550" b="0" i="0">
+              <a:rPr sz="1500" b="0" i="0">
                 <a:solidFill>
                   <a:srgbClr val="E6EDF3"/>
                 </a:solidFill>
-                <a:latin typeface="Consolas"/>
+                <a:latin typeface="Courier New" pitchFamily="49" charset="0"/>
               </a:rPr>
               <a:t>)</a:t>
             </a:r>
@@ -20335,29 +20337,29 @@
           <a:p>
             <a:pPr algn="l"/>
             <a:r>
-              <a:rPr sz="1550" b="0" i="0">
+              <a:rPr sz="1500" b="0" i="0">
                 <a:solidFill>
                   <a:srgbClr val="E6EDF3"/>
                 </a:solidFill>
-                <a:latin typeface="Consolas"/>
+                <a:latin typeface="Courier New" pitchFamily="49" charset="0"/>
               </a:rPr>
               <a:t>conexao.execute(</a:t>
             </a:r>
             <a:r>
-              <a:rPr sz="1550" b="0" i="0">
+              <a:rPr sz="1500" b="0" i="0">
                 <a:solidFill>
                   <a:srgbClr val="F2C078"/>
                 </a:solidFill>
-                <a:latin typeface="Consolas"/>
+                <a:latin typeface="Courier New" pitchFamily="49" charset="0"/>
               </a:rPr>
               <a:t>"PRAGMA foreign_keys = ON"</a:t>
             </a:r>
             <a:r>
-              <a:rPr sz="1550" b="0" i="0">
+              <a:rPr sz="1500" b="0" i="0">
                 <a:solidFill>
                   <a:srgbClr val="E6EDF3"/>
                 </a:solidFill>
-                <a:latin typeface="Consolas"/>
+                <a:latin typeface="Courier New" pitchFamily="49" charset="0"/>
               </a:rPr>
               <a:t>)</a:t>
             </a:r>
@@ -20365,11 +20367,11 @@
           <a:p>
             <a:pPr algn="l"/>
             <a:r>
-              <a:rPr sz="1550" b="0" i="0">
+              <a:rPr sz="1500" b="0" i="0">
                 <a:solidFill>
                   <a:srgbClr val="E6EDF3"/>
                 </a:solidFill>
-                <a:latin typeface="Consolas"/>
+                <a:latin typeface="Courier New" pitchFamily="49" charset="0"/>
               </a:rPr>
               <a:t>cursor = conexao.cursor()</a:t>
             </a:r>
@@ -20377,11 +20379,11 @@
           <a:p>
             <a:pPr algn="l"/>
             <a:r>
-              <a:rPr sz="1550" b="0" i="0">
+              <a:rPr sz="1500" b="0" i="0">
                 <a:solidFill>
                   <a:srgbClr val="E6EDF3"/>
                 </a:solidFill>
-                <a:latin typeface="Consolas"/>
+                <a:latin typeface="Courier New" pitchFamily="49" charset="0"/>
               </a:rPr>
               <a:t>cursor.execute(</a:t>
             </a:r>
@@ -20389,20 +20391,20 @@
           <a:p>
             <a:pPr algn="l"/>
             <a:r>
-              <a:rPr sz="1550" b="0" i="0">
+              <a:rPr sz="1500" b="0" i="0">
                 <a:solidFill>
                   <a:srgbClr val="E6EDF3"/>
                 </a:solidFill>
-                <a:latin typeface="Consolas"/>
+                <a:latin typeface="Courier New" pitchFamily="49" charset="0"/>
               </a:rPr>
               <a:t>    </a:t>
             </a:r>
             <a:r>
-              <a:rPr sz="1550" b="0" i="0">
+              <a:rPr sz="1500" b="0" i="0">
                 <a:solidFill>
                   <a:srgbClr val="F2C078"/>
                 </a:solidFill>
-                <a:latin typeface="Consolas"/>
+                <a:latin typeface="Courier New" pitchFamily="49" charset="0"/>
               </a:rPr>
               <a:t>"INSERT INTO aluno (matricula, nome) "</a:t>
             </a:r>
@@ -20410,29 +20412,29 @@
           <a:p>
             <a:pPr algn="l"/>
             <a:r>
-              <a:rPr sz="1550" b="0" i="0">
+              <a:rPr sz="1500" b="0" i="0">
                 <a:solidFill>
                   <a:srgbClr val="E6EDF3"/>
                 </a:solidFill>
-                <a:latin typeface="Consolas"/>
+                <a:latin typeface="Courier New" pitchFamily="49" charset="0"/>
               </a:rPr>
               <a:t>    </a:t>
             </a:r>
             <a:r>
-              <a:rPr sz="1550" b="0" i="0">
+              <a:rPr sz="1500" b="0" i="0">
                 <a:solidFill>
                   <a:srgbClr val="F2C078"/>
                 </a:solidFill>
-                <a:latin typeface="Consolas"/>
+                <a:latin typeface="Courier New" pitchFamily="49" charset="0"/>
               </a:rPr>
               <a:t>"VALUES (?, ?)"</a:t>
             </a:r>
             <a:r>
-              <a:rPr sz="1550" b="0" i="0">
+              <a:rPr sz="1500" b="0" i="0">
                 <a:solidFill>
                   <a:srgbClr val="E6EDF3"/>
                 </a:solidFill>
-                <a:latin typeface="Consolas"/>
+                <a:latin typeface="Courier New" pitchFamily="49" charset="0"/>
               </a:rPr>
               <a:t>,</a:t>
             </a:r>
@@ -20440,11 +20442,11 @@
           <a:p>
             <a:pPr algn="l"/>
             <a:r>
-              <a:rPr sz="1550" b="0" i="0">
+              <a:rPr sz="1500" b="0" i="0">
                 <a:solidFill>
                   <a:srgbClr val="E6EDF3"/>
                 </a:solidFill>
-                <a:latin typeface="Consolas"/>
+                <a:latin typeface="Courier New" pitchFamily="49" charset="0"/>
               </a:rPr>
               <a:t>    (matricula, nome),</a:t>
             </a:r>
@@ -20452,11 +20454,11 @@
           <a:p>
             <a:pPr algn="l"/>
             <a:r>
-              <a:rPr sz="1550" b="0" i="0">
+              <a:rPr sz="1500" b="0" i="0">
                 <a:solidFill>
                   <a:srgbClr val="E6EDF3"/>
                 </a:solidFill>
-                <a:latin typeface="Consolas"/>
+                <a:latin typeface="Courier New" pitchFamily="49" charset="0"/>
               </a:rPr>
               <a:t>)</a:t>
             </a:r>
@@ -20464,11 +20466,11 @@
           <a:p>
             <a:pPr algn="l"/>
             <a:r>
-              <a:rPr sz="1550" b="0" i="0">
+              <a:rPr sz="1500" b="0" i="0">
                 <a:solidFill>
                   <a:srgbClr val="E6EDF3"/>
                 </a:solidFill>
-                <a:latin typeface="Consolas"/>
+                <a:latin typeface="Courier New" pitchFamily="49" charset="0"/>
               </a:rPr>
               <a:t>conexao.commit()</a:t>
             </a:r>
@@ -20476,11 +20478,11 @@
           <a:p>
             <a:pPr algn="l"/>
             <a:r>
-              <a:rPr sz="1550" b="0" i="0">
+              <a:rPr sz="1500" b="0" i="0">
                 <a:solidFill>
                   <a:srgbClr val="E6EDF3"/>
                 </a:solidFill>
-                <a:latin typeface="Consolas"/>
+                <a:latin typeface="Courier New" pitchFamily="49" charset="0"/>
               </a:rPr>
               <a:t>conexao.close()</a:t>
             </a:r>
@@ -21660,11 +21662,11 @@
               <a:buChar char="•"/>
             </a:pPr>
             <a:r>
-              <a:rPr sz="1500" b="0" i="0">
+              <a:rPr sz="1350" b="0" i="0">
                 <a:solidFill>
                   <a:srgbClr val="00397B"/>
                 </a:solidFill>
-                <a:latin typeface="Consolas"/>
+                <a:latin typeface="Courier New" pitchFamily="49" charset="0"/>
               </a:rPr>
               <a:t>commit()</a:t>
             </a:r>
@@ -21689,11 +21691,11 @@
               <a:buChar char="•"/>
             </a:pPr>
             <a:r>
-              <a:rPr sz="1500" b="0" i="0">
+              <a:rPr sz="1350" b="0" i="0">
                 <a:solidFill>
                   <a:srgbClr val="00397B"/>
                 </a:solidFill>
-                <a:latin typeface="Consolas"/>
+                <a:latin typeface="Courier New" pitchFamily="49" charset="0"/>
               </a:rPr>
               <a:t>PRAGMA foreign_keys</a:t>
             </a:r>
@@ -22365,11 +22367,11 @@
                     <a:p>
                       <a:pPr algn="l"/>
                       <a:r>
-                        <a:rPr sz="1200" b="0" i="0">
+                        <a:rPr sz="1100" b="0" i="0">
                           <a:solidFill>
                             <a:srgbClr val="00397B"/>
                           </a:solidFill>
-                          <a:latin typeface="Consolas"/>
+                          <a:latin typeface="Courier New" pitchFamily="49" charset="0"/>
                         </a:rPr>
                         <a:t>models.py</a:t>
                       </a:r>
@@ -22439,11 +22441,11 @@
                     <a:p>
                       <a:pPr algn="l"/>
                       <a:r>
-                        <a:rPr sz="1200" b="0" i="0">
+                        <a:rPr sz="1100" b="0" i="0">
                           <a:solidFill>
                             <a:srgbClr val="00397B"/>
                           </a:solidFill>
-                          <a:latin typeface="Consolas"/>
+                          <a:latin typeface="Courier New" pitchFamily="49" charset="0"/>
                         </a:rPr>
                         <a:t>forms.py</a:t>
                       </a:r>
@@ -22513,11 +22515,11 @@
                     <a:p>
                       <a:pPr algn="l"/>
                       <a:r>
-                        <a:rPr sz="1200" b="0" i="0">
+                        <a:rPr sz="1100" b="0" i="0">
                           <a:solidFill>
                             <a:srgbClr val="00397B"/>
                           </a:solidFill>
-                          <a:latin typeface="Consolas"/>
+                          <a:latin typeface="Courier New" pitchFamily="49" charset="0"/>
                         </a:rPr>
                         <a:t>views.py</a:t>
                       </a:r>
@@ -22587,11 +22589,11 @@
                     <a:p>
                       <a:pPr algn="l"/>
                       <a:r>
-                        <a:rPr sz="1200" b="0" i="0">
+                        <a:rPr sz="1100" b="0" i="0">
                           <a:solidFill>
                             <a:srgbClr val="00397B"/>
                           </a:solidFill>
-                          <a:latin typeface="Consolas"/>
+                          <a:latin typeface="Courier New" pitchFamily="49" charset="0"/>
                         </a:rPr>
                         <a:t>views.py</a:t>
                       </a:r>
@@ -22661,11 +22663,11 @@
                     <a:p>
                       <a:pPr algn="l"/>
                       <a:r>
-                        <a:rPr sz="1200" b="0" i="0">
+                        <a:rPr sz="1100" b="0" i="0">
                           <a:solidFill>
                             <a:srgbClr val="00397B"/>
                           </a:solidFill>
-                          <a:latin typeface="Consolas"/>
+                          <a:latin typeface="Courier New" pitchFamily="49" charset="0"/>
                         </a:rPr>
                         <a:t>views.py</a:t>
                       </a:r>
@@ -22735,11 +22737,11 @@
                     <a:p>
                       <a:pPr algn="l"/>
                       <a:r>
-                        <a:rPr sz="1200" b="0" i="0">
+                        <a:rPr sz="1100" b="0" i="0">
                           <a:solidFill>
                             <a:srgbClr val="00397B"/>
                           </a:solidFill>
-                          <a:latin typeface="Consolas"/>
+                          <a:latin typeface="Courier New" pitchFamily="49" charset="0"/>
                         </a:rPr>
                         <a:t>admin.py</a:t>
                       </a:r>
@@ -22785,11 +22787,11 @@
           <a:p>
             <a:pPr algn="l"/>
             <a:r>
-              <a:rPr sz="1400" b="1" i="0">
+              <a:rPr sz="1250" b="1" i="0">
                 <a:solidFill>
                   <a:srgbClr val="00397B"/>
                 </a:solidFill>
-                <a:latin typeface="Consolas"/>
+                <a:latin typeface="Courier New" pitchFamily="49" charset="0"/>
               </a:rPr>
               <a:t>python verificar.py</a:t>
             </a:r>
@@ -23814,7 +23816,7 @@
           <a:noFill/>
         </p:spPr>
         <p:txBody>
-          <a:bodyPr wrap="square" lIns="0" tIns="18288" rIns="0" bIns="18288" anchor="t">
+          <a:bodyPr wrap="none" lIns="0" tIns="18288" rIns="0" bIns="18288" anchor="t">
             <a:noAutofit/>
           </a:bodyPr>
           <a:lstStyle/>
@@ -23825,7 +23827,7 @@
                 <a:solidFill>
                   <a:srgbClr val="9AA5B1"/>
                 </a:solidFill>
-                <a:latin typeface="Consolas"/>
+                <a:latin typeface="Courier New" pitchFamily="49" charset="0"/>
               </a:rPr>
               <a:t>PowerShell, na pasta do projeto</a:t>
             </a:r>
@@ -23849,7 +23851,7 @@
           <a:noFill/>
         </p:spPr>
         <p:txBody>
-          <a:bodyPr wrap="square" lIns="0" tIns="18288" rIns="0" bIns="18288" anchor="t">
+          <a:bodyPr wrap="none" lIns="0" tIns="18288" rIns="0" bIns="18288" anchor="t">
             <a:noAutofit/>
           </a:bodyPr>
           <a:lstStyle/>
@@ -23860,7 +23862,7 @@
                 <a:solidFill>
                   <a:srgbClr val="8B98A5"/>
                 </a:solidFill>
-                <a:latin typeface="Consolas"/>
+                <a:latin typeface="Courier New" pitchFamily="49" charset="0"/>
               </a:rPr>
               <a:t># 1. ambiente virtual (uma vez por projeto)</a:t>
             </a:r>
@@ -23872,7 +23874,7 @@
                 <a:solidFill>
                   <a:srgbClr val="7FD3F0"/>
                 </a:solidFill>
-                <a:latin typeface="Consolas"/>
+                <a:latin typeface="Courier New" pitchFamily="49" charset="0"/>
               </a:rPr>
               <a:t>python</a:t>
             </a:r>
@@ -23881,7 +23883,7 @@
                 <a:solidFill>
                   <a:srgbClr val="E6EDF3"/>
                 </a:solidFill>
-                <a:latin typeface="Consolas"/>
+                <a:latin typeface="Courier New" pitchFamily="49" charset="0"/>
               </a:rPr>
               <a:t> -m venv .venv</a:t>
             </a:r>
@@ -23893,7 +23895,7 @@
                 <a:solidFill>
                   <a:srgbClr val="7FD3F0"/>
                 </a:solidFill>
-                <a:latin typeface="Consolas"/>
+                <a:latin typeface="Courier New" pitchFamily="49" charset="0"/>
               </a:rPr>
               <a:t>.venv\Scripts\Activate.ps1</a:t>
             </a:r>
@@ -23905,7 +23907,7 @@
                 <a:solidFill>
                   <a:srgbClr val="E6EDF3"/>
                 </a:solidFill>
-                <a:latin typeface="Consolas"/>
+                <a:latin typeface="Courier New" pitchFamily="49" charset="0"/>
               </a:rPr>
               <a:t> </a:t>
             </a:r>
@@ -23917,7 +23919,7 @@
                 <a:solidFill>
                   <a:srgbClr val="8B98A5"/>
                 </a:solidFill>
-                <a:latin typeface="Consolas"/>
+                <a:latin typeface="Courier New" pitchFamily="49" charset="0"/>
               </a:rPr>
               <a:t># 2. dependências</a:t>
             </a:r>
@@ -23929,7 +23931,7 @@
                 <a:solidFill>
                   <a:srgbClr val="7FD3F0"/>
                 </a:solidFill>
-                <a:latin typeface="Consolas"/>
+                <a:latin typeface="Courier New" pitchFamily="49" charset="0"/>
               </a:rPr>
               <a:t>pip</a:t>
             </a:r>
@@ -23938,7 +23940,7 @@
                 <a:solidFill>
                   <a:srgbClr val="E6EDF3"/>
                 </a:solidFill>
-                <a:latin typeface="Consolas"/>
+                <a:latin typeface="Courier New" pitchFamily="49" charset="0"/>
               </a:rPr>
               <a:t> install -r requirements.txt</a:t>
             </a:r>
@@ -23950,7 +23952,7 @@
                 <a:solidFill>
                   <a:srgbClr val="E6EDF3"/>
                 </a:solidFill>
-                <a:latin typeface="Consolas"/>
+                <a:latin typeface="Courier New" pitchFamily="49" charset="0"/>
               </a:rPr>
               <a:t> </a:t>
             </a:r>
@@ -23962,7 +23964,7 @@
                 <a:solidFill>
                   <a:srgbClr val="8B98A5"/>
                 </a:solidFill>
-                <a:latin typeface="Consolas"/>
+                <a:latin typeface="Courier New" pitchFamily="49" charset="0"/>
               </a:rPr>
               <a:t># 3. banco e dados de exemplo</a:t>
             </a:r>
@@ -23974,7 +23976,7 @@
                 <a:solidFill>
                   <a:srgbClr val="7FD3F0"/>
                 </a:solidFill>
-                <a:latin typeface="Consolas"/>
+                <a:latin typeface="Courier New" pitchFamily="49" charset="0"/>
               </a:rPr>
               <a:t>python</a:t>
             </a:r>
@@ -23983,7 +23985,7 @@
                 <a:solidFill>
                   <a:srgbClr val="E6EDF3"/>
                 </a:solidFill>
-                <a:latin typeface="Consolas"/>
+                <a:latin typeface="Courier New" pitchFamily="49" charset="0"/>
               </a:rPr>
               <a:t> manage.py migrate</a:t>
             </a:r>
@@ -23995,7 +23997,7 @@
                 <a:solidFill>
                   <a:srgbClr val="7FD3F0"/>
                 </a:solidFill>
-                <a:latin typeface="Consolas"/>
+                <a:latin typeface="Courier New" pitchFamily="49" charset="0"/>
               </a:rPr>
               <a:t>python</a:t>
             </a:r>
@@ -24004,7 +24006,7 @@
                 <a:solidFill>
                   <a:srgbClr val="E6EDF3"/>
                 </a:solidFill>
-                <a:latin typeface="Consolas"/>
+                <a:latin typeface="Courier New" pitchFamily="49" charset="0"/>
               </a:rPr>
               <a:t> manage.py seed_demo</a:t>
             </a:r>
@@ -24016,7 +24018,7 @@
                 <a:solidFill>
                   <a:srgbClr val="E6EDF3"/>
                 </a:solidFill>
-                <a:latin typeface="Consolas"/>
+                <a:latin typeface="Courier New" pitchFamily="49" charset="0"/>
               </a:rPr>
               <a:t> </a:t>
             </a:r>
@@ -24028,7 +24030,7 @@
                 <a:solidFill>
                   <a:srgbClr val="8B98A5"/>
                 </a:solidFill>
-                <a:latin typeface="Consolas"/>
+                <a:latin typeface="Courier New" pitchFamily="49" charset="0"/>
               </a:rPr>
               <a:t># 4. servidor</a:t>
             </a:r>
@@ -24040,7 +24042,7 @@
                 <a:solidFill>
                   <a:srgbClr val="7FD3F0"/>
                 </a:solidFill>
-                <a:latin typeface="Consolas"/>
+                <a:latin typeface="Courier New" pitchFamily="49" charset="0"/>
               </a:rPr>
               <a:t>python</a:t>
             </a:r>
@@ -24049,7 +24051,7 @@
                 <a:solidFill>
                   <a:srgbClr val="E6EDF3"/>
                 </a:solidFill>
-                <a:latin typeface="Consolas"/>
+                <a:latin typeface="Courier New" pitchFamily="49" charset="0"/>
               </a:rPr>
               <a:t> manage.py runserver</a:t>
             </a:r>
@@ -24207,11 +24209,11 @@
               <a:t>o prompt começa com </a:t>
             </a:r>
             <a:r>
-              <a:rPr sz="1400" b="0" i="0">
+              <a:rPr sz="1250" b="0" i="0">
                 <a:solidFill>
                   <a:srgbClr val="00397B"/>
                 </a:solidFill>
-                <a:latin typeface="Consolas"/>
+                <a:latin typeface="Courier New" pitchFamily="49" charset="0"/>
               </a:rPr>
               <a:t>(.venv)</a:t>
             </a:r>
@@ -24228,11 +24230,11 @@
               <a:buChar char="•"/>
             </a:pPr>
             <a:r>
-              <a:rPr sz="1400" b="0" i="0">
+              <a:rPr sz="1250" b="0" i="0">
                 <a:solidFill>
                   <a:srgbClr val="00397B"/>
                 </a:solidFill>
-                <a:latin typeface="Consolas"/>
+                <a:latin typeface="Courier New" pitchFamily="49" charset="0"/>
               </a:rPr>
               <a:t>127.0.0.1:8000</a:t>
             </a:r>
@@ -24257,28 +24259,28 @@
               <a:buChar char="•"/>
             </a:pPr>
             <a:r>
+              <a:rPr sz="1250" b="0" i="0">
+                <a:solidFill>
+                  <a:srgbClr val="00397B"/>
+                </a:solidFill>
+                <a:latin typeface="Courier New" pitchFamily="49" charset="0"/>
+              </a:rPr>
+              <a:t>admin</a:t>
+            </a:r>
+            <a:r>
               <a:rPr sz="1400" b="0" i="0">
                 <a:solidFill>
+                  <a:srgbClr val="3A3A3A"/>
+                </a:solidFill>
+              </a:rPr>
+              <a:t> / </a:t>
+            </a:r>
+            <a:r>
+              <a:rPr sz="1250" b="0" i="0">
+                <a:solidFill>
                   <a:srgbClr val="00397B"/>
                 </a:solidFill>
-                <a:latin typeface="Consolas"/>
-              </a:rPr>
-              <a:t>admin</a:t>
-            </a:r>
-            <a:r>
-              <a:rPr sz="1400" b="0" i="0">
-                <a:solidFill>
-                  <a:srgbClr val="3A3A3A"/>
-                </a:solidFill>
-              </a:rPr>
-              <a:t> / </a:t>
-            </a:r>
-            <a:r>
-              <a:rPr sz="1400" b="0" i="0">
-                <a:solidFill>
-                  <a:srgbClr val="00397B"/>
-                </a:solidFill>
-                <a:latin typeface="Consolas"/>
+                <a:latin typeface="Courier New" pitchFamily="49" charset="0"/>
               </a:rPr>
               <a:t>escola2024</a:t>
             </a:r>
@@ -24524,13 +24526,30 @@
               <a:t>Entrem como </a:t>
             </a:r>
             <a:r>
+              <a:rPr sz="1250" b="0" i="0">
+                <a:solidFill>
+                  <a:srgbClr val="00397B"/>
+                </a:solidFill>
+                <a:latin typeface="Courier New" pitchFamily="49" charset="0"/>
+              </a:rPr>
+              <a:t>admin</a:t>
+            </a:r>
+            <a:r>
               <a:rPr sz="1400" b="0" i="0">
                 <a:solidFill>
+                  <a:srgbClr val="3A3A3A"/>
+                </a:solidFill>
+              </a:rPr>
+              <a:t> e depois como </a:t>
+            </a:r>
+            <a:r>
+              <a:rPr sz="1250" b="0" i="0">
+                <a:solidFill>
                   <a:srgbClr val="00397B"/>
                 </a:solidFill>
-                <a:latin typeface="Consolas"/>
-              </a:rPr>
-              <a:t>admin</a:t>
+                <a:latin typeface="Courier New" pitchFamily="49" charset="0"/>
+              </a:rPr>
+              <a:t>professor</a:t>
             </a:r>
             <a:r>
               <a:rPr sz="1400" b="0" i="0">
@@ -24538,31 +24557,14 @@
                   <a:srgbClr val="3A3A3A"/>
                 </a:solidFill>
               </a:rPr>
-              <a:t> e depois como </a:t>
-            </a:r>
-            <a:r>
-              <a:rPr sz="1400" b="0" i="0">
+              <a:t>. Com o professor, digitem </a:t>
+            </a:r>
+            <a:r>
+              <a:rPr sz="1250" b="0" i="0">
                 <a:solidFill>
                   <a:srgbClr val="00397B"/>
                 </a:solidFill>
-                <a:latin typeface="Consolas"/>
-              </a:rPr>
-              <a:t>professor</a:t>
-            </a:r>
-            <a:r>
-              <a:rPr sz="1400" b="0" i="0">
-                <a:solidFill>
-                  <a:srgbClr val="3A3A3A"/>
-                </a:solidFill>
-              </a:rPr>
-              <a:t>. Com o professor, digitem </a:t>
-            </a:r>
-            <a:r>
-              <a:rPr sz="1400" b="0" i="0">
-                <a:solidFill>
-                  <a:srgbClr val="00397B"/>
-                </a:solidFill>
-                <a:latin typeface="Consolas"/>
+                <a:latin typeface="Courier New" pitchFamily="49" charset="0"/>
               </a:rPr>
               <a:t>/contas/usuarios/</a:t>
             </a:r>
@@ -24708,13 +24710,30 @@
               <a:t>Sigam o fio: </a:t>
             </a:r>
             <a:r>
+              <a:rPr sz="1250" b="0" i="0">
+                <a:solidFill>
+                  <a:srgbClr val="00397B"/>
+                </a:solidFill>
+                <a:latin typeface="Courier New" pitchFamily="49" charset="0"/>
+              </a:rPr>
+              <a:t>contas/urls.py</a:t>
+            </a:r>
+            <a:r>
               <a:rPr sz="1400" b="0" i="0">
                 <a:solidFill>
+                  <a:srgbClr val="3A3A3A"/>
+                </a:solidFill>
+              </a:rPr>
+              <a:t>, depois </a:t>
+            </a:r>
+            <a:r>
+              <a:rPr sz="1250" b="0" i="0">
+                <a:solidFill>
                   <a:srgbClr val="00397B"/>
                 </a:solidFill>
-                <a:latin typeface="Consolas"/>
-              </a:rPr>
-              <a:t>contas/urls.py</a:t>
+                <a:latin typeface="Courier New" pitchFamily="49" charset="0"/>
+              </a:rPr>
+              <a:t>usuario_lista</a:t>
             </a:r>
             <a:r>
               <a:rPr sz="1400" b="0" i="0">
@@ -24722,48 +24741,31 @@
                   <a:srgbClr val="3A3A3A"/>
                 </a:solidFill>
               </a:rPr>
-              <a:t>, depois </a:t>
+              <a:t> em </a:t>
+            </a:r>
+            <a:r>
+              <a:rPr sz="1250" b="0" i="0">
+                <a:solidFill>
+                  <a:srgbClr val="00397B"/>
+                </a:solidFill>
+                <a:latin typeface="Courier New" pitchFamily="49" charset="0"/>
+              </a:rPr>
+              <a:t>contas/views.py</a:t>
             </a:r>
             <a:r>
               <a:rPr sz="1400" b="0" i="0">
                 <a:solidFill>
+                  <a:srgbClr val="3A3A3A"/>
+                </a:solidFill>
+              </a:rPr>
+              <a:t>, depois o template </a:t>
+            </a:r>
+            <a:r>
+              <a:rPr sz="1250" b="0" i="0">
+                <a:solidFill>
                   <a:srgbClr val="00397B"/>
                 </a:solidFill>
-                <a:latin typeface="Consolas"/>
-              </a:rPr>
-              <a:t>usuario_lista</a:t>
-            </a:r>
-            <a:r>
-              <a:rPr sz="1400" b="0" i="0">
-                <a:solidFill>
-                  <a:srgbClr val="3A3A3A"/>
-                </a:solidFill>
-              </a:rPr>
-              <a:t> em </a:t>
-            </a:r>
-            <a:r>
-              <a:rPr sz="1400" b="0" i="0">
-                <a:solidFill>
-                  <a:srgbClr val="00397B"/>
-                </a:solidFill>
-                <a:latin typeface="Consolas"/>
-              </a:rPr>
-              <a:t>contas/views.py</a:t>
-            </a:r>
-            <a:r>
-              <a:rPr sz="1400" b="0" i="0">
-                <a:solidFill>
-                  <a:srgbClr val="3A3A3A"/>
-                </a:solidFill>
-              </a:rPr>
-              <a:t>, depois o template </a:t>
-            </a:r>
-            <a:r>
-              <a:rPr sz="1400" b="0" i="0">
-                <a:solidFill>
-                  <a:srgbClr val="00397B"/>
-                </a:solidFill>
-                <a:latin typeface="Consolas"/>
+                <a:latin typeface="Courier New" pitchFamily="49" charset="0"/>
               </a:rPr>
               <a:t>usuario_lista.html</a:t>
             </a:r>
@@ -24909,28 +24911,28 @@
               <a:t>Abram o </a:t>
             </a:r>
             <a:r>
+              <a:rPr sz="1250" b="0" i="0">
+                <a:solidFill>
+                  <a:srgbClr val="00397B"/>
+                </a:solidFill>
+                <a:latin typeface="Courier New" pitchFamily="49" charset="0"/>
+              </a:rPr>
+              <a:t>escola.sqlite3</a:t>
+            </a:r>
+            <a:r>
               <a:rPr sz="1400" b="0" i="0">
                 <a:solidFill>
+                  <a:srgbClr val="3A3A3A"/>
+                </a:solidFill>
+              </a:rPr>
+              <a:t> no DB Browser e encontrem a tabela </a:t>
+            </a:r>
+            <a:r>
+              <a:rPr sz="1250" b="0" i="0">
+                <a:solidFill>
                   <a:srgbClr val="00397B"/>
                 </a:solidFill>
-                <a:latin typeface="Consolas"/>
-              </a:rPr>
-              <a:t>escola.sqlite3</a:t>
-            </a:r>
-            <a:r>
-              <a:rPr sz="1400" b="0" i="0">
-                <a:solidFill>
-                  <a:srgbClr val="3A3A3A"/>
-                </a:solidFill>
-              </a:rPr>
-              <a:t> no DB Browser e encontrem a tabela </a:t>
-            </a:r>
-            <a:r>
-              <a:rPr sz="1400" b="0" i="0">
-                <a:solidFill>
-                  <a:srgbClr val="00397B"/>
-                </a:solidFill>
-                <a:latin typeface="Consolas"/>
+                <a:latin typeface="Courier New" pitchFamily="49" charset="0"/>
               </a:rPr>
               <a:t>usuario</a:t>
             </a:r>
@@ -25076,11 +25078,11 @@
               <a:t>Rodem </a:t>
             </a:r>
             <a:r>
-              <a:rPr sz="1400" b="0" i="0">
+              <a:rPr sz="1250" b="0" i="0">
                 <a:solidFill>
                   <a:srgbClr val="00397B"/>
                 </a:solidFill>
-                <a:latin typeface="Consolas"/>
+                <a:latin typeface="Courier New" pitchFamily="49" charset="0"/>
               </a:rPr>
               <a:t>python verificar.py</a:t>
             </a:r>
@@ -25290,11 +25292,11 @@
               <a:t>Dica: leia o comentário do decorator em </a:t>
             </a:r>
             <a:r>
-              <a:rPr sz="1500" b="0" i="1">
+              <a:rPr sz="1350" b="0" i="1">
                 <a:solidFill>
                   <a:srgbClr val="FFFFFF"/>
                 </a:solidFill>
-                <a:latin typeface="Consolas"/>
+                <a:latin typeface="Courier New" pitchFamily="49" charset="0"/>
               </a:rPr>
               <a:t>contas/decorators.py</a:t>
             </a:r>
@@ -25566,13 +25568,30 @@
           <a:p>
             <a:pPr algn="l"/>
             <a:r>
+              <a:rPr sz="1150" b="0" i="0">
+                <a:solidFill>
+                  <a:srgbClr val="00397B"/>
+                </a:solidFill>
+                <a:latin typeface="Courier New" pitchFamily="49" charset="0"/>
+              </a:rPr>
+              <a:t>Aluno</a:t>
+            </a:r>
+            <a:r>
               <a:rPr sz="1300" b="0" i="0">
                 <a:solidFill>
+                  <a:srgbClr val="3A3A3A"/>
+                </a:solidFill>
+              </a:rPr>
+              <a:t>, </a:t>
+            </a:r>
+            <a:r>
+              <a:rPr sz="1150" b="0" i="0">
+                <a:solidFill>
                   <a:srgbClr val="00397B"/>
                 </a:solidFill>
-                <a:latin typeface="Consolas"/>
-              </a:rPr>
-              <a:t>Aluno</a:t>
+                <a:latin typeface="Courier New" pitchFamily="49" charset="0"/>
+              </a:rPr>
+              <a:t>Disciplina</a:t>
             </a:r>
             <a:r>
               <a:rPr sz="1300" b="0" i="0">
@@ -25580,48 +25599,31 @@
                   <a:srgbClr val="3A3A3A"/>
                 </a:solidFill>
               </a:rPr>
-              <a:t>, </a:t>
+              <a:t> e </a:t>
+            </a:r>
+            <a:r>
+              <a:rPr sz="1150" b="0" i="0">
+                <a:solidFill>
+                  <a:srgbClr val="00397B"/>
+                </a:solidFill>
+                <a:latin typeface="Courier New" pitchFamily="49" charset="0"/>
+              </a:rPr>
+              <a:t>Inscricao</a:t>
             </a:r>
             <a:r>
               <a:rPr sz="1300" b="0" i="0">
                 <a:solidFill>
+                  <a:srgbClr val="3A3A3A"/>
+                </a:solidFill>
+              </a:rPr>
+              <a:t>, seguindo as docstrings de </a:t>
+            </a:r>
+            <a:r>
+              <a:rPr sz="1150" b="0" i="0">
+                <a:solidFill>
                   <a:srgbClr val="00397B"/>
                 </a:solidFill>
-                <a:latin typeface="Consolas"/>
-              </a:rPr>
-              <a:t>Disciplina</a:t>
-            </a:r>
-            <a:r>
-              <a:rPr sz="1300" b="0" i="0">
-                <a:solidFill>
-                  <a:srgbClr val="3A3A3A"/>
-                </a:solidFill>
-              </a:rPr>
-              <a:t> e </a:t>
-            </a:r>
-            <a:r>
-              <a:rPr sz="1300" b="0" i="0">
-                <a:solidFill>
-                  <a:srgbClr val="00397B"/>
-                </a:solidFill>
-                <a:latin typeface="Consolas"/>
-              </a:rPr>
-              <a:t>Inscricao</a:t>
-            </a:r>
-            <a:r>
-              <a:rPr sz="1300" b="0" i="0">
-                <a:solidFill>
-                  <a:srgbClr val="3A3A3A"/>
-                </a:solidFill>
-              </a:rPr>
-              <a:t>, seguindo as docstrings de </a:t>
-            </a:r>
-            <a:r>
-              <a:rPr sz="1300" b="0" i="0">
-                <a:solidFill>
-                  <a:srgbClr val="00397B"/>
-                </a:solidFill>
-                <a:latin typeface="Consolas"/>
+                <a:latin typeface="Courier New" pitchFamily="49" charset="0"/>
               </a:rPr>
               <a:t>academico/models.py</a:t>
             </a:r>
@@ -25801,28 +25803,28 @@
               <a:t>E declarem a </a:t>
             </a:r>
             <a:r>
+              <a:rPr sz="1150" b="0" i="0">
+                <a:solidFill>
+                  <a:srgbClr val="00397B"/>
+                </a:solidFill>
+                <a:latin typeface="Courier New" pitchFamily="49" charset="0"/>
+              </a:rPr>
+              <a:t>UniqueConstraint</a:t>
+            </a:r>
+            <a:r>
               <a:rPr sz="1300" b="0" i="0">
                 <a:solidFill>
+                  <a:srgbClr val="3A3A3A"/>
+                </a:solidFill>
+              </a:rPr>
+              <a:t> no </a:t>
+            </a:r>
+            <a:r>
+              <a:rPr sz="1150" b="0" i="0">
+                <a:solidFill>
                   <a:srgbClr val="00397B"/>
                 </a:solidFill>
-                <a:latin typeface="Consolas"/>
-              </a:rPr>
-              <a:t>UniqueConstraint</a:t>
-            </a:r>
-            <a:r>
-              <a:rPr sz="1300" b="0" i="0">
-                <a:solidFill>
-                  <a:srgbClr val="3A3A3A"/>
-                </a:solidFill>
-              </a:rPr>
-              <a:t> no </a:t>
-            </a:r>
-            <a:r>
-              <a:rPr sz="1300" b="0" i="0">
-                <a:solidFill>
-                  <a:srgbClr val="00397B"/>
-                </a:solidFill>
-                <a:latin typeface="Consolas"/>
+                <a:latin typeface="Courier New" pitchFamily="49" charset="0"/>
               </a:rPr>
               <a:t>Meta</a:t>
             </a:r>
@@ -26203,7 +26205,7 @@
           <a:noFill/>
         </p:spPr>
         <p:txBody>
-          <a:bodyPr wrap="square" lIns="0" tIns="18288" rIns="0" bIns="18288" anchor="t">
+          <a:bodyPr wrap="none" lIns="0" tIns="18288" rIns="0" bIns="18288" anchor="t">
             <a:noAutofit/>
           </a:bodyPr>
           <a:lstStyle/>
@@ -26214,7 +26216,7 @@
                 <a:solidFill>
                   <a:srgbClr val="9AA5B1"/>
                 </a:solidFill>
-                <a:latin typeface="Consolas"/>
+                <a:latin typeface="Courier New" pitchFamily="49" charset="0"/>
               </a:rPr>
               <a:t>terminal</a:t>
             </a:r>
@@ -26238,27 +26240,27 @@
           <a:noFill/>
         </p:spPr>
         <p:txBody>
-          <a:bodyPr wrap="square" lIns="0" tIns="18288" rIns="0" bIns="18288" anchor="t">
+          <a:bodyPr wrap="none" lIns="0" tIns="18288" rIns="0" bIns="18288" anchor="t">
             <a:noAutofit/>
           </a:bodyPr>
           <a:lstStyle/>
           <a:p>
             <a:pPr algn="l"/>
             <a:r>
-              <a:rPr sz="1450" b="0" i="0">
+              <a:rPr sz="1350" b="0" i="0">
                 <a:solidFill>
                   <a:srgbClr val="7FD3F0"/>
                 </a:solidFill>
-                <a:latin typeface="Consolas"/>
+                <a:latin typeface="Courier New" pitchFamily="49" charset="0"/>
               </a:rPr>
               <a:t>python</a:t>
             </a:r>
             <a:r>
-              <a:rPr sz="1450" b="0" i="0">
+              <a:rPr sz="1350" b="0" i="0">
                 <a:solidFill>
                   <a:srgbClr val="E6EDF3"/>
                 </a:solidFill>
-                <a:latin typeface="Consolas"/>
+                <a:latin typeface="Courier New" pitchFamily="49" charset="0"/>
               </a:rPr>
               <a:t> manage.py makemigrations academico</a:t>
             </a:r>
@@ -26266,20 +26268,20 @@
           <a:p>
             <a:pPr algn="l"/>
             <a:r>
-              <a:rPr sz="1450" b="0" i="0">
+              <a:rPr sz="1350" b="0" i="0">
                 <a:solidFill>
                   <a:srgbClr val="7FD3F0"/>
                 </a:solidFill>
-                <a:latin typeface="Consolas"/>
+                <a:latin typeface="Courier New" pitchFamily="49" charset="0"/>
               </a:rPr>
               <a:t>python</a:t>
             </a:r>
             <a:r>
-              <a:rPr sz="1450" b="0" i="0">
+              <a:rPr sz="1350" b="0" i="0">
                 <a:solidFill>
                   <a:srgbClr val="E6EDF3"/>
                 </a:solidFill>
-                <a:latin typeface="Consolas"/>
+                <a:latin typeface="Courier New" pitchFamily="49" charset="0"/>
               </a:rPr>
               <a:t> manage.py migrate</a:t>
             </a:r>
@@ -26287,20 +26289,20 @@
           <a:p>
             <a:pPr algn="l"/>
             <a:r>
-              <a:rPr sz="1450" b="0" i="0">
+              <a:rPr sz="1350" b="0" i="0">
                 <a:solidFill>
                   <a:srgbClr val="7FD3F0"/>
                 </a:solidFill>
-                <a:latin typeface="Consolas"/>
+                <a:latin typeface="Courier New" pitchFamily="49" charset="0"/>
               </a:rPr>
               <a:t>python</a:t>
             </a:r>
             <a:r>
-              <a:rPr sz="1450" b="0" i="0">
+              <a:rPr sz="1350" b="0" i="0">
                 <a:solidFill>
                   <a:srgbClr val="E6EDF3"/>
                 </a:solidFill>
-                <a:latin typeface="Consolas"/>
+                <a:latin typeface="Courier New" pitchFamily="49" charset="0"/>
               </a:rPr>
               <a:t> manage.py sqlmigrate academico 0001</a:t>
             </a:r>
@@ -26308,20 +26310,20 @@
           <a:p>
             <a:pPr algn="l"/>
             <a:r>
-              <a:rPr sz="1450" b="0" i="0">
+              <a:rPr sz="1350" b="0" i="0">
                 <a:solidFill>
                   <a:srgbClr val="7FD3F0"/>
                 </a:solidFill>
-                <a:latin typeface="Consolas"/>
+                <a:latin typeface="Courier New" pitchFamily="49" charset="0"/>
               </a:rPr>
               <a:t>python</a:t>
             </a:r>
             <a:r>
-              <a:rPr sz="1450" b="0" i="0">
+              <a:rPr sz="1350" b="0" i="0">
                 <a:solidFill>
                   <a:srgbClr val="E6EDF3"/>
                 </a:solidFill>
-                <a:latin typeface="Consolas"/>
+                <a:latin typeface="Courier New" pitchFamily="49" charset="0"/>
               </a:rPr>
               <a:t> verificar.py</a:t>
             </a:r>
@@ -26510,28 +26512,28 @@
               <a:t>o </a:t>
             </a:r>
             <a:r>
+              <a:rPr sz="1250" b="0" i="0">
+                <a:solidFill>
+                  <a:srgbClr val="00397B"/>
+                </a:solidFill>
+                <a:latin typeface="Courier New" pitchFamily="49" charset="0"/>
+              </a:rPr>
+              <a:t>sqlmigrate</a:t>
+            </a:r>
+            <a:r>
               <a:rPr sz="1400" b="0" i="0">
                 <a:solidFill>
+                  <a:srgbClr val="3A3A3A"/>
+                </a:solidFill>
+              </a:rPr>
+              <a:t> mostra as três tabelas e o </a:t>
+            </a:r>
+            <a:r>
+              <a:rPr sz="1250" b="0" i="0">
+                <a:solidFill>
                   <a:srgbClr val="00397B"/>
                 </a:solidFill>
-                <a:latin typeface="Consolas"/>
-              </a:rPr>
-              <a:t>sqlmigrate</a:t>
-            </a:r>
-            <a:r>
-              <a:rPr sz="1400" b="0" i="0">
-                <a:solidFill>
-                  <a:srgbClr val="3A3A3A"/>
-                </a:solidFill>
-              </a:rPr>
-              <a:t> mostra as três tabelas e o </a:t>
-            </a:r>
-            <a:r>
-              <a:rPr sz="1400" b="0" i="0">
-                <a:solidFill>
-                  <a:srgbClr val="00397B"/>
-                </a:solidFill>
-                <a:latin typeface="Consolas"/>
+                <a:latin typeface="Courier New" pitchFamily="49" charset="0"/>
               </a:rPr>
               <a:t>verificar.py</a:t>
             </a:r>
@@ -26685,11 +26687,11 @@
                     <a:p>
                       <a:pPr algn="l"/>
                       <a:r>
-                        <a:rPr sz="1300" b="0" i="0">
+                        <a:rPr sz="1150" b="0" i="0">
                           <a:solidFill>
                             <a:srgbClr val="00397B"/>
                           </a:solidFill>
-                          <a:latin typeface="Consolas"/>
+                          <a:latin typeface="Courier New" pitchFamily="49" charset="0"/>
                         </a:rPr>
                         <a:t>No module named 'django'</a:t>
                       </a:r>
@@ -26716,11 +26718,11 @@
                         <a:t>Ative o </a:t>
                       </a:r>
                       <a:r>
-                        <a:rPr sz="1400" b="0" i="0">
+                        <a:rPr sz="1250" b="0" i="0">
                           <a:solidFill>
                             <a:srgbClr val="00397B"/>
                           </a:solidFill>
-                          <a:latin typeface="Consolas"/>
+                          <a:latin typeface="Courier New" pitchFamily="49" charset="0"/>
                         </a:rPr>
                         <a:t>.venv</a:t>
                       </a:r>
@@ -26754,11 +26756,11 @@
                     <a:p>
                       <a:pPr algn="l"/>
                       <a:r>
-                        <a:rPr sz="1300" b="0" i="0">
+                        <a:rPr sz="1150" b="0" i="0">
                           <a:solidFill>
                             <a:srgbClr val="00397B"/>
                           </a:solidFill>
-                          <a:latin typeface="Consolas"/>
+                          <a:latin typeface="Courier New" pitchFamily="49" charset="0"/>
                         </a:rPr>
                         <a:t>python não é reconhecido</a:t>
                       </a:r>
@@ -26806,11 +26808,11 @@
                     <a:p>
                       <a:pPr algn="l"/>
                       <a:r>
-                        <a:rPr sz="1300" b="0" i="0">
+                        <a:rPr sz="1150" b="0" i="0">
                           <a:solidFill>
                             <a:srgbClr val="00397B"/>
                           </a:solidFill>
-                          <a:latin typeface="Consolas"/>
+                          <a:latin typeface="Courier New" pitchFamily="49" charset="0"/>
                         </a:rPr>
                         <a:t>execução de scripts foi desabilitada</a:t>
                       </a:r>
@@ -26829,11 +26831,11 @@
                     <a:p>
                       <a:pPr algn="l"/>
                       <a:r>
-                        <a:rPr sz="1400" b="0" i="0">
+                        <a:rPr sz="1250" b="0" i="0">
                           <a:solidFill>
                             <a:srgbClr val="00397B"/>
                           </a:solidFill>
-                          <a:latin typeface="Consolas"/>
+                          <a:latin typeface="Courier New" pitchFamily="49" charset="0"/>
                         </a:rPr>
                         <a:t>Set-ExecutionPolicy RemoteSigned -Scope CurrentUser</a:t>
                       </a:r>
@@ -26859,11 +26861,11 @@
                     <a:p>
                       <a:pPr algn="l"/>
                       <a:r>
-                        <a:rPr sz="1300" b="0" i="0">
+                        <a:rPr sz="1150" b="0" i="0">
                           <a:solidFill>
                             <a:srgbClr val="00397B"/>
                           </a:solidFill>
-                          <a:latin typeface="Consolas"/>
+                          <a:latin typeface="Courier New" pitchFamily="49" charset="0"/>
                         </a:rPr>
                         <a:t>That port is already in use</a:t>
                       </a:r>
@@ -26882,11 +26884,11 @@
                     <a:p>
                       <a:pPr algn="l"/>
                       <a:r>
-                        <a:rPr sz="1400" b="0" i="0">
+                        <a:rPr sz="1250" b="0" i="0">
                           <a:solidFill>
                             <a:srgbClr val="00397B"/>
                           </a:solidFill>
-                          <a:latin typeface="Consolas"/>
+                          <a:latin typeface="Courier New" pitchFamily="49" charset="0"/>
                         </a:rPr>
                         <a:t>python manage.py runserver 8001</a:t>
                       </a:r>
@@ -26912,11 +26914,11 @@
                     <a:p>
                       <a:pPr algn="l"/>
                       <a:r>
-                        <a:rPr sz="1300" b="0" i="0">
+                        <a:rPr sz="1150" b="0" i="0">
                           <a:solidFill>
                             <a:srgbClr val="00397B"/>
                           </a:solidFill>
-                          <a:latin typeface="Consolas"/>
+                          <a:latin typeface="Courier New" pitchFamily="49" charset="0"/>
                         </a:rPr>
                         <a:t>no such table: aluno</a:t>
                       </a:r>
@@ -26943,11 +26945,11 @@
                         <a:t>Faltou </a:t>
                       </a:r>
                       <a:r>
-                        <a:rPr sz="1400" b="0" i="0">
+                        <a:rPr sz="1250" b="0" i="0">
                           <a:solidFill>
                             <a:srgbClr val="00397B"/>
                           </a:solidFill>
-                          <a:latin typeface="Consolas"/>
+                          <a:latin typeface="Courier New" pitchFamily="49" charset="0"/>
                         </a:rPr>
                         <a:t>makemigrations</a:t>
                       </a:r>
@@ -26960,11 +26962,11 @@
                         <a:t> e </a:t>
                       </a:r>
                       <a:r>
-                        <a:rPr sz="1400" b="0" i="0">
+                        <a:rPr sz="1250" b="0" i="0">
                           <a:solidFill>
                             <a:srgbClr val="00397B"/>
                           </a:solidFill>
-                          <a:latin typeface="Consolas"/>
+                          <a:latin typeface="Courier New" pitchFamily="49" charset="0"/>
                         </a:rPr>
                         <a:t>migrate</a:t>
                       </a:r>
@@ -26998,11 +27000,11 @@
                     <a:p>
                       <a:pPr algn="l"/>
                       <a:r>
-                        <a:rPr sz="1300" b="0" i="0">
+                        <a:rPr sz="1150" b="0" i="0">
                           <a:solidFill>
                             <a:srgbClr val="00397B"/>
                           </a:solidFill>
-                          <a:latin typeface="Consolas"/>
+                          <a:latin typeface="Courier New" pitchFamily="49" charset="0"/>
                         </a:rPr>
                         <a:t>Quero recomeçar do zero</a:t>
                       </a:r>
@@ -27029,11 +27031,11 @@
                         <a:t>Apague o </a:t>
                       </a:r>
                       <a:r>
-                        <a:rPr sz="1400" b="0" i="0">
+                        <a:rPr sz="1250" b="0" i="0">
                           <a:solidFill>
                             <a:srgbClr val="00397B"/>
                           </a:solidFill>
-                          <a:latin typeface="Consolas"/>
+                          <a:latin typeface="Courier New" pitchFamily="49" charset="0"/>
                         </a:rPr>
                         <a:t>escola.sqlite3</a:t>
                       </a:r>
@@ -27046,11 +27048,11 @@
                         <a:t> e rode </a:t>
                       </a:r>
                       <a:r>
-                        <a:rPr sz="1400" b="0" i="0">
+                        <a:rPr sz="1250" b="0" i="0">
                           <a:solidFill>
                             <a:srgbClr val="00397B"/>
                           </a:solidFill>
-                          <a:latin typeface="Consolas"/>
+                          <a:latin typeface="Courier New" pitchFamily="49" charset="0"/>
                         </a:rPr>
                         <a:t>migrate</a:t>
                       </a:r>
@@ -27063,11 +27065,11 @@
                         <a:t> e </a:t>
                       </a:r>
                       <a:r>
-                        <a:rPr sz="1400" b="0" i="0">
+                        <a:rPr sz="1250" b="0" i="0">
                           <a:solidFill>
                             <a:srgbClr val="00397B"/>
                           </a:solidFill>
-                          <a:latin typeface="Consolas"/>
+                          <a:latin typeface="Courier New" pitchFamily="49" charset="0"/>
                         </a:rPr>
                         <a:t>seed_demo</a:t>
                       </a:r>
@@ -27129,11 +27131,11 @@
               <a:t>Lista completa: </a:t>
             </a:r>
             <a:r>
-              <a:rPr sz="1400" b="0" i="0">
+              <a:rPr sz="1250" b="0" i="0">
                 <a:solidFill>
                   <a:srgbClr val="00397B"/>
                 </a:solidFill>
-                <a:latin typeface="Consolas"/>
+                <a:latin typeface="Courier New" pitchFamily="49" charset="0"/>
               </a:rPr>
               <a:t>material/09-erros-comuns.md</a:t>
             </a:r>
@@ -27368,11 +27370,11 @@
               <a:t>Textos 02 (models), 03 (ORM) e 04 (forms) da pasta </a:t>
             </a:r>
             <a:r>
-              <a:rPr sz="1500" b="0" i="0">
+              <a:rPr sz="1350" b="0" i="0">
                 <a:solidFill>
                   <a:srgbClr val="00397B"/>
                 </a:solidFill>
-                <a:latin typeface="Consolas"/>
+                <a:latin typeface="Courier New" pitchFamily="49" charset="0"/>
               </a:rPr>
               <a:t>material/</a:t>
             </a:r>
@@ -28350,6 +28352,1396 @@
               </a:rPr>
               <a:t>Instalar, navegar pelo app de referência e começar o TODO 1 na prática.</a:t>
             </a:r>
+          </a:p>
+        </p:txBody>
+      </p:sp>
+    </p:spTree>
+  </p:cSld>
+  <p:clrMapOvr>
+    <a:masterClrMapping/>
+  </p:clrMapOvr>
+</p:sld>
+</file>
+
+<file path=ppt/slides/slide30.xml><?xml version="1.0" encoding="utf-8"?>
+<p:sld xmlns:a="http://schemas.openxmlformats.org/drawingml/2006/main" xmlns:r="http://schemas.openxmlformats.org/officeDocument/2006/relationships" xmlns:p="http://schemas.openxmlformats.org/presentationml/2006/main">
+  <p:cSld>
+    <p:spTree>
+      <p:nvGrpSpPr>
+        <p:cNvPr id="1" name=""/>
+        <p:cNvGrpSpPr/>
+        <p:nvPr/>
+      </p:nvGrpSpPr>
+      <p:grpSpPr>
+        <a:xfrm>
+          <a:off x="0" y="0"/>
+          <a:ext cx="0" cy="0"/>
+          <a:chOff x="0" y="0"/>
+          <a:chExt cx="0" cy="0"/>
+        </a:xfrm>
+      </p:grpSpPr>
+      <p:sp>
+        <p:nvSpPr>
+          <p:cNvPr id="2" name="Text Placeholder 1"/>
+          <p:cNvSpPr>
+            <a:spLocks noGrp="1"/>
+          </p:cNvSpPr>
+          <p:nvPr>
+            <p:ph type="body" sz="quarter" idx="10"/>
+          </p:nvPr>
+        </p:nvSpPr>
+        <p:spPr/>
+        <p:txBody>
+          <a:bodyPr/>
+          <a:lstStyle/>
+          <a:p>
+            <a:r>
+              <a:t>Resposta: decisão ou repetição?</a:t>
+            </a:r>
+          </a:p>
+        </p:txBody>
+      </p:sp>
+      <p:sp>
+        <p:nvSpPr>
+          <p:cNvPr id="9001" name="codigo fundo"/>
+          <p:cNvSpPr/>
+          <p:nvPr/>
+        </p:nvSpPr>
+        <p:spPr>
+          <a:xfrm>
+            <a:off x="1014984" y="1783080"/>
+            <a:ext cx="5394960" cy="3657600"/>
+          </a:xfrm>
+          <a:prstGeom prst="roundRect">
+            <a:avLst>
+              <a:gd name="adj" fmla="val 4651"/>
+            </a:avLst>
+          </a:prstGeom>
+          <a:solidFill>
+            <a:srgbClr val="1E2433"/>
+          </a:solidFill>
+          <a:ln>
+            <a:noFill/>
+          </a:ln>
+        </p:spPr>
+        <p:txBody>
+          <a:bodyPr rtlCol="0" anchor="ctr"/>
+          <a:lstStyle/>
+          <a:p>
+            <a:endParaRPr lang="pt-BR"/>
+          </a:p>
+        </p:txBody>
+      </p:sp>
+      <p:sp>
+        <p:nvSpPr>
+          <p:cNvPr id="9002" name="forma"/>
+          <p:cNvSpPr/>
+          <p:nvPr/>
+        </p:nvSpPr>
+        <p:spPr>
+          <a:xfrm>
+            <a:off x="1228954" y="1937614"/>
+            <a:ext cx="118872" cy="118872"/>
+          </a:xfrm>
+          <a:prstGeom prst="ellipse">
+            <a:avLst/>
+          </a:prstGeom>
+          <a:solidFill>
+            <a:srgbClr val="FF5F57"/>
+          </a:solidFill>
+          <a:ln>
+            <a:noFill/>
+          </a:ln>
+        </p:spPr>
+        <p:txBody>
+          <a:bodyPr rtlCol="0" anchor="ctr"/>
+          <a:lstStyle/>
+          <a:p>
+            <a:endParaRPr lang="pt-BR"/>
+          </a:p>
+        </p:txBody>
+      </p:sp>
+      <p:sp>
+        <p:nvSpPr>
+          <p:cNvPr id="9003" name="forma"/>
+          <p:cNvSpPr/>
+          <p:nvPr/>
+        </p:nvSpPr>
+        <p:spPr>
+          <a:xfrm>
+            <a:off x="1419149" y="1937614"/>
+            <a:ext cx="118872" cy="118872"/>
+          </a:xfrm>
+          <a:prstGeom prst="ellipse">
+            <a:avLst/>
+          </a:prstGeom>
+          <a:solidFill>
+            <a:srgbClr val="FEBC2E"/>
+          </a:solidFill>
+          <a:ln>
+            <a:noFill/>
+          </a:ln>
+        </p:spPr>
+        <p:txBody>
+          <a:bodyPr rtlCol="0" anchor="ctr"/>
+          <a:lstStyle/>
+          <a:p>
+            <a:endParaRPr lang="pt-BR"/>
+          </a:p>
+        </p:txBody>
+      </p:sp>
+      <p:sp>
+        <p:nvSpPr>
+          <p:cNvPr id="9004" name="forma"/>
+          <p:cNvSpPr/>
+          <p:nvPr/>
+        </p:nvSpPr>
+        <p:spPr>
+          <a:xfrm>
+            <a:off x="1609344" y="1937614"/>
+            <a:ext cx="118872" cy="118872"/>
+          </a:xfrm>
+          <a:prstGeom prst="ellipse">
+            <a:avLst/>
+          </a:prstGeom>
+          <a:solidFill>
+            <a:srgbClr val="28C840"/>
+          </a:solidFill>
+          <a:ln>
+            <a:noFill/>
+          </a:ln>
+        </p:spPr>
+        <p:txBody>
+          <a:bodyPr rtlCol="0" anchor="ctr"/>
+          <a:lstStyle/>
+          <a:p>
+            <a:endParaRPr lang="pt-BR"/>
+          </a:p>
+        </p:txBody>
+      </p:sp>
+      <p:sp>
+        <p:nvSpPr>
+          <p:cNvPr id="9005" name="codigo rotulo"/>
+          <p:cNvSpPr txBox="1"/>
+          <p:nvPr/>
+        </p:nvSpPr>
+        <p:spPr>
+          <a:xfrm>
+            <a:off x="1870862" y="1854403"/>
+            <a:ext cx="4325112" cy="285293"/>
+          </a:xfrm>
+          <a:prstGeom prst="rect">
+            <a:avLst/>
+          </a:prstGeom>
+          <a:noFill/>
+        </p:spPr>
+        <p:txBody>
+          <a:bodyPr wrap="square" lIns="0" tIns="0" rIns="0" bIns="0" rtlCol="0" anchor="ctr">
+            <a:noAutofit/>
+          </a:bodyPr>
+          <a:lstStyle/>
+          <a:p>
+            <a:pPr marL="0" indent="0">
+              <a:buNone/>
+            </a:pPr>
+            <a:r>
+              <a:rPr lang="pt-BR" sz="1150" dirty="0">
+                <a:solidFill>
+                  <a:srgbClr val="8B949E"/>
+                </a:solidFill>
+                <a:latin typeface="Courier New" pitchFamily="49" charset="0"/>
+                <a:ea typeface="Courier New" pitchFamily="49" charset="0"/>
+                <a:cs typeface="Courier New" pitchFamily="49" charset="0"/>
+              </a:rPr>
+              <a:t>entrega1/crud_aluno.py</a:t>
+            </a:r>
+            <a:endParaRPr lang="pt-BR" sz="900" dirty="0"/>
+          </a:p>
+        </p:txBody>
+      </p:sp>
+      <p:sp>
+        <p:nvSpPr>
+          <p:cNvPr id="9006" name="codigo texto"/>
+          <p:cNvSpPr txBox="1"/>
+          <p:nvPr/>
+        </p:nvSpPr>
+        <p:spPr>
+          <a:xfrm>
+            <a:off x="1300277" y="2282342"/>
+            <a:ext cx="4919472" cy="3063240"/>
+          </a:xfrm>
+          <a:prstGeom prst="rect">
+            <a:avLst/>
+          </a:prstGeom>
+          <a:noFill/>
+        </p:spPr>
+        <p:txBody>
+          <a:bodyPr wrap="none" lIns="0" tIns="0" rIns="0" bIns="0" rtlCol="0" anchor="t">
+            <a:noAutofit/>
+          </a:bodyPr>
+          <a:lstStyle/>
+          <a:p>
+            <a:pPr marL="0" indent="0">
+              <a:buNone/>
+            </a:pPr>
+            <a:r>
+              <a:rPr lang="pt-BR" sz="1500" dirty="0">
+                <a:solidFill>
+                  <a:srgbClr val="6E7681"/>
+                </a:solidFill>
+                <a:latin typeface="Courier New" pitchFamily="49" charset="0"/>
+                <a:ea typeface="Courier New" pitchFamily="49" charset="0"/>
+                <a:cs typeface="Courier New" pitchFamily="49" charset="0"/>
+              </a:rPr>
+              <a:t>import sqlite3</a:t>
+            </a:r>
+            <a:endParaRPr lang="pt-BR" sz="1500" dirty="0"/>
+          </a:p>
+          <a:p>
+            <a:pPr marL="0" indent="0">
+              <a:buNone/>
+            </a:pPr>
+            <a:endParaRPr lang="pt-BR" sz="1500" dirty="0"/>
+          </a:p>
+          <a:p>
+            <a:pPr marL="0" indent="0">
+              <a:buNone/>
+            </a:pPr>
+            <a:r>
+              <a:rPr lang="pt-BR" sz="1500" dirty="0">
+                <a:solidFill>
+                  <a:srgbClr val="6E7681"/>
+                </a:solidFill>
+                <a:latin typeface="Courier New" pitchFamily="49" charset="0"/>
+                <a:ea typeface="Courier New" pitchFamily="49" charset="0"/>
+                <a:cs typeface="Courier New" pitchFamily="49" charset="0"/>
+              </a:rPr>
+              <a:t>conexao = sqlite3.connect("escola.db")</a:t>
+            </a:r>
+            <a:endParaRPr lang="pt-BR" sz="1500" dirty="0"/>
+          </a:p>
+          <a:p>
+            <a:pPr marL="0" indent="0">
+              <a:buNone/>
+            </a:pPr>
+            <a:r>
+              <a:rPr lang="pt-BR" sz="1500" dirty="0">
+                <a:solidFill>
+                  <a:srgbClr val="6E7681"/>
+                </a:solidFill>
+                <a:latin typeface="Courier New" pitchFamily="49" charset="0"/>
+                <a:ea typeface="Courier New" pitchFamily="49" charset="0"/>
+                <a:cs typeface="Courier New" pitchFamily="49" charset="0"/>
+              </a:rPr>
+              <a:t>conexao.execute("PRAGMA foreign_keys = ON")</a:t>
+            </a:r>
+            <a:endParaRPr lang="pt-BR" sz="1500" dirty="0"/>
+          </a:p>
+          <a:p>
+            <a:pPr marL="0" indent="0">
+              <a:buNone/>
+            </a:pPr>
+            <a:r>
+              <a:rPr lang="pt-BR" sz="1500" dirty="0">
+                <a:solidFill>
+                  <a:srgbClr val="6E7681"/>
+                </a:solidFill>
+                <a:latin typeface="Courier New" pitchFamily="49" charset="0"/>
+                <a:ea typeface="Courier New" pitchFamily="49" charset="0"/>
+                <a:cs typeface="Courier New" pitchFamily="49" charset="0"/>
+              </a:rPr>
+              <a:t>cursor = conexao.cursor()</a:t>
+            </a:r>
+            <a:endParaRPr lang="pt-BR" sz="1500" dirty="0"/>
+          </a:p>
+          <a:p>
+            <a:pPr marL="0" indent="0">
+              <a:buNone/>
+            </a:pPr>
+            <a:r>
+              <a:rPr lang="pt-BR" sz="1500" dirty="0">
+                <a:solidFill>
+                  <a:srgbClr val="6E7681"/>
+                </a:solidFill>
+                <a:latin typeface="Courier New" pitchFamily="49" charset="0"/>
+                <a:ea typeface="Courier New" pitchFamily="49" charset="0"/>
+                <a:cs typeface="Courier New" pitchFamily="49" charset="0"/>
+              </a:rPr>
+              <a:t>cursor.execute(</a:t>
+            </a:r>
+            <a:endParaRPr lang="pt-BR" sz="1500" dirty="0"/>
+          </a:p>
+          <a:p>
+            <a:pPr marL="0" indent="0">
+              <a:buNone/>
+            </a:pPr>
+            <a:r>
+              <a:rPr lang="pt-BR" sz="1500" dirty="0">
+                <a:solidFill>
+                  <a:srgbClr val="6E7681"/>
+                </a:solidFill>
+                <a:latin typeface="Courier New" pitchFamily="49" charset="0"/>
+                <a:ea typeface="Courier New" pitchFamily="49" charset="0"/>
+                <a:cs typeface="Courier New" pitchFamily="49" charset="0"/>
+              </a:rPr>
+              <a:t xml:space="preserve">    "INSERT INTO </a:t>
+            </a:r>
+            <a:r>
+              <a:rPr lang="pt-BR" sz="1500" b="1" dirty="0">
+                <a:solidFill>
+                  <a:srgbClr val="7EE787"/>
+                </a:solidFill>
+                <a:latin typeface="Courier New" pitchFamily="49" charset="0"/>
+                <a:ea typeface="Courier New" pitchFamily="49" charset="0"/>
+                <a:cs typeface="Courier New" pitchFamily="49" charset="0"/>
+              </a:rPr>
+              <a:t>aluno (matricula, nome)</a:t>
+            </a:r>
+            <a:r>
+              <a:rPr lang="pt-BR" sz="1500" dirty="0">
+                <a:solidFill>
+                  <a:srgbClr val="6E7681"/>
+                </a:solidFill>
+                <a:latin typeface="Courier New" pitchFamily="49" charset="0"/>
+                <a:ea typeface="Courier New" pitchFamily="49" charset="0"/>
+                <a:cs typeface="Courier New" pitchFamily="49" charset="0"/>
+              </a:rPr>
+              <a:t xml:space="preserve"> "</a:t>
+            </a:r>
+            <a:endParaRPr lang="pt-BR" sz="1500" dirty="0"/>
+          </a:p>
+          <a:p>
+            <a:pPr marL="0" indent="0">
+              <a:buNone/>
+            </a:pPr>
+            <a:r>
+              <a:rPr lang="pt-BR" sz="1500" dirty="0">
+                <a:solidFill>
+                  <a:srgbClr val="6E7681"/>
+                </a:solidFill>
+                <a:latin typeface="Courier New" pitchFamily="49" charset="0"/>
+                <a:ea typeface="Courier New" pitchFamily="49" charset="0"/>
+                <a:cs typeface="Courier New" pitchFamily="49" charset="0"/>
+              </a:rPr>
+              <a:t xml:space="preserve">    "VALUES (?, ?)",</a:t>
+            </a:r>
+            <a:endParaRPr lang="pt-BR" sz="1500" dirty="0"/>
+          </a:p>
+          <a:p>
+            <a:pPr marL="0" indent="0">
+              <a:buNone/>
+            </a:pPr>
+            <a:r>
+              <a:rPr lang="pt-BR" sz="1500" dirty="0">
+                <a:solidFill>
+                  <a:srgbClr val="6E7681"/>
+                </a:solidFill>
+                <a:latin typeface="Courier New" pitchFamily="49" charset="0"/>
+                <a:ea typeface="Courier New" pitchFamily="49" charset="0"/>
+                <a:cs typeface="Courier New" pitchFamily="49" charset="0"/>
+              </a:rPr>
+              <a:t xml:space="preserve">    </a:t>
+            </a:r>
+            <a:r>
+              <a:rPr lang="pt-BR" sz="1500" b="1" dirty="0">
+                <a:solidFill>
+                  <a:srgbClr val="7EE787"/>
+                </a:solidFill>
+                <a:latin typeface="Courier New" pitchFamily="49" charset="0"/>
+                <a:ea typeface="Courier New" pitchFamily="49" charset="0"/>
+                <a:cs typeface="Courier New" pitchFamily="49" charset="0"/>
+              </a:rPr>
+              <a:t>(matricula, nome)</a:t>
+            </a:r>
+            <a:r>
+              <a:rPr lang="pt-BR" sz="1500" dirty="0">
+                <a:solidFill>
+                  <a:srgbClr val="6E7681"/>
+                </a:solidFill>
+                <a:latin typeface="Courier New" pitchFamily="49" charset="0"/>
+                <a:ea typeface="Courier New" pitchFamily="49" charset="0"/>
+                <a:cs typeface="Courier New" pitchFamily="49" charset="0"/>
+              </a:rPr>
+              <a:t>,</a:t>
+            </a:r>
+            <a:endParaRPr lang="pt-BR" sz="1500" dirty="0"/>
+          </a:p>
+          <a:p>
+            <a:pPr marL="0" indent="0">
+              <a:buNone/>
+            </a:pPr>
+            <a:r>
+              <a:rPr lang="pt-BR" sz="1500" dirty="0">
+                <a:solidFill>
+                  <a:srgbClr val="6E7681"/>
+                </a:solidFill>
+                <a:latin typeface="Courier New" pitchFamily="49" charset="0"/>
+                <a:ea typeface="Courier New" pitchFamily="49" charset="0"/>
+                <a:cs typeface="Courier New" pitchFamily="49" charset="0"/>
+              </a:rPr>
+              <a:t>)</a:t>
+            </a:r>
+            <a:endParaRPr lang="pt-BR" sz="1500" dirty="0"/>
+          </a:p>
+          <a:p>
+            <a:pPr marL="0" indent="0">
+              <a:buNone/>
+            </a:pPr>
+            <a:r>
+              <a:rPr lang="pt-BR" sz="1500" dirty="0">
+                <a:solidFill>
+                  <a:srgbClr val="6E7681"/>
+                </a:solidFill>
+                <a:latin typeface="Courier New" pitchFamily="49" charset="0"/>
+                <a:ea typeface="Courier New" pitchFamily="49" charset="0"/>
+                <a:cs typeface="Courier New" pitchFamily="49" charset="0"/>
+              </a:rPr>
+              <a:t>conexao.commit()</a:t>
+            </a:r>
+            <a:endParaRPr lang="pt-BR" sz="1500" dirty="0"/>
+          </a:p>
+          <a:p>
+            <a:pPr marL="0" indent="0">
+              <a:buNone/>
+            </a:pPr>
+            <a:r>
+              <a:rPr lang="pt-BR" sz="1500" dirty="0">
+                <a:solidFill>
+                  <a:srgbClr val="6E7681"/>
+                </a:solidFill>
+                <a:latin typeface="Courier New" pitchFamily="49" charset="0"/>
+                <a:ea typeface="Courier New" pitchFamily="49" charset="0"/>
+                <a:cs typeface="Courier New" pitchFamily="49" charset="0"/>
+              </a:rPr>
+              <a:t>conexao.close()</a:t>
+            </a:r>
+            <a:endParaRPr lang="pt-BR" sz="1500" dirty="0"/>
+          </a:p>
+        </p:txBody>
+      </p:sp>
+      <p:sp>
+        <p:nvSpPr>
+          <p:cNvPr id="9007" name="painel"/>
+          <p:cNvSpPr/>
+          <p:nvPr/>
+        </p:nvSpPr>
+        <p:spPr>
+          <a:xfrm>
+            <a:off x="6720840" y="1783080"/>
+            <a:ext cx="4443984" cy="1737360"/>
+          </a:xfrm>
+          <a:prstGeom prst="roundRect">
+            <a:avLst>
+              <a:gd name="adj" fmla="val 4651"/>
+            </a:avLst>
+          </a:prstGeom>
+          <a:solidFill>
+            <a:srgbClr val="E3EFF1"/>
+          </a:solidFill>
+          <a:ln>
+            <a:noFill/>
+          </a:ln>
+        </p:spPr>
+        <p:txBody>
+          <a:bodyPr rtlCol="0" anchor="ctr"/>
+          <a:lstStyle/>
+          <a:p>
+            <a:endParaRPr lang="pt-BR"/>
+          </a:p>
+        </p:txBody>
+      </p:sp>
+      <p:sp>
+        <p:nvSpPr>
+          <p:cNvPr id="9008" name="texto"/>
+          <p:cNvSpPr txBox="1"/>
+          <p:nvPr/>
+        </p:nvSpPr>
+        <p:spPr>
+          <a:xfrm>
+            <a:off x="6995160" y="2002536"/>
+            <a:ext cx="3895344" cy="1298448"/>
+          </a:xfrm>
+          <a:prstGeom prst="rect">
+            <a:avLst/>
+          </a:prstGeom>
+          <a:noFill/>
+        </p:spPr>
+        <p:txBody>
+          <a:bodyPr wrap="square" lIns="0" tIns="0" rIns="0" bIns="0" rtlCol="0" anchor="ctr">
+            <a:noAutofit/>
+          </a:bodyPr>
+          <a:lstStyle/>
+          <a:p>
+            <a:pPr marL="0" indent="0">
+              <a:spcAft>
+                <a:spcPts val="600"/>
+              </a:spcAft>
+              <a:buNone/>
+            </a:pPr>
+            <a:r>
+              <a:rPr lang="pt-BR" sz="1800" b="1" dirty="0">
+                <a:solidFill>
+                  <a:srgbClr val="00397B"/>
+                </a:solidFill>
+              </a:rPr>
+              <a:t>Decisão de vocês (em verde)</a:t>
+            </a:r>
+            <a:endParaRPr lang="pt-BR" sz="1800" dirty="0"/>
+          </a:p>
+          <a:p>
+            <a:pPr marL="0" indent="0">
+              <a:spcAft>
+                <a:spcPts val="600"/>
+              </a:spcAft>
+              <a:buNone/>
+            </a:pPr>
+            <a:r>
+              <a:rPr lang="pt-BR" sz="1500" dirty="0">
+                <a:solidFill>
+                  <a:srgbClr val="3A3A3A"/>
+                </a:solidFill>
+              </a:rPr>
+              <a:t>A tabela, as colunas e os valores que entram. E as regras: o que é obrigatório e o que não pode repetir.</a:t>
+            </a:r>
+            <a:endParaRPr lang="pt-BR" sz="1500" dirty="0"/>
+          </a:p>
+        </p:txBody>
+      </p:sp>
+      <p:sp>
+        <p:nvSpPr>
+          <p:cNvPr id="9009" name="painel"/>
+          <p:cNvSpPr/>
+          <p:nvPr/>
+        </p:nvSpPr>
+        <p:spPr>
+          <a:xfrm>
+            <a:off x="6720840" y="3703320"/>
+            <a:ext cx="4443984" cy="1737360"/>
+          </a:xfrm>
+          <a:prstGeom prst="roundRect">
+            <a:avLst>
+              <a:gd name="adj" fmla="val 4651"/>
+            </a:avLst>
+          </a:prstGeom>
+          <a:solidFill>
+            <a:srgbClr val="E3EFF1"/>
+          </a:solidFill>
+          <a:ln>
+            <a:noFill/>
+          </a:ln>
+        </p:spPr>
+        <p:txBody>
+          <a:bodyPr rtlCol="0" anchor="ctr"/>
+          <a:lstStyle/>
+          <a:p>
+            <a:endParaRPr lang="pt-BR"/>
+          </a:p>
+        </p:txBody>
+      </p:sp>
+      <p:sp>
+        <p:nvSpPr>
+          <p:cNvPr id="9010" name="texto"/>
+          <p:cNvSpPr txBox="1"/>
+          <p:nvPr/>
+        </p:nvSpPr>
+        <p:spPr>
+          <a:xfrm>
+            <a:off x="6995160" y="3922776"/>
+            <a:ext cx="3895344" cy="1298448"/>
+          </a:xfrm>
+          <a:prstGeom prst="rect">
+            <a:avLst/>
+          </a:prstGeom>
+          <a:noFill/>
+        </p:spPr>
+        <p:txBody>
+          <a:bodyPr wrap="square" lIns="0" tIns="0" rIns="0" bIns="0" rtlCol="0" anchor="ctr">
+            <a:noAutofit/>
+          </a:bodyPr>
+          <a:lstStyle/>
+          <a:p>
+            <a:pPr marL="0" indent="0">
+              <a:spcAft>
+                <a:spcPts val="600"/>
+              </a:spcAft>
+              <a:buNone/>
+            </a:pPr>
+            <a:r>
+              <a:rPr lang="pt-BR" sz="1800" b="1" dirty="0">
+                <a:solidFill>
+                  <a:srgbClr val="00397B"/>
+                </a:solidFill>
+              </a:rPr>
+              <a:t>Repetição (em cinza)</a:t>
+            </a:r>
+            <a:endParaRPr lang="pt-BR" sz="1800" dirty="0"/>
+          </a:p>
+          <a:p>
+            <a:pPr marL="0" indent="0">
+              <a:spcAft>
+                <a:spcPts val="600"/>
+              </a:spcAft>
+              <a:buNone/>
+            </a:pPr>
+            <a:r>
+              <a:rPr lang="pt-BR" sz="1300" dirty="0">
+                <a:solidFill>
+                  <a:srgbClr val="00397B"/>
+                </a:solidFill>
+                <a:latin typeface="Courier New" pitchFamily="49" charset="0"/>
+                <a:ea typeface="Courier New" pitchFamily="49" charset="0"/>
+                <a:cs typeface="Courier New" pitchFamily="49" charset="0"/>
+              </a:rPr>
+              <a:t>connect</a:t>
+            </a:r>
+            <a:r>
+              <a:rPr lang="pt-BR" sz="1500" dirty="0">
+                <a:solidFill>
+                  <a:srgbClr val="3A3A3A"/>
+                </a:solidFill>
+              </a:rPr>
+              <a:t xml:space="preserve">, </a:t>
+            </a:r>
+            <a:r>
+              <a:rPr lang="pt-BR" sz="1300" dirty="0">
+                <a:solidFill>
+                  <a:srgbClr val="00397B"/>
+                </a:solidFill>
+                <a:latin typeface="Courier New" pitchFamily="49" charset="0"/>
+                <a:ea typeface="Courier New" pitchFamily="49" charset="0"/>
+                <a:cs typeface="Courier New" pitchFamily="49" charset="0"/>
+              </a:rPr>
+              <a:t>PRAGMA</a:t>
+            </a:r>
+            <a:r>
+              <a:rPr lang="pt-BR" sz="1500" dirty="0">
+                <a:solidFill>
+                  <a:srgbClr val="3A3A3A"/>
+                </a:solidFill>
+              </a:rPr>
+              <a:t xml:space="preserve">, </a:t>
+            </a:r>
+            <a:r>
+              <a:rPr lang="pt-BR" sz="1300" dirty="0">
+                <a:solidFill>
+                  <a:srgbClr val="00397B"/>
+                </a:solidFill>
+                <a:latin typeface="Courier New" pitchFamily="49" charset="0"/>
+                <a:ea typeface="Courier New" pitchFamily="49" charset="0"/>
+                <a:cs typeface="Courier New" pitchFamily="49" charset="0"/>
+              </a:rPr>
+              <a:t>cursor</a:t>
+            </a:r>
+            <a:r>
+              <a:rPr lang="pt-BR" sz="1500" dirty="0">
+                <a:solidFill>
+                  <a:srgbClr val="3A3A3A"/>
+                </a:solidFill>
+              </a:rPr>
+              <a:t xml:space="preserve">, </a:t>
+            </a:r>
+            <a:r>
+              <a:rPr lang="pt-BR" sz="1300" dirty="0">
+                <a:solidFill>
+                  <a:srgbClr val="00397B"/>
+                </a:solidFill>
+                <a:latin typeface="Courier New" pitchFamily="49" charset="0"/>
+                <a:ea typeface="Courier New" pitchFamily="49" charset="0"/>
+                <a:cs typeface="Courier New" pitchFamily="49" charset="0"/>
+              </a:rPr>
+              <a:t>execute</a:t>
+            </a:r>
+            <a:r>
+              <a:rPr lang="pt-BR" sz="1500" dirty="0">
+                <a:solidFill>
+                  <a:srgbClr val="3A3A3A"/>
+                </a:solidFill>
+              </a:rPr>
+              <a:t xml:space="preserve"> com </a:t>
+            </a:r>
+            <a:r>
+              <a:rPr lang="pt-BR" sz="1300" dirty="0">
+                <a:solidFill>
+                  <a:srgbClr val="00397B"/>
+                </a:solidFill>
+                <a:latin typeface="Courier New" pitchFamily="49" charset="0"/>
+                <a:ea typeface="Courier New" pitchFamily="49" charset="0"/>
+                <a:cs typeface="Courier New" pitchFamily="49" charset="0"/>
+              </a:rPr>
+              <a:t>?</a:t>
+            </a:r>
+            <a:r>
+              <a:rPr lang="pt-BR" sz="1500" dirty="0">
+                <a:solidFill>
+                  <a:srgbClr val="3A3A3A"/>
+                </a:solidFill>
+              </a:rPr>
+              <a:t xml:space="preserve">, </a:t>
+            </a:r>
+            <a:r>
+              <a:rPr lang="pt-BR" sz="1300" dirty="0">
+                <a:solidFill>
+                  <a:srgbClr val="00397B"/>
+                </a:solidFill>
+                <a:latin typeface="Courier New" pitchFamily="49" charset="0"/>
+                <a:ea typeface="Courier New" pitchFamily="49" charset="0"/>
+                <a:cs typeface="Courier New" pitchFamily="49" charset="0"/>
+              </a:rPr>
+              <a:t>commit</a:t>
+            </a:r>
+            <a:r>
+              <a:rPr lang="pt-BR" sz="1500" dirty="0">
+                <a:solidFill>
+                  <a:srgbClr val="3A3A3A"/>
+                </a:solidFill>
+              </a:rPr>
+              <a:t xml:space="preserve"> e </a:t>
+            </a:r>
+            <a:r>
+              <a:rPr lang="pt-BR" sz="1300" dirty="0">
+                <a:solidFill>
+                  <a:srgbClr val="00397B"/>
+                </a:solidFill>
+                <a:latin typeface="Courier New" pitchFamily="49" charset="0"/>
+                <a:ea typeface="Courier New" pitchFamily="49" charset="0"/>
+                <a:cs typeface="Courier New" pitchFamily="49" charset="0"/>
+              </a:rPr>
+              <a:t>close</a:t>
+            </a:r>
+            <a:r>
+              <a:rPr lang="pt-BR" sz="1500" dirty="0">
+                <a:solidFill>
+                  <a:srgbClr val="3A3A3A"/>
+                </a:solidFill>
+              </a:rPr>
+              <a:t>: a mesma cerimônia em toda função. É ela que o Django assume.</a:t>
+            </a:r>
+            <a:endParaRPr lang="pt-BR" sz="1500" dirty="0"/>
+          </a:p>
+        </p:txBody>
+      </p:sp>
+    </p:spTree>
+  </p:cSld>
+  <p:clrMapOvr>
+    <a:masterClrMapping/>
+  </p:clrMapOvr>
+</p:sld>
+</file>
+
+<file path=ppt/slides/slide31.xml><?xml version="1.0" encoding="utf-8"?>
+<p:sld xmlns:a="http://schemas.openxmlformats.org/drawingml/2006/main" xmlns:r="http://schemas.openxmlformats.org/officeDocument/2006/relationships" xmlns:p="http://schemas.openxmlformats.org/presentationml/2006/main">
+  <p:cSld>
+    <p:spTree>
+      <p:nvGrpSpPr>
+        <p:cNvPr id="1" name=""/>
+        <p:cNvGrpSpPr/>
+        <p:nvPr/>
+      </p:nvGrpSpPr>
+      <p:grpSpPr>
+        <a:xfrm>
+          <a:off x="0" y="0"/>
+          <a:ext cx="0" cy="0"/>
+          <a:chOff x="0" y="0"/>
+          <a:chExt cx="0" cy="0"/>
+        </a:xfrm>
+      </p:grpSpPr>
+      <p:sp>
+        <p:nvSpPr>
+          <p:cNvPr id="2" name="Text Placeholder 1"/>
+          <p:cNvSpPr>
+            <a:spLocks noGrp="1"/>
+          </p:cNvSpPr>
+          <p:nvPr>
+            <p:ph type="body" sz="quarter" idx="10"/>
+          </p:nvPr>
+        </p:nvSpPr>
+        <p:spPr/>
+        <p:txBody>
+          <a:bodyPr/>
+          <a:lstStyle/>
+          <a:p>
+            <a:r>
+              <a:t>Resposta: 403 ou login?</a:t>
+            </a:r>
+          </a:p>
+        </p:txBody>
+      </p:sp>
+      <p:sp>
+        <p:nvSpPr>
+          <p:cNvPr id="9011" name="painel"/>
+          <p:cNvSpPr/>
+          <p:nvPr/>
+        </p:nvSpPr>
+        <p:spPr>
+          <a:xfrm>
+            <a:off x="1014984" y="1783080"/>
+            <a:ext cx="4983480" cy="2103120"/>
+          </a:xfrm>
+          <a:prstGeom prst="roundRect">
+            <a:avLst>
+              <a:gd name="adj" fmla="val 4651"/>
+            </a:avLst>
+          </a:prstGeom>
+          <a:solidFill>
+            <a:srgbClr val="E3EFF1"/>
+          </a:solidFill>
+          <a:ln>
+            <a:noFill/>
+          </a:ln>
+        </p:spPr>
+        <p:txBody>
+          <a:bodyPr rtlCol="0" anchor="ctr"/>
+          <a:lstStyle/>
+          <a:p>
+            <a:endParaRPr lang="pt-BR"/>
+          </a:p>
+        </p:txBody>
+      </p:sp>
+      <p:sp>
+        <p:nvSpPr>
+          <p:cNvPr id="9012" name="texto"/>
+          <p:cNvSpPr txBox="1"/>
+          <p:nvPr/>
+        </p:nvSpPr>
+        <p:spPr>
+          <a:xfrm>
+            <a:off x="1289304" y="2002536"/>
+            <a:ext cx="4434840" cy="1664208"/>
+          </a:xfrm>
+          <a:prstGeom prst="rect">
+            <a:avLst/>
+          </a:prstGeom>
+          <a:noFill/>
+        </p:spPr>
+        <p:txBody>
+          <a:bodyPr wrap="square" lIns="0" tIns="0" rIns="0" bIns="0" rtlCol="0" anchor="ctr">
+            <a:noAutofit/>
+          </a:bodyPr>
+          <a:lstStyle/>
+          <a:p>
+            <a:pPr marL="0" indent="0">
+              <a:spcAft>
+                <a:spcPts val="600"/>
+              </a:spcAft>
+              <a:buNone/>
+            </a:pPr>
+            <a:r>
+              <a:rPr lang="pt-BR" sz="1800" b="1" dirty="0">
+                <a:solidFill>
+                  <a:srgbClr val="00397B"/>
+                </a:solidFill>
+              </a:rPr>
+              <a:t>Login: “não sei quem você é”</a:t>
+            </a:r>
+            <a:endParaRPr lang="pt-BR" sz="1800" dirty="0"/>
+          </a:p>
+          <a:p>
+            <a:pPr marL="0" indent="0">
+              <a:spcAft>
+                <a:spcPts val="600"/>
+              </a:spcAft>
+              <a:buNone/>
+            </a:pPr>
+            <a:r>
+              <a:rPr lang="pt-BR" sz="1500" dirty="0">
+                <a:solidFill>
+                  <a:srgbClr val="3A3A3A"/>
+                </a:solidFill>
+              </a:rPr>
+              <a:t>Visitante sem sessão. O decorator manda para a tela de login e guarda para onde ele queria ir.</a:t>
+            </a:r>
+            <a:endParaRPr lang="pt-BR" sz="1500" dirty="0"/>
+          </a:p>
+        </p:txBody>
+      </p:sp>
+      <p:sp>
+        <p:nvSpPr>
+          <p:cNvPr id="9013" name="painel"/>
+          <p:cNvSpPr/>
+          <p:nvPr/>
+        </p:nvSpPr>
+        <p:spPr>
+          <a:xfrm>
+            <a:off x="6181344" y="1783080"/>
+            <a:ext cx="4983480" cy="2103120"/>
+          </a:xfrm>
+          <a:prstGeom prst="roundRect">
+            <a:avLst>
+              <a:gd name="adj" fmla="val 4651"/>
+            </a:avLst>
+          </a:prstGeom>
+          <a:solidFill>
+            <a:srgbClr val="E3EFF1"/>
+          </a:solidFill>
+          <a:ln>
+            <a:noFill/>
+          </a:ln>
+        </p:spPr>
+        <p:txBody>
+          <a:bodyPr rtlCol="0" anchor="ctr"/>
+          <a:lstStyle/>
+          <a:p>
+            <a:endParaRPr lang="pt-BR"/>
+          </a:p>
+        </p:txBody>
+      </p:sp>
+      <p:sp>
+        <p:nvSpPr>
+          <p:cNvPr id="9014" name="texto"/>
+          <p:cNvSpPr txBox="1"/>
+          <p:nvPr/>
+        </p:nvSpPr>
+        <p:spPr>
+          <a:xfrm>
+            <a:off x="6455664" y="2002536"/>
+            <a:ext cx="4434840" cy="1664208"/>
+          </a:xfrm>
+          <a:prstGeom prst="rect">
+            <a:avLst/>
+          </a:prstGeom>
+          <a:noFill/>
+        </p:spPr>
+        <p:txBody>
+          <a:bodyPr wrap="square" lIns="0" tIns="0" rIns="0" bIns="0" rtlCol="0" anchor="ctr">
+            <a:noAutofit/>
+          </a:bodyPr>
+          <a:lstStyle/>
+          <a:p>
+            <a:pPr marL="0" indent="0">
+              <a:spcAft>
+                <a:spcPts val="600"/>
+              </a:spcAft>
+              <a:buNone/>
+            </a:pPr>
+            <a:r>
+              <a:rPr lang="pt-BR" sz="1800" b="1" dirty="0">
+                <a:solidFill>
+                  <a:srgbClr val="00397B"/>
+                </a:solidFill>
+              </a:rPr>
+              <a:t>403: “sei quem você é, e você não pode”</a:t>
+            </a:r>
+            <a:endParaRPr lang="pt-BR" sz="1800" dirty="0"/>
+          </a:p>
+          <a:p>
+            <a:pPr marL="0" indent="0">
+              <a:spcAft>
+                <a:spcPts val="600"/>
+              </a:spcAft>
+              <a:buNone/>
+            </a:pPr>
+            <a:r>
+              <a:rPr lang="pt-BR" sz="1500" dirty="0">
+                <a:solidFill>
+                  <a:srgbClr val="3A3A3A"/>
+                </a:solidFill>
+              </a:rPr>
+              <a:t>Professor logado, sem perfil de coordenação. Mandá-lo ao login não adianta: ele entra de novo e cai na mesma tela, num loop.</a:t>
+            </a:r>
+            <a:endParaRPr lang="pt-BR" sz="1500" dirty="0"/>
+          </a:p>
+        </p:txBody>
+      </p:sp>
+      <p:sp>
+        <p:nvSpPr>
+          <p:cNvPr id="9015" name="codigo fundo"/>
+          <p:cNvSpPr/>
+          <p:nvPr/>
+        </p:nvSpPr>
+        <p:spPr>
+          <a:xfrm>
+            <a:off x="1014984" y="4069080"/>
+            <a:ext cx="10149840" cy="1508760"/>
+          </a:xfrm>
+          <a:prstGeom prst="roundRect">
+            <a:avLst>
+              <a:gd name="adj" fmla="val 4651"/>
+            </a:avLst>
+          </a:prstGeom>
+          <a:solidFill>
+            <a:srgbClr val="1E2433"/>
+          </a:solidFill>
+          <a:ln>
+            <a:noFill/>
+          </a:ln>
+        </p:spPr>
+        <p:txBody>
+          <a:bodyPr rtlCol="0" anchor="ctr"/>
+          <a:lstStyle/>
+          <a:p>
+            <a:endParaRPr lang="pt-BR"/>
+          </a:p>
+        </p:txBody>
+      </p:sp>
+      <p:sp>
+        <p:nvSpPr>
+          <p:cNvPr id="9016" name="forma"/>
+          <p:cNvSpPr/>
+          <p:nvPr/>
+        </p:nvSpPr>
+        <p:spPr>
+          <a:xfrm>
+            <a:off x="1228954" y="4223614"/>
+            <a:ext cx="118872" cy="118872"/>
+          </a:xfrm>
+          <a:prstGeom prst="ellipse">
+            <a:avLst/>
+          </a:prstGeom>
+          <a:solidFill>
+            <a:srgbClr val="FF5F57"/>
+          </a:solidFill>
+          <a:ln>
+            <a:noFill/>
+          </a:ln>
+        </p:spPr>
+        <p:txBody>
+          <a:bodyPr rtlCol="0" anchor="ctr"/>
+          <a:lstStyle/>
+          <a:p>
+            <a:endParaRPr lang="pt-BR"/>
+          </a:p>
+        </p:txBody>
+      </p:sp>
+      <p:sp>
+        <p:nvSpPr>
+          <p:cNvPr id="9017" name="forma"/>
+          <p:cNvSpPr/>
+          <p:nvPr/>
+        </p:nvSpPr>
+        <p:spPr>
+          <a:xfrm>
+            <a:off x="1419149" y="4223614"/>
+            <a:ext cx="118872" cy="118872"/>
+          </a:xfrm>
+          <a:prstGeom prst="ellipse">
+            <a:avLst/>
+          </a:prstGeom>
+          <a:solidFill>
+            <a:srgbClr val="FEBC2E"/>
+          </a:solidFill>
+          <a:ln>
+            <a:noFill/>
+          </a:ln>
+        </p:spPr>
+        <p:txBody>
+          <a:bodyPr rtlCol="0" anchor="ctr"/>
+          <a:lstStyle/>
+          <a:p>
+            <a:endParaRPr lang="pt-BR"/>
+          </a:p>
+        </p:txBody>
+      </p:sp>
+      <p:sp>
+        <p:nvSpPr>
+          <p:cNvPr id="9018" name="forma"/>
+          <p:cNvSpPr/>
+          <p:nvPr/>
+        </p:nvSpPr>
+        <p:spPr>
+          <a:xfrm>
+            <a:off x="1609344" y="4223614"/>
+            <a:ext cx="118872" cy="118872"/>
+          </a:xfrm>
+          <a:prstGeom prst="ellipse">
+            <a:avLst/>
+          </a:prstGeom>
+          <a:solidFill>
+            <a:srgbClr val="28C840"/>
+          </a:solidFill>
+          <a:ln>
+            <a:noFill/>
+          </a:ln>
+        </p:spPr>
+        <p:txBody>
+          <a:bodyPr rtlCol="0" anchor="ctr"/>
+          <a:lstStyle/>
+          <a:p>
+            <a:endParaRPr lang="pt-BR"/>
+          </a:p>
+        </p:txBody>
+      </p:sp>
+      <p:sp>
+        <p:nvSpPr>
+          <p:cNvPr id="9019" name="codigo rotulo"/>
+          <p:cNvSpPr txBox="1"/>
+          <p:nvPr/>
+        </p:nvSpPr>
+        <p:spPr>
+          <a:xfrm>
+            <a:off x="1870862" y="4140403"/>
+            <a:ext cx="9079992" cy="285293"/>
+          </a:xfrm>
+          <a:prstGeom prst="rect">
+            <a:avLst/>
+          </a:prstGeom>
+          <a:noFill/>
+        </p:spPr>
+        <p:txBody>
+          <a:bodyPr wrap="square" lIns="0" tIns="0" rIns="0" bIns="0" rtlCol="0" anchor="ctr">
+            <a:noAutofit/>
+          </a:bodyPr>
+          <a:lstStyle/>
+          <a:p>
+            <a:pPr marL="0" indent="0">
+              <a:buNone/>
+            </a:pPr>
+            <a:r>
+              <a:rPr lang="pt-BR" sz="1150" dirty="0">
+                <a:solidFill>
+                  <a:srgbClr val="8B949E"/>
+                </a:solidFill>
+                <a:latin typeface="Courier New" pitchFamily="49" charset="0"/>
+                <a:ea typeface="Courier New" pitchFamily="49" charset="0"/>
+                <a:cs typeface="Courier New" pitchFamily="49" charset="0"/>
+              </a:rPr>
+              <a:t>contas/decorators.py · resumido</a:t>
+            </a:r>
+            <a:endParaRPr lang="pt-BR" sz="900" dirty="0"/>
+          </a:p>
+        </p:txBody>
+      </p:sp>
+      <p:sp>
+        <p:nvSpPr>
+          <p:cNvPr id="9020" name="codigo texto"/>
+          <p:cNvSpPr txBox="1"/>
+          <p:nvPr/>
+        </p:nvSpPr>
+        <p:spPr>
+          <a:xfrm>
+            <a:off x="1300277" y="4568342"/>
+            <a:ext cx="9674352" cy="914400"/>
+          </a:xfrm>
+          <a:prstGeom prst="rect">
+            <a:avLst/>
+          </a:prstGeom>
+          <a:noFill/>
+        </p:spPr>
+        <p:txBody>
+          <a:bodyPr wrap="none" lIns="0" tIns="0" rIns="0" bIns="0" rtlCol="0" anchor="t">
+            <a:noAutofit/>
+          </a:bodyPr>
+          <a:lstStyle/>
+          <a:p>
+            <a:pPr marL="0" indent="0">
+              <a:buNone/>
+            </a:pPr>
+            <a:r>
+              <a:rPr lang="pt-BR" sz="1300" dirty="0">
+                <a:solidFill>
+                  <a:srgbClr val="7DCFFF"/>
+                </a:solidFill>
+                <a:latin typeface="Courier New" pitchFamily="49" charset="0"/>
+                <a:ea typeface="Courier New" pitchFamily="49" charset="0"/>
+                <a:cs typeface="Courier New" pitchFamily="49" charset="0"/>
+              </a:rPr>
+              <a:t>if</a:t>
+            </a:r>
+            <a:r>
+              <a:rPr lang="pt-BR" sz="1300" dirty="0">
+                <a:solidFill>
+                  <a:srgbClr val="E6EDF3"/>
+                </a:solidFill>
+                <a:latin typeface="Courier New" pitchFamily="49" charset="0"/>
+                <a:ea typeface="Courier New" pitchFamily="49" charset="0"/>
+                <a:cs typeface="Courier New" pitchFamily="49" charset="0"/>
+              </a:rPr>
+              <a:t xml:space="preserve"> </a:t>
+            </a:r>
+            <a:r>
+              <a:rPr lang="pt-BR" sz="1300" dirty="0">
+                <a:solidFill>
+                  <a:srgbClr val="7DCFFF"/>
+                </a:solidFill>
+                <a:latin typeface="Courier New" pitchFamily="49" charset="0"/>
+                <a:ea typeface="Courier New" pitchFamily="49" charset="0"/>
+                <a:cs typeface="Courier New" pitchFamily="49" charset="0"/>
+              </a:rPr>
+              <a:t>not</a:t>
+            </a:r>
+            <a:r>
+              <a:rPr lang="pt-BR" sz="1300" dirty="0">
+                <a:solidFill>
+                  <a:srgbClr val="E6EDF3"/>
+                </a:solidFill>
+                <a:latin typeface="Courier New" pitchFamily="49" charset="0"/>
+                <a:ea typeface="Courier New" pitchFamily="49" charset="0"/>
+                <a:cs typeface="Courier New" pitchFamily="49" charset="0"/>
+              </a:rPr>
+              <a:t xml:space="preserve"> request.user.is_authenticated:</a:t>
+            </a:r>
+            <a:endParaRPr lang="pt-BR" sz="1300" dirty="0"/>
+          </a:p>
+          <a:p>
+            <a:pPr marL="0" indent="0">
+              <a:buNone/>
+            </a:pPr>
+            <a:r>
+              <a:rPr lang="pt-BR" sz="1300" dirty="0">
+                <a:solidFill>
+                  <a:srgbClr val="E6EDF3"/>
+                </a:solidFill>
+                <a:latin typeface="Courier New" pitchFamily="49" charset="0"/>
+                <a:ea typeface="Courier New" pitchFamily="49" charset="0"/>
+                <a:cs typeface="Courier New" pitchFamily="49" charset="0"/>
+              </a:rPr>
+              <a:t xml:space="preserve">    </a:t>
+            </a:r>
+            <a:r>
+              <a:rPr lang="pt-BR" sz="1300" dirty="0">
+                <a:solidFill>
+                  <a:srgbClr val="7DCFFF"/>
+                </a:solidFill>
+                <a:latin typeface="Courier New" pitchFamily="49" charset="0"/>
+                <a:ea typeface="Courier New" pitchFamily="49" charset="0"/>
+                <a:cs typeface="Courier New" pitchFamily="49" charset="0"/>
+              </a:rPr>
+              <a:t>return</a:t>
+            </a:r>
+            <a:r>
+              <a:rPr lang="pt-BR" sz="1300" dirty="0">
+                <a:solidFill>
+                  <a:srgbClr val="E6EDF3"/>
+                </a:solidFill>
+                <a:latin typeface="Courier New" pitchFamily="49" charset="0"/>
+                <a:ea typeface="Courier New" pitchFamily="49" charset="0"/>
+                <a:cs typeface="Courier New" pitchFamily="49" charset="0"/>
+              </a:rPr>
+              <a:t xml:space="preserve"> redirect_to_login(request.get_full_path())</a:t>
+            </a:r>
+            <a:r>
+              <a:rPr lang="pt-BR" sz="1300" i="1" dirty="0">
+                <a:solidFill>
+                  <a:srgbClr val="8B949E"/>
+                </a:solidFill>
+                <a:latin typeface="Courier New" pitchFamily="49" charset="0"/>
+                <a:ea typeface="Courier New" pitchFamily="49" charset="0"/>
+                <a:cs typeface="Courier New" pitchFamily="49" charset="0"/>
+              </a:rPr>
+              <a:t xml:space="preserve">   # login</a:t>
+            </a:r>
+            <a:endParaRPr lang="pt-BR" sz="1300" dirty="0"/>
+          </a:p>
+          <a:p>
+            <a:pPr marL="0" indent="0">
+              <a:buNone/>
+            </a:pPr>
+            <a:r>
+              <a:rPr lang="pt-BR" sz="1300" dirty="0">
+                <a:solidFill>
+                  <a:srgbClr val="7DCFFF"/>
+                </a:solidFill>
+                <a:latin typeface="Courier New" pitchFamily="49" charset="0"/>
+                <a:ea typeface="Courier New" pitchFamily="49" charset="0"/>
+                <a:cs typeface="Courier New" pitchFamily="49" charset="0"/>
+              </a:rPr>
+              <a:t>if</a:t>
+            </a:r>
+            <a:r>
+              <a:rPr lang="pt-BR" sz="1300" dirty="0">
+                <a:solidFill>
+                  <a:srgbClr val="E6EDF3"/>
+                </a:solidFill>
+                <a:latin typeface="Courier New" pitchFamily="49" charset="0"/>
+                <a:ea typeface="Courier New" pitchFamily="49" charset="0"/>
+                <a:cs typeface="Courier New" pitchFamily="49" charset="0"/>
+              </a:rPr>
+              <a:t xml:space="preserve"> </a:t>
+            </a:r>
+            <a:r>
+              <a:rPr lang="pt-BR" sz="1300" dirty="0">
+                <a:solidFill>
+                  <a:srgbClr val="7DCFFF"/>
+                </a:solidFill>
+                <a:latin typeface="Courier New" pitchFamily="49" charset="0"/>
+                <a:ea typeface="Courier New" pitchFamily="49" charset="0"/>
+                <a:cs typeface="Courier New" pitchFamily="49" charset="0"/>
+              </a:rPr>
+              <a:t>not</a:t>
+            </a:r>
+            <a:r>
+              <a:rPr lang="pt-BR" sz="1300" dirty="0">
+                <a:solidFill>
+                  <a:srgbClr val="E6EDF3"/>
+                </a:solidFill>
+                <a:latin typeface="Courier New" pitchFamily="49" charset="0"/>
+                <a:ea typeface="Courier New" pitchFamily="49" charset="0"/>
+                <a:cs typeface="Courier New" pitchFamily="49" charset="0"/>
+              </a:rPr>
+              <a:t xml:space="preserve"> request.user.eh_coordenacao:</a:t>
+            </a:r>
+            <a:endParaRPr lang="pt-BR" sz="1300" dirty="0"/>
+          </a:p>
+          <a:p>
+            <a:pPr marL="0" indent="0">
+              <a:buNone/>
+            </a:pPr>
+            <a:r>
+              <a:rPr lang="pt-BR" sz="1300" dirty="0">
+                <a:solidFill>
+                  <a:srgbClr val="E6EDF3"/>
+                </a:solidFill>
+                <a:latin typeface="Courier New" pitchFamily="49" charset="0"/>
+                <a:ea typeface="Courier New" pitchFamily="49" charset="0"/>
+                <a:cs typeface="Courier New" pitchFamily="49" charset="0"/>
+              </a:rPr>
+              <a:t xml:space="preserve">    </a:t>
+            </a:r>
+            <a:r>
+              <a:rPr lang="pt-BR" sz="1300" dirty="0">
+                <a:solidFill>
+                  <a:srgbClr val="7DCFFF"/>
+                </a:solidFill>
+                <a:latin typeface="Courier New" pitchFamily="49" charset="0"/>
+                <a:ea typeface="Courier New" pitchFamily="49" charset="0"/>
+                <a:cs typeface="Courier New" pitchFamily="49" charset="0"/>
+              </a:rPr>
+              <a:t>raise</a:t>
+            </a:r>
+            <a:r>
+              <a:rPr lang="pt-BR" sz="1300" dirty="0">
+                <a:solidFill>
+                  <a:srgbClr val="E6EDF3"/>
+                </a:solidFill>
+                <a:latin typeface="Courier New" pitchFamily="49" charset="0"/>
+                <a:ea typeface="Courier New" pitchFamily="49" charset="0"/>
+                <a:cs typeface="Courier New" pitchFamily="49" charset="0"/>
+              </a:rPr>
+              <a:t xml:space="preserve"> PermissionDenied(</a:t>
+            </a:r>
+            <a:r>
+              <a:rPr lang="pt-BR" sz="1300" dirty="0">
+                <a:solidFill>
+                  <a:srgbClr val="F0C674"/>
+                </a:solidFill>
+                <a:latin typeface="Courier New" pitchFamily="49" charset="0"/>
+                <a:ea typeface="Courier New" pitchFamily="49" charset="0"/>
+                <a:cs typeface="Courier New" pitchFamily="49" charset="0"/>
+              </a:rPr>
+              <a:t>"Acesso restrito a coordenacao."</a:t>
+            </a:r>
+            <a:r>
+              <a:rPr lang="pt-BR" sz="1300" dirty="0">
+                <a:solidFill>
+                  <a:srgbClr val="E6EDF3"/>
+                </a:solidFill>
+                <a:latin typeface="Courier New" pitchFamily="49" charset="0"/>
+                <a:ea typeface="Courier New" pitchFamily="49" charset="0"/>
+                <a:cs typeface="Courier New" pitchFamily="49" charset="0"/>
+              </a:rPr>
+              <a:t>)</a:t>
+            </a:r>
+            <a:r>
+              <a:rPr lang="pt-BR" sz="1300" i="1" dirty="0">
+                <a:solidFill>
+                  <a:srgbClr val="8B949E"/>
+                </a:solidFill>
+                <a:latin typeface="Courier New" pitchFamily="49" charset="0"/>
+                <a:ea typeface="Courier New" pitchFamily="49" charset="0"/>
+                <a:cs typeface="Courier New" pitchFamily="49" charset="0"/>
+              </a:rPr>
+              <a:t xml:space="preserve">   # 403</a:t>
+            </a:r>
+            <a:endParaRPr lang="pt-BR" sz="1300" dirty="0"/>
           </a:p>
         </p:txBody>
       </p:sp>
@@ -30672,11 +32064,11 @@
                     <a:p>
                       <a:pPr algn="l"/>
                       <a:r>
-                        <a:rPr sz="1400" b="0" i="0">
+                        <a:rPr sz="1250" b="0" i="0">
                           <a:solidFill>
                             <a:srgbClr val="00397B"/>
                           </a:solidFill>
-                          <a:latin typeface="Consolas"/>
+                          <a:latin typeface="Courier New" pitchFamily="49" charset="0"/>
                         </a:rPr>
                         <a:t>sqlite3.connect()</a:t>
                       </a:r>
@@ -30689,11 +32081,11 @@
                         <a:t> e </a:t>
                       </a:r>
                       <a:r>
-                        <a:rPr sz="1400" b="0" i="0">
+                        <a:rPr sz="1250" b="0" i="0">
                           <a:solidFill>
                             <a:srgbClr val="00397B"/>
                           </a:solidFill>
-                          <a:latin typeface="Consolas"/>
+                          <a:latin typeface="Courier New" pitchFamily="49" charset="0"/>
                         </a:rPr>
                         <a:t>close()</a:t>
                       </a:r>
@@ -30720,11 +32112,11 @@
                     <a:p>
                       <a:pPr algn="l"/>
                       <a:r>
-                        <a:rPr sz="1400" b="0" i="0">
+                        <a:rPr sz="1250" b="0" i="0">
                           <a:solidFill>
                             <a:srgbClr val="00397B"/>
                           </a:solidFill>
-                          <a:latin typeface="Consolas"/>
+                          <a:latin typeface="Courier New" pitchFamily="49" charset="0"/>
                         </a:rPr>
                         <a:t>DATABASES</a:t>
                       </a:r>
@@ -30737,11 +32129,11 @@
                         <a:t> descrito uma vez no </a:t>
                       </a:r>
                       <a:r>
-                        <a:rPr sz="1400" b="0" i="0">
+                        <a:rPr sz="1250" b="0" i="0">
                           <a:solidFill>
                             <a:srgbClr val="00397B"/>
                           </a:solidFill>
-                          <a:latin typeface="Consolas"/>
+                          <a:latin typeface="Courier New" pitchFamily="49" charset="0"/>
                         </a:rPr>
                         <a:t>settings.py</a:t>
                       </a:r>
@@ -30767,11 +32159,11 @@
                     <a:p>
                       <a:pPr algn="l"/>
                       <a:r>
-                        <a:rPr sz="1400" b="0" i="0">
+                        <a:rPr sz="1250" b="0" i="0">
                           <a:solidFill>
                             <a:srgbClr val="00397B"/>
                           </a:solidFill>
-                          <a:latin typeface="Consolas"/>
+                          <a:latin typeface="Courier New" pitchFamily="49" charset="0"/>
                         </a:rPr>
                         <a:t>CREATE TABLE aluno (...)</a:t>
                       </a:r>
@@ -30790,11 +32182,11 @@
                     <a:p>
                       <a:pPr algn="l"/>
                       <a:r>
-                        <a:rPr sz="1400" b="0" i="0">
+                        <a:rPr sz="1250" b="0" i="0">
                           <a:solidFill>
                             <a:srgbClr val="00397B"/>
                           </a:solidFill>
-                          <a:latin typeface="Consolas"/>
+                          <a:latin typeface="Courier New" pitchFamily="49" charset="0"/>
                         </a:rPr>
                         <a:t>class Aluno(models.Model)</a:t>
                       </a:r>
@@ -30807,11 +32199,11 @@
                         <a:t> + </a:t>
                       </a:r>
                       <a:r>
-                        <a:rPr sz="1400" b="0" i="0">
+                        <a:rPr sz="1250" b="0" i="0">
                           <a:solidFill>
                             <a:srgbClr val="00397B"/>
                           </a:solidFill>
-                          <a:latin typeface="Consolas"/>
+                          <a:latin typeface="Courier New" pitchFamily="49" charset="0"/>
                         </a:rPr>
                         <a:t>migrate</a:t>
                       </a:r>
@@ -30837,11 +32229,11 @@
                     <a:p>
                       <a:pPr algn="l"/>
                       <a:r>
-                        <a:rPr sz="1400" b="0" i="0">
+                        <a:rPr sz="1250" b="0" i="0">
                           <a:solidFill>
                             <a:srgbClr val="00397B"/>
                           </a:solidFill>
-                          <a:latin typeface="Consolas"/>
+                          <a:latin typeface="Courier New" pitchFamily="49" charset="0"/>
                         </a:rPr>
                         <a:t>INSERT ... VALUES (?, ?)</a:t>
                       </a:r>
@@ -30854,11 +32246,11 @@
                         <a:t> + </a:t>
                       </a:r>
                       <a:r>
-                        <a:rPr sz="1400" b="0" i="0">
+                        <a:rPr sz="1250" b="0" i="0">
                           <a:solidFill>
                             <a:srgbClr val="00397B"/>
                           </a:solidFill>
-                          <a:latin typeface="Consolas"/>
+                          <a:latin typeface="Courier New" pitchFamily="49" charset="0"/>
                         </a:rPr>
                         <a:t>commit()</a:t>
                       </a:r>
@@ -30877,11 +32269,11 @@
                     <a:p>
                       <a:pPr algn="l"/>
                       <a:r>
-                        <a:rPr sz="1400" b="0" i="0">
+                        <a:rPr sz="1250" b="0" i="0">
                           <a:solidFill>
                             <a:srgbClr val="00397B"/>
                           </a:solidFill>
-                          <a:latin typeface="Consolas"/>
+                          <a:latin typeface="Courier New" pitchFamily="49" charset="0"/>
                         </a:rPr>
                         <a:t>form.save()</a:t>
                       </a:r>
@@ -30915,11 +32307,11 @@
                     <a:p>
                       <a:pPr algn="l"/>
                       <a:r>
-                        <a:rPr sz="1400" b="0" i="0">
+                        <a:rPr sz="1250" b="0" i="0">
                           <a:solidFill>
                             <a:srgbClr val="00397B"/>
                           </a:solidFill>
-                          <a:latin typeface="Consolas"/>
+                          <a:latin typeface="Courier New" pitchFamily="49" charset="0"/>
                         </a:rPr>
                         <a:t>SELECT ... WHERE nome LIKE ?</a:t>
                       </a:r>
@@ -30938,11 +32330,11 @@
                     <a:p>
                       <a:pPr algn="l"/>
                       <a:r>
-                        <a:rPr sz="1400" b="0" i="0">
+                        <a:rPr sz="1250" b="0" i="0">
                           <a:solidFill>
                             <a:srgbClr val="00397B"/>
                           </a:solidFill>
-                          <a:latin typeface="Consolas"/>
+                          <a:latin typeface="Courier New" pitchFamily="49" charset="0"/>
                         </a:rPr>
                         <a:t>Aluno.objects.filter(nome__icontains=...)</a:t>
                       </a:r>
@@ -30968,11 +32360,11 @@
                     <a:p>
                       <a:pPr algn="l"/>
                       <a:r>
-                        <a:rPr sz="1400" b="0" i="0">
+                        <a:rPr sz="1250" b="0" i="0">
                           <a:solidFill>
                             <a:srgbClr val="00397B"/>
                           </a:solidFill>
-                          <a:latin typeface="Consolas"/>
+                          <a:latin typeface="Courier New" pitchFamily="49" charset="0"/>
                         </a:rPr>
                         <a:t>PRAGMA foreign_keys = ON</a:t>
                       </a:r>
@@ -31028,11 +32420,11 @@
                         <a:t>menu </a:t>
                       </a:r>
                       <a:r>
-                        <a:rPr sz="1400" b="0" i="0">
+                        <a:rPr sz="1250" b="0" i="0">
                           <a:solidFill>
                             <a:srgbClr val="00397B"/>
                           </a:solidFill>
-                          <a:latin typeface="Consolas"/>
+                          <a:latin typeface="Courier New" pitchFamily="49" charset="0"/>
                         </a:rPr>
                         <a:t>while True</a:t>
                       </a:r>
@@ -31045,11 +32437,11 @@
                         <a:t> / </a:t>
                       </a:r>
                       <a:r>
-                        <a:rPr sz="1400" b="0" i="0">
+                        <a:rPr sz="1250" b="0" i="0">
                           <a:solidFill>
                             <a:srgbClr val="00397B"/>
                           </a:solidFill>
-                          <a:latin typeface="Consolas"/>
+                          <a:latin typeface="Courier New" pitchFamily="49" charset="0"/>
                         </a:rPr>
                         <a:t>if opcao == "1"</a:t>
                       </a:r>
@@ -31068,11 +32460,11 @@
                     <a:p>
                       <a:pPr algn="l"/>
                       <a:r>
-                        <a:rPr sz="1400" b="0" i="0">
+                        <a:rPr sz="1250" b="0" i="0">
                           <a:solidFill>
                             <a:srgbClr val="00397B"/>
                           </a:solidFill>
-                          <a:latin typeface="Consolas"/>
+                          <a:latin typeface="Courier New" pitchFamily="49" charset="0"/>
                         </a:rPr>
                         <a:t>urls.py</a:t>
                       </a:r>
@@ -31106,11 +32498,11 @@
                     <a:p>
                       <a:pPr algn="l"/>
                       <a:r>
-                        <a:rPr sz="1400" b="0" i="0">
+                        <a:rPr sz="1250" b="0" i="0">
                           <a:solidFill>
                             <a:srgbClr val="00397B"/>
                           </a:solidFill>
-                          <a:latin typeface="Consolas"/>
+                          <a:latin typeface="Courier New" pitchFamily="49" charset="0"/>
                         </a:rPr>
                         <a:t>print()</a:t>
                       </a:r>
@@ -31123,11 +32515,11 @@
                         <a:t> e </a:t>
                       </a:r>
                       <a:r>
-                        <a:rPr sz="1400" b="0" i="0">
+                        <a:rPr sz="1250" b="0" i="0">
                           <a:solidFill>
                             <a:srgbClr val="00397B"/>
                           </a:solidFill>
-                          <a:latin typeface="Consolas"/>
+                          <a:latin typeface="Courier New" pitchFamily="49" charset="0"/>
                         </a:rPr>
                         <a:t>input()</a:t>
                       </a:r>
@@ -31418,7 +32810,7 @@
           <a:noFill/>
         </p:spPr>
         <p:txBody>
-          <a:bodyPr wrap="square" lIns="0" tIns="18288" rIns="0" bIns="18288" anchor="t">
+          <a:bodyPr wrap="none" lIns="0" tIns="18288" rIns="0" bIns="18288" anchor="t">
             <a:noAutofit/>
           </a:bodyPr>
           <a:lstStyle/>
@@ -31429,7 +32821,7 @@
                 <a:solidFill>
                   <a:srgbClr val="1185AA"/>
                 </a:solidFill>
-                <a:latin typeface="Consolas"/>
+                <a:latin typeface="Courier New" pitchFamily="49" charset="0"/>
               </a:rPr>
               <a:t>models.py</a:t>
             </a:r>
@@ -31671,7 +33063,7 @@
           <a:noFill/>
         </p:spPr>
         <p:txBody>
-          <a:bodyPr wrap="square" lIns="0" tIns="18288" rIns="0" bIns="18288" anchor="t">
+          <a:bodyPr wrap="none" lIns="0" tIns="18288" rIns="0" bIns="18288" anchor="t">
             <a:noAutofit/>
           </a:bodyPr>
           <a:lstStyle/>
@@ -31682,7 +33074,7 @@
                 <a:solidFill>
                   <a:srgbClr val="1185AA"/>
                 </a:solidFill>
-                <a:latin typeface="Consolas"/>
+                <a:latin typeface="Courier New" pitchFamily="49" charset="0"/>
               </a:rPr>
               <a:t>views.py</a:t>
             </a:r>
@@ -31924,7 +33316,7 @@
           <a:noFill/>
         </p:spPr>
         <p:txBody>
-          <a:bodyPr wrap="square" lIns="0" tIns="18288" rIns="0" bIns="18288" anchor="t">
+          <a:bodyPr wrap="none" lIns="0" tIns="18288" rIns="0" bIns="18288" anchor="t">
             <a:noAutofit/>
           </a:bodyPr>
           <a:lstStyle/>
@@ -31935,7 +33327,7 @@
                 <a:solidFill>
                   <a:srgbClr val="1185AA"/>
                 </a:solidFill>
-                <a:latin typeface="Consolas"/>
+                <a:latin typeface="Courier New" pitchFamily="49" charset="0"/>
               </a:rPr>
               <a:t>templates/*.html</a:t>
             </a:r>
@@ -32158,11 +33550,11 @@
               <a:t>URLs  </a:t>
             </a:r>
             <a:r>
-              <a:rPr sz="1300" b="0" i="0">
+              <a:rPr sz="1150" b="0" i="0">
                 <a:solidFill>
                   <a:srgbClr val="1185AA"/>
                 </a:solidFill>
-                <a:latin typeface="Consolas"/>
+                <a:latin typeface="Courier New" pitchFamily="49" charset="0"/>
               </a:rPr>
               <a:t>urls.py</a:t>
             </a:r>
@@ -32351,11 +33743,11 @@
               <a:t>Forms  </a:t>
             </a:r>
             <a:r>
-              <a:rPr sz="1300" b="0" i="0">
+              <a:rPr sz="1150" b="0" i="0">
                 <a:solidFill>
                   <a:srgbClr val="1185AA"/>
                 </a:solidFill>
-                <a:latin typeface="Consolas"/>
+                <a:latin typeface="Courier New" pitchFamily="49" charset="0"/>
               </a:rPr>
               <a:t>forms.py</a:t>
             </a:r>
@@ -34531,7 +35923,7 @@
           <a:noFill/>
         </p:spPr>
         <p:txBody>
-          <a:bodyPr wrap="square" lIns="0" tIns="18288" rIns="0" bIns="18288" anchor="t">
+          <a:bodyPr wrap="none" lIns="0" tIns="18288" rIns="0" bIns="18288" anchor="t">
             <a:noAutofit/>
           </a:bodyPr>
           <a:lstStyle/>
@@ -34542,7 +35934,7 @@
                 <a:solidFill>
                   <a:srgbClr val="9AA5B1"/>
                 </a:solidFill>
-                <a:latin typeface="Consolas"/>
+                <a:latin typeface="Courier New" pitchFamily="49" charset="0"/>
               </a:rPr>
               <a:t>projetoPython/</a:t>
             </a:r>
@@ -34566,7 +35958,7 @@
           <a:noFill/>
         </p:spPr>
         <p:txBody>
-          <a:bodyPr wrap="square" lIns="0" tIns="18288" rIns="0" bIns="18288" anchor="t">
+          <a:bodyPr wrap="none" lIns="0" tIns="18288" rIns="0" bIns="18288" anchor="t">
             <a:noAutofit/>
           </a:bodyPr>
           <a:lstStyle/>
@@ -34577,7 +35969,7 @@
                 <a:solidFill>
                   <a:srgbClr val="FFFFFF"/>
                 </a:solidFill>
-                <a:latin typeface="Consolas"/>
+                <a:latin typeface="Courier New" pitchFamily="49" charset="0"/>
               </a:rPr>
               <a:t>manage.py</a:t>
             </a:r>
@@ -34586,7 +35978,7 @@
                 <a:solidFill>
                   <a:srgbClr val="E6EDF3"/>
                 </a:solidFill>
-                <a:latin typeface="Consolas"/>
+                <a:latin typeface="Courier New" pitchFamily="49" charset="0"/>
               </a:rPr>
               <a:t>        </a:t>
             </a:r>
@@ -34595,7 +35987,7 @@
                 <a:solidFill>
                   <a:srgbClr val="8B98A5"/>
                 </a:solidFill>
-                <a:latin typeface="Consolas"/>
+                <a:latin typeface="Courier New" pitchFamily="49" charset="0"/>
               </a:rPr>
               <a:t>comandos do Django</a:t>
             </a:r>
@@ -34607,7 +35999,7 @@
                 <a:solidFill>
                   <a:srgbClr val="FFFFFF"/>
                 </a:solidFill>
-                <a:latin typeface="Consolas"/>
+                <a:latin typeface="Courier New" pitchFamily="49" charset="0"/>
               </a:rPr>
               <a:t>verificar.py</a:t>
             </a:r>
@@ -34616,7 +36008,7 @@
                 <a:solidFill>
                   <a:srgbClr val="E6EDF3"/>
                 </a:solidFill>
-                <a:latin typeface="Consolas"/>
+                <a:latin typeface="Courier New" pitchFamily="49" charset="0"/>
               </a:rPr>
               <a:t>     </a:t>
             </a:r>
@@ -34625,7 +36017,7 @@
                 <a:solidFill>
                   <a:srgbClr val="8B98A5"/>
                 </a:solidFill>
-                <a:latin typeface="Consolas"/>
+                <a:latin typeface="Courier New" pitchFamily="49" charset="0"/>
               </a:rPr>
               <a:t>placar dos TODOs</a:t>
             </a:r>
@@ -34637,7 +36029,7 @@
                 <a:solidFill>
                   <a:srgbClr val="FFFFFF"/>
                 </a:solidFill>
-                <a:latin typeface="Consolas"/>
+                <a:latin typeface="Courier New" pitchFamily="49" charset="0"/>
               </a:rPr>
               <a:t>config/</a:t>
             </a:r>
@@ -34646,7 +36038,7 @@
                 <a:solidFill>
                   <a:srgbClr val="E6EDF3"/>
                 </a:solidFill>
-                <a:latin typeface="Consolas"/>
+                <a:latin typeface="Courier New" pitchFamily="49" charset="0"/>
               </a:rPr>
               <a:t>          </a:t>
             </a:r>
@@ -34655,7 +36047,7 @@
                 <a:solidFill>
                   <a:srgbClr val="8B98A5"/>
                 </a:solidFill>
-                <a:latin typeface="Consolas"/>
+                <a:latin typeface="Courier New" pitchFamily="49" charset="0"/>
               </a:rPr>
               <a:t>configuração geral</a:t>
             </a:r>
@@ -34667,7 +36059,7 @@
                 <a:solidFill>
                   <a:srgbClr val="FFFFFF"/>
                 </a:solidFill>
-                <a:latin typeface="Consolas"/>
+                <a:latin typeface="Courier New" pitchFamily="49" charset="0"/>
               </a:rPr>
               <a:t>  settings.py</a:t>
             </a:r>
@@ -34676,7 +36068,7 @@
                 <a:solidFill>
                   <a:srgbClr val="E6EDF3"/>
                 </a:solidFill>
-                <a:latin typeface="Consolas"/>
+                <a:latin typeface="Courier New" pitchFamily="49" charset="0"/>
               </a:rPr>
               <a:t>    </a:t>
             </a:r>
@@ -34685,7 +36077,7 @@
                 <a:solidFill>
                   <a:srgbClr val="8B98A5"/>
                 </a:solidFill>
-                <a:latin typeface="Consolas"/>
+                <a:latin typeface="Courier New" pitchFamily="49" charset="0"/>
               </a:rPr>
               <a:t>apps, banco, login</a:t>
             </a:r>
@@ -34697,7 +36089,7 @@
                 <a:solidFill>
                   <a:srgbClr val="FFFFFF"/>
                 </a:solidFill>
-                <a:latin typeface="Consolas"/>
+                <a:latin typeface="Courier New" pitchFamily="49" charset="0"/>
               </a:rPr>
               <a:t>  urls.py</a:t>
             </a:r>
@@ -34706,7 +36098,7 @@
                 <a:solidFill>
                   <a:srgbClr val="E6EDF3"/>
                 </a:solidFill>
-                <a:latin typeface="Consolas"/>
+                <a:latin typeface="Courier New" pitchFamily="49" charset="0"/>
               </a:rPr>
               <a:t>        </a:t>
             </a:r>
@@ -34715,7 +36107,7 @@
                 <a:solidFill>
                   <a:srgbClr val="8B98A5"/>
                 </a:solidFill>
-                <a:latin typeface="Consolas"/>
+                <a:latin typeface="Courier New" pitchFamily="49" charset="0"/>
               </a:rPr>
               <a:t>entrada de toda URL</a:t>
             </a:r>
@@ -34727,7 +36119,7 @@
                 <a:solidFill>
                   <a:srgbClr val="FFFFFF"/>
                 </a:solidFill>
-                <a:latin typeface="Consolas"/>
+                <a:latin typeface="Courier New" pitchFamily="49" charset="0"/>
               </a:rPr>
               <a:t>contas/</a:t>
             </a:r>
@@ -34736,7 +36128,7 @@
                 <a:solidFill>
                   <a:srgbClr val="E6EDF3"/>
                 </a:solidFill>
-                <a:latin typeface="Consolas"/>
+                <a:latin typeface="Courier New" pitchFamily="49" charset="0"/>
               </a:rPr>
               <a:t>          </a:t>
             </a:r>
@@ -34745,7 +36137,7 @@
                 <a:solidFill>
                   <a:srgbClr val="8B98A5"/>
                 </a:solidFill>
-                <a:latin typeface="Consolas"/>
+                <a:latin typeface="Courier New" pitchFamily="49" charset="0"/>
               </a:rPr>
               <a:t>PRONTO: a referência</a:t>
             </a:r>
@@ -34757,7 +36149,7 @@
                 <a:solidFill>
                   <a:srgbClr val="FFFFFF"/>
                 </a:solidFill>
-                <a:latin typeface="Consolas"/>
+                <a:latin typeface="Courier New" pitchFamily="49" charset="0"/>
               </a:rPr>
               <a:t>academico/</a:t>
             </a:r>
@@ -34766,7 +36158,7 @@
                 <a:solidFill>
                   <a:srgbClr val="E6EDF3"/>
                 </a:solidFill>
-                <a:latin typeface="Consolas"/>
+                <a:latin typeface="Courier New" pitchFamily="49" charset="0"/>
               </a:rPr>
               <a:t>       </a:t>
             </a:r>
@@ -34775,7 +36167,7 @@
                 <a:solidFill>
                   <a:srgbClr val="8B98A5"/>
                 </a:solidFill>
-                <a:latin typeface="Consolas"/>
+                <a:latin typeface="Courier New" pitchFamily="49" charset="0"/>
               </a:rPr>
               <a:t>vocês implementam</a:t>
             </a:r>
@@ -34787,7 +36179,7 @@
                 <a:solidFill>
                   <a:srgbClr val="FFFFFF"/>
                 </a:solidFill>
-                <a:latin typeface="Consolas"/>
+                <a:latin typeface="Courier New" pitchFamily="49" charset="0"/>
               </a:rPr>
               <a:t>templates/</a:t>
             </a:r>
@@ -34796,7 +36188,7 @@
                 <a:solidFill>
                   <a:srgbClr val="E6EDF3"/>
                 </a:solidFill>
-                <a:latin typeface="Consolas"/>
+                <a:latin typeface="Courier New" pitchFamily="49" charset="0"/>
               </a:rPr>
               <a:t>       </a:t>
             </a:r>
@@ -34805,7 +36197,7 @@
                 <a:solidFill>
                   <a:srgbClr val="8B98A5"/>
                 </a:solidFill>
-                <a:latin typeface="Consolas"/>
+                <a:latin typeface="Courier New" pitchFamily="49" charset="0"/>
               </a:rPr>
               <a:t>HTML, já pronto</a:t>
             </a:r>
@@ -34817,7 +36209,7 @@
                 <a:solidFill>
                   <a:srgbClr val="FFFFFF"/>
                 </a:solidFill>
-                <a:latin typeface="Consolas"/>
+                <a:latin typeface="Courier New" pitchFamily="49" charset="0"/>
               </a:rPr>
               <a:t>static/</a:t>
             </a:r>
@@ -34826,7 +36218,7 @@
                 <a:solidFill>
                   <a:srgbClr val="E6EDF3"/>
                 </a:solidFill>
-                <a:latin typeface="Consolas"/>
+                <a:latin typeface="Courier New" pitchFamily="49" charset="0"/>
               </a:rPr>
               <a:t>          </a:t>
             </a:r>
@@ -34835,7 +36227,7 @@
                 <a:solidFill>
                   <a:srgbClr val="8B98A5"/>
                 </a:solidFill>
-                <a:latin typeface="Consolas"/>
+                <a:latin typeface="Courier New" pitchFamily="49" charset="0"/>
               </a:rPr>
               <a:t>Bootstrap local</a:t>
             </a:r>
@@ -34847,7 +36239,7 @@
                 <a:solidFill>
                   <a:srgbClr val="FFFFFF"/>
                 </a:solidFill>
-                <a:latin typeface="Consolas"/>
+                <a:latin typeface="Courier New" pitchFamily="49" charset="0"/>
               </a:rPr>
               <a:t>material/</a:t>
             </a:r>
@@ -34856,7 +36248,7 @@
                 <a:solidFill>
                   <a:srgbClr val="E6EDF3"/>
                 </a:solidFill>
-                <a:latin typeface="Consolas"/>
+                <a:latin typeface="Courier New" pitchFamily="49" charset="0"/>
               </a:rPr>
               <a:t>        </a:t>
             </a:r>
@@ -34865,7 +36257,7 @@
                 <a:solidFill>
                   <a:srgbClr val="8B98A5"/>
                 </a:solidFill>
-                <a:latin typeface="Consolas"/>
+                <a:latin typeface="Courier New" pitchFamily="49" charset="0"/>
               </a:rPr>
               <a:t>11 textos de estudo</a:t>
             </a:r>
@@ -35012,11 +36404,11 @@
           <a:p>
             <a:pPr algn="l"/>
             <a:r>
-              <a:rPr sz="1800" b="1" i="0">
+              <a:rPr sz="1650" b="1" i="0">
                 <a:solidFill>
                   <a:srgbClr val="00397B"/>
                 </a:solidFill>
-                <a:latin typeface="Consolas"/>
+                <a:latin typeface="Courier New" pitchFamily="49" charset="0"/>
               </a:rPr>
               <a:t>contas/</a:t>
             </a:r>
@@ -35205,11 +36597,11 @@
           <a:p>
             <a:pPr algn="l"/>
             <a:r>
-              <a:rPr sz="1800" b="1" i="0">
+              <a:rPr sz="1650" b="1" i="0">
                 <a:solidFill>
                   <a:srgbClr val="00397B"/>
                 </a:solidFill>
-                <a:latin typeface="Consolas"/>
+                <a:latin typeface="Courier New" pitchFamily="49" charset="0"/>
               </a:rPr>
               <a:t>academico/</a:t>
             </a:r>
